--- a/Reporting/Claude Presents/Deck7_AfterLaunch_Packs/After_Launch_Packs_Locomotives_and_History_Explained.pptx
+++ b/Reporting/Claude Presents/Deck7_AfterLaunch_Packs/After_Launch_Packs_Locomotives_and_History_Explained.pptx
@@ -3288,6 +3288,174 @@
   <p:clrMapOvr>
     <a:masterClrMapping/>
   </p:clrMapOvr>
+  <mc:AlternateContent xmlns:mc="http://schemas.openxmlformats.org/markup-compatibility/2006">
+    <mc:Choice xmlns:p14="http://schemas.microsoft.com/office/powerpoint/2010/main" Requires="p14">
+      <p:transition spd="med" p14:dur="700">
+        <p:fade/>
+      </p:transition>
+    </mc:Choice>
+    <mc:Fallback>
+      <p:transition spd="med">
+        <p:fade/>
+      </p:transition>
+    </mc:Fallback>
+  </mc:AlternateContent>
+  <p:timing>
+    <p:tnLst>
+      <p:par>
+        <p:cTn id="1" dur="indefinite" restart="never" nodeType="tmRoot">
+          <p:childTnLst>
+            <p:seq concurrent="1" nextAc="seek">
+              <p:cTn id="2" dur="indefinite" nodeType="mainSeq">
+                <p:childTnLst>
+                  <p:par>
+                    <p:cTn id="3" fill="hold">
+                      <p:stCondLst>
+                        <p:cond delay="indefinite"/>
+                        <p:cond evt="onBegin" delay="0">
+                          <p:tn val="2"/>
+                        </p:cond>
+                      </p:stCondLst>
+                      <p:childTnLst>
+                        <p:par>
+                          <p:cTn id="4" fill="hold">
+                            <p:stCondLst>
+                              <p:cond delay="0"/>
+                            </p:stCondLst>
+                            <p:childTnLst>
+                              <p:par>
+                                <p:cTn id="5" presetID="10" presetClass="entr" presetSubtype="0" fill="hold" nodeType="afterEffect">
+                                  <p:stCondLst>
+                                    <p:cond delay="0"/>
+                                  </p:stCondLst>
+                                  <p:childTnLst>
+                                    <p:set>
+                                      <p:cBhvr>
+                                        <p:cTn id="6" dur="1" fill="hold">
+                                          <p:stCondLst>
+                                            <p:cond delay="0"/>
+                                          </p:stCondLst>
+                                        </p:cTn>
+                                        <p:tgtEl>
+                                          <p:spTgt spid="3"/>
+                                        </p:tgtEl>
+                                        <p:attrNameLst>
+                                          <p:attrName>style.visibility</p:attrName>
+                                        </p:attrNameLst>
+                                      </p:cBhvr>
+                                      <p:to>
+                                        <p:strVal val="visible"/>
+                                      </p:to>
+                                    </p:set>
+                                    <p:animEffect transition="in" filter="fade">
+                                      <p:cBhvr>
+                                        <p:cTn id="7" dur="500"/>
+                                        <p:tgtEl>
+                                          <p:spTgt spid="3"/>
+                                        </p:tgtEl>
+                                      </p:cBhvr>
+                                    </p:animEffect>
+                                  </p:childTnLst>
+                                </p:cTn>
+                              </p:par>
+                              <p:par>
+                                <p:cTn id="8" presetID="10" presetClass="entr" presetSubtype="0" fill="hold" nodeType="withEffect">
+                                  <p:stCondLst>
+                                    <p:cond delay="300"/>
+                                  </p:stCondLst>
+                                  <p:childTnLst>
+                                    <p:set>
+                                      <p:cBhvr>
+                                        <p:cTn id="9" dur="1" fill="hold">
+                                          <p:stCondLst>
+                                            <p:cond delay="0"/>
+                                          </p:stCondLst>
+                                        </p:cTn>
+                                        <p:tgtEl>
+                                          <p:spTgt spid="4"/>
+                                        </p:tgtEl>
+                                        <p:attrNameLst>
+                                          <p:attrName>style.visibility</p:attrName>
+                                        </p:attrNameLst>
+                                      </p:cBhvr>
+                                      <p:to>
+                                        <p:strVal val="visible"/>
+                                      </p:to>
+                                    </p:set>
+                                    <p:animEffect transition="in" filter="fade">
+                                      <p:cBhvr>
+                                        <p:cTn id="10" dur="500"/>
+                                        <p:tgtEl>
+                                          <p:spTgt spid="4"/>
+                                        </p:tgtEl>
+                                      </p:cBhvr>
+                                    </p:animEffect>
+                                  </p:childTnLst>
+                                </p:cTn>
+                              </p:par>
+                              <p:par>
+                                <p:cTn id="11" presetID="10" presetClass="entr" presetSubtype="0" fill="hold" nodeType="withEffect">
+                                  <p:stCondLst>
+                                    <p:cond delay="600"/>
+                                  </p:stCondLst>
+                                  <p:childTnLst>
+                                    <p:set>
+                                      <p:cBhvr>
+                                        <p:cTn id="12" dur="1" fill="hold">
+                                          <p:stCondLst>
+                                            <p:cond delay="0"/>
+                                          </p:stCondLst>
+                                        </p:cTn>
+                                        <p:tgtEl>
+                                          <p:spTgt spid="5"/>
+                                        </p:tgtEl>
+                                        <p:attrNameLst>
+                                          <p:attrName>style.visibility</p:attrName>
+                                        </p:attrNameLst>
+                                      </p:cBhvr>
+                                      <p:to>
+                                        <p:strVal val="visible"/>
+                                      </p:to>
+                                    </p:set>
+                                    <p:animEffect transition="in" filter="fade">
+                                      <p:cBhvr>
+                                        <p:cTn id="13" dur="500"/>
+                                        <p:tgtEl>
+                                          <p:spTgt spid="5"/>
+                                        </p:tgtEl>
+                                      </p:cBhvr>
+                                    </p:animEffect>
+                                  </p:childTnLst>
+                                </p:cTn>
+                              </p:par>
+                            </p:childTnLst>
+                          </p:cTn>
+                        </p:par>
+                      </p:childTnLst>
+                    </p:cTn>
+                  </p:par>
+                </p:childTnLst>
+              </p:cTn>
+              <p:prevCondLst>
+                <p:cond evt="onPrev" delay="0">
+                  <p:tgtEl>
+                    <p:sldTgt/>
+                  </p:tgtEl>
+                </p:cond>
+              </p:prevCondLst>
+              <p:nextCondLst>
+                <p:cond evt="onNext" delay="0">
+                  <p:tgtEl>
+                    <p:sldTgt/>
+                  </p:tgtEl>
+                </p:cond>
+              </p:nextCondLst>
+            </p:seq>
+          </p:childTnLst>
+        </p:cTn>
+      </p:par>
+    </p:tnLst>
+  </p:timing>
 </p:sld>
 </file>
 
@@ -5934,6 +6102,279 @@
   <p:clrMapOvr>
     <a:masterClrMapping/>
   </p:clrMapOvr>
+  <mc:AlternateContent xmlns:mc="http://schemas.openxmlformats.org/markup-compatibility/2006">
+    <mc:Choice xmlns:p14="http://schemas.microsoft.com/office/powerpoint/2010/main" Requires="p14">
+      <p:transition spd="med" p14:dur="700">
+        <p:fade/>
+      </p:transition>
+    </mc:Choice>
+    <mc:Fallback>
+      <p:transition spd="med">
+        <p:fade/>
+      </p:transition>
+    </mc:Fallback>
+  </mc:AlternateContent>
+  <p:timing>
+    <p:tnLst>
+      <p:par>
+        <p:cTn id="1" dur="indefinite" restart="never" nodeType="tmRoot">
+          <p:childTnLst>
+            <p:seq concurrent="1" nextAc="seek">
+              <p:cTn id="2" dur="indefinite" nodeType="mainSeq">
+                <p:childTnLst>
+                  <p:par>
+                    <p:cTn id="3" fill="hold">
+                      <p:stCondLst>
+                        <p:cond delay="indefinite"/>
+                        <p:cond evt="onBegin" delay="0">
+                          <p:tn val="2"/>
+                        </p:cond>
+                      </p:stCondLst>
+                      <p:childTnLst>
+                        <p:par>
+                          <p:cTn id="4" fill="hold">
+                            <p:stCondLst>
+                              <p:cond delay="0"/>
+                            </p:stCondLst>
+                            <p:childTnLst>
+                              <p:par>
+                                <p:cTn id="5" presetID="10" presetClass="entr" presetSubtype="0" fill="hold" nodeType="afterEffect">
+                                  <p:stCondLst>
+                                    <p:cond delay="0"/>
+                                  </p:stCondLst>
+                                  <p:childTnLst>
+                                    <p:set>
+                                      <p:cBhvr>
+                                        <p:cTn id="6" dur="1" fill="hold">
+                                          <p:stCondLst>
+                                            <p:cond delay="0"/>
+                                          </p:stCondLst>
+                                        </p:cTn>
+                                        <p:tgtEl>
+                                          <p:spTgt spid="4"/>
+                                        </p:tgtEl>
+                                        <p:attrNameLst>
+                                          <p:attrName>style.visibility</p:attrName>
+                                        </p:attrNameLst>
+                                      </p:cBhvr>
+                                      <p:to>
+                                        <p:strVal val="visible"/>
+                                      </p:to>
+                                    </p:set>
+                                    <p:animEffect transition="in" filter="fade">
+                                      <p:cBhvr>
+                                        <p:cTn id="7" dur="500"/>
+                                        <p:tgtEl>
+                                          <p:spTgt spid="4"/>
+                                        </p:tgtEl>
+                                      </p:cBhvr>
+                                    </p:animEffect>
+                                  </p:childTnLst>
+                                </p:cTn>
+                              </p:par>
+                              <p:par>
+                                <p:cTn id="8" presetID="10" presetClass="entr" presetSubtype="0" fill="hold" nodeType="withEffect">
+                                  <p:stCondLst>
+                                    <p:cond delay="300"/>
+                                  </p:stCondLst>
+                                  <p:childTnLst>
+                                    <p:set>
+                                      <p:cBhvr>
+                                        <p:cTn id="9" dur="1" fill="hold">
+                                          <p:stCondLst>
+                                            <p:cond delay="0"/>
+                                          </p:stCondLst>
+                                        </p:cTn>
+                                        <p:tgtEl>
+                                          <p:spTgt spid="57"/>
+                                        </p:tgtEl>
+                                        <p:attrNameLst>
+                                          <p:attrName>style.visibility</p:attrName>
+                                        </p:attrNameLst>
+                                      </p:cBhvr>
+                                      <p:to>
+                                        <p:strVal val="visible"/>
+                                      </p:to>
+                                    </p:set>
+                                    <p:animEffect transition="in" filter="fade">
+                                      <p:cBhvr>
+                                        <p:cTn id="10" dur="500"/>
+                                        <p:tgtEl>
+                                          <p:spTgt spid="57"/>
+                                        </p:tgtEl>
+                                      </p:cBhvr>
+                                    </p:animEffect>
+                                  </p:childTnLst>
+                                </p:cTn>
+                              </p:par>
+                              <p:par>
+                                <p:cTn id="11" presetID="10" presetClass="entr" presetSubtype="0" fill="hold" nodeType="withEffect">
+                                  <p:stCondLst>
+                                    <p:cond delay="600"/>
+                                  </p:stCondLst>
+                                  <p:childTnLst>
+                                    <p:set>
+                                      <p:cBhvr>
+                                        <p:cTn id="12" dur="1" fill="hold">
+                                          <p:stCondLst>
+                                            <p:cond delay="0"/>
+                                          </p:stCondLst>
+                                        </p:cTn>
+                                        <p:tgtEl>
+                                          <p:spTgt spid="58"/>
+                                        </p:tgtEl>
+                                        <p:attrNameLst>
+                                          <p:attrName>style.visibility</p:attrName>
+                                        </p:attrNameLst>
+                                      </p:cBhvr>
+                                      <p:to>
+                                        <p:strVal val="visible"/>
+                                      </p:to>
+                                    </p:set>
+                                    <p:animEffect transition="in" filter="fade">
+                                      <p:cBhvr>
+                                        <p:cTn id="13" dur="500"/>
+                                        <p:tgtEl>
+                                          <p:spTgt spid="58"/>
+                                        </p:tgtEl>
+                                      </p:cBhvr>
+                                    </p:animEffect>
+                                  </p:childTnLst>
+                                </p:cTn>
+                              </p:par>
+                              <p:par>
+                                <p:cTn id="14" presetID="10" presetClass="entr" presetSubtype="0" fill="hold" nodeType="withEffect">
+                                  <p:stCondLst>
+                                    <p:cond delay="900"/>
+                                  </p:stCondLst>
+                                  <p:childTnLst>
+                                    <p:set>
+                                      <p:cBhvr>
+                                        <p:cTn id="15" dur="1" fill="hold">
+                                          <p:stCondLst>
+                                            <p:cond delay="0"/>
+                                          </p:stCondLst>
+                                        </p:cTn>
+                                        <p:tgtEl>
+                                          <p:spTgt spid="86"/>
+                                        </p:tgtEl>
+                                        <p:attrNameLst>
+                                          <p:attrName>style.visibility</p:attrName>
+                                        </p:attrNameLst>
+                                      </p:cBhvr>
+                                      <p:to>
+                                        <p:strVal val="visible"/>
+                                      </p:to>
+                                    </p:set>
+                                    <p:animEffect transition="in" filter="fade">
+                                      <p:cBhvr>
+                                        <p:cTn id="16" dur="500"/>
+                                        <p:tgtEl>
+                                          <p:spTgt spid="86"/>
+                                        </p:tgtEl>
+                                      </p:cBhvr>
+                                    </p:animEffect>
+                                  </p:childTnLst>
+                                </p:cTn>
+                              </p:par>
+                              <p:par>
+                                <p:cTn id="17" presetID="10" presetClass="entr" presetSubtype="0" fill="hold" nodeType="withEffect">
+                                  <p:stCondLst>
+                                    <p:cond delay="1200"/>
+                                  </p:stCondLst>
+                                  <p:childTnLst>
+                                    <p:set>
+                                      <p:cBhvr>
+                                        <p:cTn id="18" dur="1" fill="hold">
+                                          <p:stCondLst>
+                                            <p:cond delay="0"/>
+                                          </p:stCondLst>
+                                        </p:cTn>
+                                        <p:tgtEl>
+                                          <p:spTgt spid="87"/>
+                                        </p:tgtEl>
+                                        <p:attrNameLst>
+                                          <p:attrName>style.visibility</p:attrName>
+                                        </p:attrNameLst>
+                                      </p:cBhvr>
+                                      <p:to>
+                                        <p:strVal val="visible"/>
+                                      </p:to>
+                                    </p:set>
+                                    <p:animEffect transition="in" filter="fade">
+                                      <p:cBhvr>
+                                        <p:cTn id="19" dur="500"/>
+                                        <p:tgtEl>
+                                          <p:spTgt spid="87"/>
+                                        </p:tgtEl>
+                                      </p:cBhvr>
+                                    </p:animEffect>
+                                  </p:childTnLst>
+                                </p:cTn>
+                              </p:par>
+                              <p:par>
+                                <p:cTn id="20" presetID="10" presetClass="entr" presetSubtype="0" fill="hold" nodeType="withEffect">
+                                  <p:stCondLst>
+                                    <p:cond delay="1500"/>
+                                  </p:stCondLst>
+                                  <p:childTnLst>
+                                    <p:set>
+                                      <p:cBhvr>
+                                        <p:cTn id="21" dur="1" fill="hold">
+                                          <p:stCondLst>
+                                            <p:cond delay="0"/>
+                                          </p:stCondLst>
+                                        </p:cTn>
+                                        <p:tgtEl>
+                                          <p:spTgt spid="88"/>
+                                        </p:tgtEl>
+                                        <p:attrNameLst>
+                                          <p:attrName>style.visibility</p:attrName>
+                                        </p:attrNameLst>
+                                      </p:cBhvr>
+                                      <p:to>
+                                        <p:strVal val="visible"/>
+                                      </p:to>
+                                    </p:set>
+                                    <p:animEffect transition="in" filter="fade">
+                                      <p:cBhvr>
+                                        <p:cTn id="22" dur="500"/>
+                                        <p:tgtEl>
+                                          <p:spTgt spid="88"/>
+                                        </p:tgtEl>
+                                      </p:cBhvr>
+                                    </p:animEffect>
+                                  </p:childTnLst>
+                                </p:cTn>
+                              </p:par>
+                            </p:childTnLst>
+                          </p:cTn>
+                        </p:par>
+                      </p:childTnLst>
+                    </p:cTn>
+                  </p:par>
+                </p:childTnLst>
+              </p:cTn>
+              <p:prevCondLst>
+                <p:cond evt="onPrev" delay="0">
+                  <p:tgtEl>
+                    <p:sldTgt/>
+                  </p:tgtEl>
+                </p:cond>
+              </p:prevCondLst>
+              <p:nextCondLst>
+                <p:cond evt="onNext" delay="0">
+                  <p:tgtEl>
+                    <p:sldTgt/>
+                  </p:tgtEl>
+                </p:cond>
+              </p:nextCondLst>
+            </p:seq>
+          </p:childTnLst>
+        </p:cTn>
+      </p:par>
+    </p:tnLst>
+  </p:timing>
 </p:sld>
 </file>
 
@@ -10165,6 +10606,244 @@
   <p:clrMapOvr>
     <a:masterClrMapping/>
   </p:clrMapOvr>
+  <mc:AlternateContent xmlns:mc="http://schemas.openxmlformats.org/markup-compatibility/2006">
+    <mc:Choice xmlns:p14="http://schemas.microsoft.com/office/powerpoint/2010/main" Requires="p14">
+      <p:transition spd="med" p14:dur="700">
+        <p:fade/>
+      </p:transition>
+    </mc:Choice>
+    <mc:Fallback>
+      <p:transition spd="med">
+        <p:fade/>
+      </p:transition>
+    </mc:Fallback>
+  </mc:AlternateContent>
+  <p:timing>
+    <p:tnLst>
+      <p:par>
+        <p:cTn id="1" dur="indefinite" restart="never" nodeType="tmRoot">
+          <p:childTnLst>
+            <p:seq concurrent="1" nextAc="seek">
+              <p:cTn id="2" dur="indefinite" nodeType="mainSeq">
+                <p:childTnLst>
+                  <p:par>
+                    <p:cTn id="3" fill="hold">
+                      <p:stCondLst>
+                        <p:cond delay="indefinite"/>
+                        <p:cond evt="onBegin" delay="0">
+                          <p:tn val="2"/>
+                        </p:cond>
+                      </p:stCondLst>
+                      <p:childTnLst>
+                        <p:par>
+                          <p:cTn id="4" fill="hold">
+                            <p:stCondLst>
+                              <p:cond delay="0"/>
+                            </p:stCondLst>
+                            <p:childTnLst>
+                              <p:par>
+                                <p:cTn id="5" presetID="10" presetClass="entr" presetSubtype="0" fill="hold" nodeType="afterEffect">
+                                  <p:stCondLst>
+                                    <p:cond delay="0"/>
+                                  </p:stCondLst>
+                                  <p:childTnLst>
+                                    <p:set>
+                                      <p:cBhvr>
+                                        <p:cTn id="6" dur="1" fill="hold">
+                                          <p:stCondLst>
+                                            <p:cond delay="0"/>
+                                          </p:stCondLst>
+                                        </p:cTn>
+                                        <p:tgtEl>
+                                          <p:spTgt spid="4"/>
+                                        </p:tgtEl>
+                                        <p:attrNameLst>
+                                          <p:attrName>style.visibility</p:attrName>
+                                        </p:attrNameLst>
+                                      </p:cBhvr>
+                                      <p:to>
+                                        <p:strVal val="visible"/>
+                                      </p:to>
+                                    </p:set>
+                                    <p:animEffect transition="in" filter="fade">
+                                      <p:cBhvr>
+                                        <p:cTn id="7" dur="500"/>
+                                        <p:tgtEl>
+                                          <p:spTgt spid="4"/>
+                                        </p:tgtEl>
+                                      </p:cBhvr>
+                                    </p:animEffect>
+                                  </p:childTnLst>
+                                </p:cTn>
+                              </p:par>
+                              <p:par>
+                                <p:cTn id="8" presetID="10" presetClass="entr" presetSubtype="0" fill="hold" nodeType="withEffect">
+                                  <p:stCondLst>
+                                    <p:cond delay="300"/>
+                                  </p:stCondLst>
+                                  <p:childTnLst>
+                                    <p:set>
+                                      <p:cBhvr>
+                                        <p:cTn id="9" dur="1" fill="hold">
+                                          <p:stCondLst>
+                                            <p:cond delay="0"/>
+                                          </p:stCondLst>
+                                        </p:cTn>
+                                        <p:tgtEl>
+                                          <p:spTgt spid="133"/>
+                                        </p:tgtEl>
+                                        <p:attrNameLst>
+                                          <p:attrName>style.visibility</p:attrName>
+                                        </p:attrNameLst>
+                                      </p:cBhvr>
+                                      <p:to>
+                                        <p:strVal val="visible"/>
+                                      </p:to>
+                                    </p:set>
+                                    <p:animEffect transition="in" filter="fade">
+                                      <p:cBhvr>
+                                        <p:cTn id="10" dur="500"/>
+                                        <p:tgtEl>
+                                          <p:spTgt spid="133"/>
+                                        </p:tgtEl>
+                                      </p:cBhvr>
+                                    </p:animEffect>
+                                  </p:childTnLst>
+                                </p:cTn>
+                              </p:par>
+                              <p:par>
+                                <p:cTn id="11" presetID="10" presetClass="entr" presetSubtype="0" fill="hold" nodeType="withEffect">
+                                  <p:stCondLst>
+                                    <p:cond delay="600"/>
+                                  </p:stCondLst>
+                                  <p:childTnLst>
+                                    <p:set>
+                                      <p:cBhvr>
+                                        <p:cTn id="12" dur="1" fill="hold">
+                                          <p:stCondLst>
+                                            <p:cond delay="0"/>
+                                          </p:stCondLst>
+                                        </p:cTn>
+                                        <p:tgtEl>
+                                          <p:spTgt spid="134"/>
+                                        </p:tgtEl>
+                                        <p:attrNameLst>
+                                          <p:attrName>style.visibility</p:attrName>
+                                        </p:attrNameLst>
+                                      </p:cBhvr>
+                                      <p:to>
+                                        <p:strVal val="visible"/>
+                                      </p:to>
+                                    </p:set>
+                                    <p:animEffect transition="in" filter="fade">
+                                      <p:cBhvr>
+                                        <p:cTn id="13" dur="500"/>
+                                        <p:tgtEl>
+                                          <p:spTgt spid="134"/>
+                                        </p:tgtEl>
+                                      </p:cBhvr>
+                                    </p:animEffect>
+                                  </p:childTnLst>
+                                </p:cTn>
+                              </p:par>
+                              <p:par>
+                                <p:cTn id="14" presetID="10" presetClass="entr" presetSubtype="0" fill="hold" nodeType="withEffect">
+                                  <p:stCondLst>
+                                    <p:cond delay="900"/>
+                                  </p:stCondLst>
+                                  <p:childTnLst>
+                                    <p:set>
+                                      <p:cBhvr>
+                                        <p:cTn id="15" dur="1" fill="hold">
+                                          <p:stCondLst>
+                                            <p:cond delay="0"/>
+                                          </p:stCondLst>
+                                        </p:cTn>
+                                        <p:tgtEl>
+                                          <p:spTgt spid="135"/>
+                                        </p:tgtEl>
+                                        <p:attrNameLst>
+                                          <p:attrName>style.visibility</p:attrName>
+                                        </p:attrNameLst>
+                                      </p:cBhvr>
+                                      <p:to>
+                                        <p:strVal val="visible"/>
+                                      </p:to>
+                                    </p:set>
+                                    <p:animEffect transition="in" filter="fade">
+                                      <p:cBhvr>
+                                        <p:cTn id="16" dur="500"/>
+                                        <p:tgtEl>
+                                          <p:spTgt spid="135"/>
+                                        </p:tgtEl>
+                                      </p:cBhvr>
+                                    </p:animEffect>
+                                  </p:childTnLst>
+                                </p:cTn>
+                              </p:par>
+                              <p:par>
+                                <p:cTn id="17" presetID="10" presetClass="entr" presetSubtype="0" fill="hold" nodeType="withEffect">
+                                  <p:stCondLst>
+                                    <p:cond delay="1200"/>
+                                  </p:stCondLst>
+                                  <p:childTnLst>
+                                    <p:set>
+                                      <p:cBhvr>
+                                        <p:cTn id="18" dur="1" fill="hold">
+                                          <p:stCondLst>
+                                            <p:cond delay="0"/>
+                                          </p:stCondLst>
+                                        </p:cTn>
+                                        <p:tgtEl>
+                                          <p:spTgt spid="136"/>
+                                        </p:tgtEl>
+                                        <p:attrNameLst>
+                                          <p:attrName>style.visibility</p:attrName>
+                                        </p:attrNameLst>
+                                      </p:cBhvr>
+                                      <p:to>
+                                        <p:strVal val="visible"/>
+                                      </p:to>
+                                    </p:set>
+                                    <p:animEffect transition="in" filter="fade">
+                                      <p:cBhvr>
+                                        <p:cTn id="19" dur="500"/>
+                                        <p:tgtEl>
+                                          <p:spTgt spid="136"/>
+                                        </p:tgtEl>
+                                      </p:cBhvr>
+                                    </p:animEffect>
+                                  </p:childTnLst>
+                                </p:cTn>
+                              </p:par>
+                            </p:childTnLst>
+                          </p:cTn>
+                        </p:par>
+                      </p:childTnLst>
+                    </p:cTn>
+                  </p:par>
+                </p:childTnLst>
+              </p:cTn>
+              <p:prevCondLst>
+                <p:cond evt="onPrev" delay="0">
+                  <p:tgtEl>
+                    <p:sldTgt/>
+                  </p:tgtEl>
+                </p:cond>
+              </p:prevCondLst>
+              <p:nextCondLst>
+                <p:cond evt="onNext" delay="0">
+                  <p:tgtEl>
+                    <p:sldTgt/>
+                  </p:tgtEl>
+                </p:cond>
+              </p:nextCondLst>
+            </p:seq>
+          </p:childTnLst>
+        </p:cTn>
+      </p:par>
+    </p:tnLst>
+  </p:timing>
 </p:sld>
 </file>
 
@@ -16946,6 +17625,279 @@
   <p:clrMapOvr>
     <a:masterClrMapping/>
   </p:clrMapOvr>
+  <mc:AlternateContent xmlns:mc="http://schemas.openxmlformats.org/markup-compatibility/2006">
+    <mc:Choice xmlns:p14="http://schemas.microsoft.com/office/powerpoint/2010/main" Requires="p14">
+      <p:transition spd="med" p14:dur="700">
+        <p:fade/>
+      </p:transition>
+    </mc:Choice>
+    <mc:Fallback>
+      <p:transition spd="med">
+        <p:fade/>
+      </p:transition>
+    </mc:Fallback>
+  </mc:AlternateContent>
+  <p:timing>
+    <p:tnLst>
+      <p:par>
+        <p:cTn id="1" dur="indefinite" restart="never" nodeType="tmRoot">
+          <p:childTnLst>
+            <p:seq concurrent="1" nextAc="seek">
+              <p:cTn id="2" dur="indefinite" nodeType="mainSeq">
+                <p:childTnLst>
+                  <p:par>
+                    <p:cTn id="3" fill="hold">
+                      <p:stCondLst>
+                        <p:cond delay="indefinite"/>
+                        <p:cond evt="onBegin" delay="0">
+                          <p:tn val="2"/>
+                        </p:cond>
+                      </p:stCondLst>
+                      <p:childTnLst>
+                        <p:par>
+                          <p:cTn id="4" fill="hold">
+                            <p:stCondLst>
+                              <p:cond delay="0"/>
+                            </p:stCondLst>
+                            <p:childTnLst>
+                              <p:par>
+                                <p:cTn id="5" presetID="10" presetClass="entr" presetSubtype="0" fill="hold" nodeType="afterEffect">
+                                  <p:stCondLst>
+                                    <p:cond delay="0"/>
+                                  </p:stCondLst>
+                                  <p:childTnLst>
+                                    <p:set>
+                                      <p:cBhvr>
+                                        <p:cTn id="6" dur="1" fill="hold">
+                                          <p:stCondLst>
+                                            <p:cond delay="0"/>
+                                          </p:stCondLst>
+                                        </p:cTn>
+                                        <p:tgtEl>
+                                          <p:spTgt spid="4"/>
+                                        </p:tgtEl>
+                                        <p:attrNameLst>
+                                          <p:attrName>style.visibility</p:attrName>
+                                        </p:attrNameLst>
+                                      </p:cBhvr>
+                                      <p:to>
+                                        <p:strVal val="visible"/>
+                                      </p:to>
+                                    </p:set>
+                                    <p:animEffect transition="in" filter="fade">
+                                      <p:cBhvr>
+                                        <p:cTn id="7" dur="500"/>
+                                        <p:tgtEl>
+                                          <p:spTgt spid="4"/>
+                                        </p:tgtEl>
+                                      </p:cBhvr>
+                                    </p:animEffect>
+                                  </p:childTnLst>
+                                </p:cTn>
+                              </p:par>
+                              <p:par>
+                                <p:cTn id="8" presetID="10" presetClass="entr" presetSubtype="0" fill="hold" nodeType="withEffect">
+                                  <p:stCondLst>
+                                    <p:cond delay="300"/>
+                                  </p:stCondLst>
+                                  <p:childTnLst>
+                                    <p:set>
+                                      <p:cBhvr>
+                                        <p:cTn id="9" dur="1" fill="hold">
+                                          <p:stCondLst>
+                                            <p:cond delay="0"/>
+                                          </p:stCondLst>
+                                        </p:cTn>
+                                        <p:tgtEl>
+                                          <p:spTgt spid="5"/>
+                                        </p:tgtEl>
+                                        <p:attrNameLst>
+                                          <p:attrName>style.visibility</p:attrName>
+                                        </p:attrNameLst>
+                                      </p:cBhvr>
+                                      <p:to>
+                                        <p:strVal val="visible"/>
+                                      </p:to>
+                                    </p:set>
+                                    <p:animEffect transition="in" filter="fade">
+                                      <p:cBhvr>
+                                        <p:cTn id="10" dur="500"/>
+                                        <p:tgtEl>
+                                          <p:spTgt spid="5"/>
+                                        </p:tgtEl>
+                                      </p:cBhvr>
+                                    </p:animEffect>
+                                  </p:childTnLst>
+                                </p:cTn>
+                              </p:par>
+                              <p:par>
+                                <p:cTn id="11" presetID="10" presetClass="entr" presetSubtype="0" fill="hold" nodeType="withEffect">
+                                  <p:stCondLst>
+                                    <p:cond delay="600"/>
+                                  </p:stCondLst>
+                                  <p:childTnLst>
+                                    <p:set>
+                                      <p:cBhvr>
+                                        <p:cTn id="12" dur="1" fill="hold">
+                                          <p:stCondLst>
+                                            <p:cond delay="0"/>
+                                          </p:stCondLst>
+                                        </p:cTn>
+                                        <p:tgtEl>
+                                          <p:spTgt spid="136"/>
+                                        </p:tgtEl>
+                                        <p:attrNameLst>
+                                          <p:attrName>style.visibility</p:attrName>
+                                        </p:attrNameLst>
+                                      </p:cBhvr>
+                                      <p:to>
+                                        <p:strVal val="visible"/>
+                                      </p:to>
+                                    </p:set>
+                                    <p:animEffect transition="in" filter="fade">
+                                      <p:cBhvr>
+                                        <p:cTn id="13" dur="500"/>
+                                        <p:tgtEl>
+                                          <p:spTgt spid="136"/>
+                                        </p:tgtEl>
+                                      </p:cBhvr>
+                                    </p:animEffect>
+                                  </p:childTnLst>
+                                </p:cTn>
+                              </p:par>
+                              <p:par>
+                                <p:cTn id="14" presetID="10" presetClass="entr" presetSubtype="0" fill="hold" nodeType="withEffect">
+                                  <p:stCondLst>
+                                    <p:cond delay="900"/>
+                                  </p:stCondLst>
+                                  <p:childTnLst>
+                                    <p:set>
+                                      <p:cBhvr>
+                                        <p:cTn id="15" dur="1" fill="hold">
+                                          <p:stCondLst>
+                                            <p:cond delay="0"/>
+                                          </p:stCondLst>
+                                        </p:cTn>
+                                        <p:tgtEl>
+                                          <p:spTgt spid="137"/>
+                                        </p:tgtEl>
+                                        <p:attrNameLst>
+                                          <p:attrName>style.visibility</p:attrName>
+                                        </p:attrNameLst>
+                                      </p:cBhvr>
+                                      <p:to>
+                                        <p:strVal val="visible"/>
+                                      </p:to>
+                                    </p:set>
+                                    <p:animEffect transition="in" filter="fade">
+                                      <p:cBhvr>
+                                        <p:cTn id="16" dur="500"/>
+                                        <p:tgtEl>
+                                          <p:spTgt spid="137"/>
+                                        </p:tgtEl>
+                                      </p:cBhvr>
+                                    </p:animEffect>
+                                  </p:childTnLst>
+                                </p:cTn>
+                              </p:par>
+                              <p:par>
+                                <p:cTn id="17" presetID="10" presetClass="entr" presetSubtype="0" fill="hold" nodeType="withEffect">
+                                  <p:stCondLst>
+                                    <p:cond delay="1200"/>
+                                  </p:stCondLst>
+                                  <p:childTnLst>
+                                    <p:set>
+                                      <p:cBhvr>
+                                        <p:cTn id="18" dur="1" fill="hold">
+                                          <p:stCondLst>
+                                            <p:cond delay="0"/>
+                                          </p:stCondLst>
+                                        </p:cTn>
+                                        <p:tgtEl>
+                                          <p:spTgt spid="220"/>
+                                        </p:tgtEl>
+                                        <p:attrNameLst>
+                                          <p:attrName>style.visibility</p:attrName>
+                                        </p:attrNameLst>
+                                      </p:cBhvr>
+                                      <p:to>
+                                        <p:strVal val="visible"/>
+                                      </p:to>
+                                    </p:set>
+                                    <p:animEffect transition="in" filter="fade">
+                                      <p:cBhvr>
+                                        <p:cTn id="19" dur="500"/>
+                                        <p:tgtEl>
+                                          <p:spTgt spid="220"/>
+                                        </p:tgtEl>
+                                      </p:cBhvr>
+                                    </p:animEffect>
+                                  </p:childTnLst>
+                                </p:cTn>
+                              </p:par>
+                              <p:par>
+                                <p:cTn id="20" presetID="10" presetClass="entr" presetSubtype="0" fill="hold" nodeType="withEffect">
+                                  <p:stCondLst>
+                                    <p:cond delay="1500"/>
+                                  </p:stCondLst>
+                                  <p:childTnLst>
+                                    <p:set>
+                                      <p:cBhvr>
+                                        <p:cTn id="21" dur="1" fill="hold">
+                                          <p:stCondLst>
+                                            <p:cond delay="0"/>
+                                          </p:stCondLst>
+                                        </p:cTn>
+                                        <p:tgtEl>
+                                          <p:spTgt spid="221"/>
+                                        </p:tgtEl>
+                                        <p:attrNameLst>
+                                          <p:attrName>style.visibility</p:attrName>
+                                        </p:attrNameLst>
+                                      </p:cBhvr>
+                                      <p:to>
+                                        <p:strVal val="visible"/>
+                                      </p:to>
+                                    </p:set>
+                                    <p:animEffect transition="in" filter="fade">
+                                      <p:cBhvr>
+                                        <p:cTn id="22" dur="500"/>
+                                        <p:tgtEl>
+                                          <p:spTgt spid="221"/>
+                                        </p:tgtEl>
+                                      </p:cBhvr>
+                                    </p:animEffect>
+                                  </p:childTnLst>
+                                </p:cTn>
+                              </p:par>
+                            </p:childTnLst>
+                          </p:cTn>
+                        </p:par>
+                      </p:childTnLst>
+                    </p:cTn>
+                  </p:par>
+                </p:childTnLst>
+              </p:cTn>
+              <p:prevCondLst>
+                <p:cond evt="onPrev" delay="0">
+                  <p:tgtEl>
+                    <p:sldTgt/>
+                  </p:tgtEl>
+                </p:cond>
+              </p:prevCondLst>
+              <p:nextCondLst>
+                <p:cond evt="onNext" delay="0">
+                  <p:tgtEl>
+                    <p:sldTgt/>
+                  </p:tgtEl>
+                </p:cond>
+              </p:nextCondLst>
+            </p:seq>
+          </p:childTnLst>
+        </p:cTn>
+      </p:par>
+    </p:tnLst>
+  </p:timing>
 </p:sld>
 </file>
 
@@ -18166,6 +19118,244 @@
   <p:clrMapOvr>
     <a:masterClrMapping/>
   </p:clrMapOvr>
+  <mc:AlternateContent xmlns:mc="http://schemas.openxmlformats.org/markup-compatibility/2006">
+    <mc:Choice xmlns:p14="http://schemas.microsoft.com/office/powerpoint/2010/main" Requires="p14">
+      <p:transition spd="med" p14:dur="700">
+        <p:fade/>
+      </p:transition>
+    </mc:Choice>
+    <mc:Fallback>
+      <p:transition spd="med">
+        <p:fade/>
+      </p:transition>
+    </mc:Fallback>
+  </mc:AlternateContent>
+  <p:timing>
+    <p:tnLst>
+      <p:par>
+        <p:cTn id="1" dur="indefinite" restart="never" nodeType="tmRoot">
+          <p:childTnLst>
+            <p:seq concurrent="1" nextAc="seek">
+              <p:cTn id="2" dur="indefinite" nodeType="mainSeq">
+                <p:childTnLst>
+                  <p:par>
+                    <p:cTn id="3" fill="hold">
+                      <p:stCondLst>
+                        <p:cond delay="indefinite"/>
+                        <p:cond evt="onBegin" delay="0">
+                          <p:tn val="2"/>
+                        </p:cond>
+                      </p:stCondLst>
+                      <p:childTnLst>
+                        <p:par>
+                          <p:cTn id="4" fill="hold">
+                            <p:stCondLst>
+                              <p:cond delay="0"/>
+                            </p:stCondLst>
+                            <p:childTnLst>
+                              <p:par>
+                                <p:cTn id="5" presetID="10" presetClass="entr" presetSubtype="0" fill="hold" nodeType="afterEffect">
+                                  <p:stCondLst>
+                                    <p:cond delay="0"/>
+                                  </p:stCondLst>
+                                  <p:childTnLst>
+                                    <p:set>
+                                      <p:cBhvr>
+                                        <p:cTn id="6" dur="1" fill="hold">
+                                          <p:stCondLst>
+                                            <p:cond delay="0"/>
+                                          </p:stCondLst>
+                                        </p:cTn>
+                                        <p:tgtEl>
+                                          <p:spTgt spid="4"/>
+                                        </p:tgtEl>
+                                        <p:attrNameLst>
+                                          <p:attrName>style.visibility</p:attrName>
+                                        </p:attrNameLst>
+                                      </p:cBhvr>
+                                      <p:to>
+                                        <p:strVal val="visible"/>
+                                      </p:to>
+                                    </p:set>
+                                    <p:animEffect transition="in" filter="fade">
+                                      <p:cBhvr>
+                                        <p:cTn id="7" dur="500"/>
+                                        <p:tgtEl>
+                                          <p:spTgt spid="4"/>
+                                        </p:tgtEl>
+                                      </p:cBhvr>
+                                    </p:animEffect>
+                                  </p:childTnLst>
+                                </p:cTn>
+                              </p:par>
+                              <p:par>
+                                <p:cTn id="8" presetID="10" presetClass="entr" presetSubtype="0" fill="hold" nodeType="withEffect">
+                                  <p:stCondLst>
+                                    <p:cond delay="300"/>
+                                  </p:stCondLst>
+                                  <p:childTnLst>
+                                    <p:set>
+                                      <p:cBhvr>
+                                        <p:cTn id="9" dur="1" fill="hold">
+                                          <p:stCondLst>
+                                            <p:cond delay="0"/>
+                                          </p:stCondLst>
+                                        </p:cTn>
+                                        <p:tgtEl>
+                                          <p:spTgt spid="7"/>
+                                        </p:tgtEl>
+                                        <p:attrNameLst>
+                                          <p:attrName>style.visibility</p:attrName>
+                                        </p:attrNameLst>
+                                      </p:cBhvr>
+                                      <p:to>
+                                        <p:strVal val="visible"/>
+                                      </p:to>
+                                    </p:set>
+                                    <p:animEffect transition="in" filter="fade">
+                                      <p:cBhvr>
+                                        <p:cTn id="10" dur="500"/>
+                                        <p:tgtEl>
+                                          <p:spTgt spid="7"/>
+                                        </p:tgtEl>
+                                      </p:cBhvr>
+                                    </p:animEffect>
+                                  </p:childTnLst>
+                                </p:cTn>
+                              </p:par>
+                              <p:par>
+                                <p:cTn id="11" presetID="10" presetClass="entr" presetSubtype="0" fill="hold" nodeType="withEffect">
+                                  <p:stCondLst>
+                                    <p:cond delay="600"/>
+                                  </p:stCondLst>
+                                  <p:childTnLst>
+                                    <p:set>
+                                      <p:cBhvr>
+                                        <p:cTn id="12" dur="1" fill="hold">
+                                          <p:stCondLst>
+                                            <p:cond delay="0"/>
+                                          </p:stCondLst>
+                                        </p:cTn>
+                                        <p:tgtEl>
+                                          <p:spTgt spid="21"/>
+                                        </p:tgtEl>
+                                        <p:attrNameLst>
+                                          <p:attrName>style.visibility</p:attrName>
+                                        </p:attrNameLst>
+                                      </p:cBhvr>
+                                      <p:to>
+                                        <p:strVal val="visible"/>
+                                      </p:to>
+                                    </p:set>
+                                    <p:animEffect transition="in" filter="fade">
+                                      <p:cBhvr>
+                                        <p:cTn id="13" dur="500"/>
+                                        <p:tgtEl>
+                                          <p:spTgt spid="21"/>
+                                        </p:tgtEl>
+                                      </p:cBhvr>
+                                    </p:animEffect>
+                                  </p:childTnLst>
+                                </p:cTn>
+                              </p:par>
+                              <p:par>
+                                <p:cTn id="14" presetID="10" presetClass="entr" presetSubtype="0" fill="hold" nodeType="withEffect">
+                                  <p:stCondLst>
+                                    <p:cond delay="900"/>
+                                  </p:stCondLst>
+                                  <p:childTnLst>
+                                    <p:set>
+                                      <p:cBhvr>
+                                        <p:cTn id="15" dur="1" fill="hold">
+                                          <p:stCondLst>
+                                            <p:cond delay="0"/>
+                                          </p:stCondLst>
+                                        </p:cTn>
+                                        <p:tgtEl>
+                                          <p:spTgt spid="35"/>
+                                        </p:tgtEl>
+                                        <p:attrNameLst>
+                                          <p:attrName>style.visibility</p:attrName>
+                                        </p:attrNameLst>
+                                      </p:cBhvr>
+                                      <p:to>
+                                        <p:strVal val="visible"/>
+                                      </p:to>
+                                    </p:set>
+                                    <p:animEffect transition="in" filter="fade">
+                                      <p:cBhvr>
+                                        <p:cTn id="16" dur="500"/>
+                                        <p:tgtEl>
+                                          <p:spTgt spid="35"/>
+                                        </p:tgtEl>
+                                      </p:cBhvr>
+                                    </p:animEffect>
+                                  </p:childTnLst>
+                                </p:cTn>
+                              </p:par>
+                              <p:par>
+                                <p:cTn id="17" presetID="10" presetClass="entr" presetSubtype="0" fill="hold" nodeType="withEffect">
+                                  <p:stCondLst>
+                                    <p:cond delay="1200"/>
+                                  </p:stCondLst>
+                                  <p:childTnLst>
+                                    <p:set>
+                                      <p:cBhvr>
+                                        <p:cTn id="18" dur="1" fill="hold">
+                                          <p:stCondLst>
+                                            <p:cond delay="0"/>
+                                          </p:stCondLst>
+                                        </p:cTn>
+                                        <p:tgtEl>
+                                          <p:spTgt spid="36"/>
+                                        </p:tgtEl>
+                                        <p:attrNameLst>
+                                          <p:attrName>style.visibility</p:attrName>
+                                        </p:attrNameLst>
+                                      </p:cBhvr>
+                                      <p:to>
+                                        <p:strVal val="visible"/>
+                                      </p:to>
+                                    </p:set>
+                                    <p:animEffect transition="in" filter="fade">
+                                      <p:cBhvr>
+                                        <p:cTn id="19" dur="500"/>
+                                        <p:tgtEl>
+                                          <p:spTgt spid="36"/>
+                                        </p:tgtEl>
+                                      </p:cBhvr>
+                                    </p:animEffect>
+                                  </p:childTnLst>
+                                </p:cTn>
+                              </p:par>
+                            </p:childTnLst>
+                          </p:cTn>
+                        </p:par>
+                      </p:childTnLst>
+                    </p:cTn>
+                  </p:par>
+                </p:childTnLst>
+              </p:cTn>
+              <p:prevCondLst>
+                <p:cond evt="onPrev" delay="0">
+                  <p:tgtEl>
+                    <p:sldTgt/>
+                  </p:tgtEl>
+                </p:cond>
+              </p:prevCondLst>
+              <p:nextCondLst>
+                <p:cond evt="onNext" delay="0">
+                  <p:tgtEl>
+                    <p:sldTgt/>
+                  </p:tgtEl>
+                </p:cond>
+              </p:nextCondLst>
+            </p:seq>
+          </p:childTnLst>
+        </p:cTn>
+      </p:par>
+    </p:tnLst>
+  </p:timing>
 </p:sld>
 </file>
 
@@ -20969,6 +22159,209 @@
   <p:clrMapOvr>
     <a:masterClrMapping/>
   </p:clrMapOvr>
+  <mc:AlternateContent xmlns:mc="http://schemas.openxmlformats.org/markup-compatibility/2006">
+    <mc:Choice xmlns:p14="http://schemas.microsoft.com/office/powerpoint/2010/main" Requires="p14">
+      <p:transition spd="med" p14:dur="700">
+        <p:fade/>
+      </p:transition>
+    </mc:Choice>
+    <mc:Fallback>
+      <p:transition spd="med">
+        <p:fade/>
+      </p:transition>
+    </mc:Fallback>
+  </mc:AlternateContent>
+  <p:timing>
+    <p:tnLst>
+      <p:par>
+        <p:cTn id="1" dur="indefinite" restart="never" nodeType="tmRoot">
+          <p:childTnLst>
+            <p:seq concurrent="1" nextAc="seek">
+              <p:cTn id="2" dur="indefinite" nodeType="mainSeq">
+                <p:childTnLst>
+                  <p:par>
+                    <p:cTn id="3" fill="hold">
+                      <p:stCondLst>
+                        <p:cond delay="indefinite"/>
+                        <p:cond evt="onBegin" delay="0">
+                          <p:tn val="2"/>
+                        </p:cond>
+                      </p:stCondLst>
+                      <p:childTnLst>
+                        <p:par>
+                          <p:cTn id="4" fill="hold">
+                            <p:stCondLst>
+                              <p:cond delay="0"/>
+                            </p:stCondLst>
+                            <p:childTnLst>
+                              <p:par>
+                                <p:cTn id="5" presetID="10" presetClass="entr" presetSubtype="0" fill="hold" nodeType="afterEffect">
+                                  <p:stCondLst>
+                                    <p:cond delay="0"/>
+                                  </p:stCondLst>
+                                  <p:childTnLst>
+                                    <p:set>
+                                      <p:cBhvr>
+                                        <p:cTn id="6" dur="1" fill="hold">
+                                          <p:stCondLst>
+                                            <p:cond delay="0"/>
+                                          </p:stCondLst>
+                                        </p:cTn>
+                                        <p:tgtEl>
+                                          <p:spTgt spid="4"/>
+                                        </p:tgtEl>
+                                        <p:attrNameLst>
+                                          <p:attrName>style.visibility</p:attrName>
+                                        </p:attrNameLst>
+                                      </p:cBhvr>
+                                      <p:to>
+                                        <p:strVal val="visible"/>
+                                      </p:to>
+                                    </p:set>
+                                    <p:animEffect transition="in" filter="fade">
+                                      <p:cBhvr>
+                                        <p:cTn id="7" dur="500"/>
+                                        <p:tgtEl>
+                                          <p:spTgt spid="4"/>
+                                        </p:tgtEl>
+                                      </p:cBhvr>
+                                    </p:animEffect>
+                                  </p:childTnLst>
+                                </p:cTn>
+                              </p:par>
+                              <p:par>
+                                <p:cTn id="8" presetID="10" presetClass="entr" presetSubtype="0" fill="hold" nodeType="withEffect">
+                                  <p:stCondLst>
+                                    <p:cond delay="300"/>
+                                  </p:stCondLst>
+                                  <p:childTnLst>
+                                    <p:set>
+                                      <p:cBhvr>
+                                        <p:cTn id="9" dur="1" fill="hold">
+                                          <p:stCondLst>
+                                            <p:cond delay="0"/>
+                                          </p:stCondLst>
+                                        </p:cTn>
+                                        <p:tgtEl>
+                                          <p:spTgt spid="89"/>
+                                        </p:tgtEl>
+                                        <p:attrNameLst>
+                                          <p:attrName>style.visibility</p:attrName>
+                                        </p:attrNameLst>
+                                      </p:cBhvr>
+                                      <p:to>
+                                        <p:strVal val="visible"/>
+                                      </p:to>
+                                    </p:set>
+                                    <p:animEffect transition="in" filter="fade">
+                                      <p:cBhvr>
+                                        <p:cTn id="10" dur="500"/>
+                                        <p:tgtEl>
+                                          <p:spTgt spid="89"/>
+                                        </p:tgtEl>
+                                      </p:cBhvr>
+                                    </p:animEffect>
+                                  </p:childTnLst>
+                                </p:cTn>
+                              </p:par>
+                              <p:par>
+                                <p:cTn id="11" presetID="10" presetClass="entr" presetSubtype="0" fill="hold" nodeType="withEffect">
+                                  <p:stCondLst>
+                                    <p:cond delay="600"/>
+                                  </p:stCondLst>
+                                  <p:childTnLst>
+                                    <p:set>
+                                      <p:cBhvr>
+                                        <p:cTn id="12" dur="1" fill="hold">
+                                          <p:stCondLst>
+                                            <p:cond delay="0"/>
+                                          </p:stCondLst>
+                                        </p:cTn>
+                                        <p:tgtEl>
+                                          <p:spTgt spid="90"/>
+                                        </p:tgtEl>
+                                        <p:attrNameLst>
+                                          <p:attrName>style.visibility</p:attrName>
+                                        </p:attrNameLst>
+                                      </p:cBhvr>
+                                      <p:to>
+                                        <p:strVal val="visible"/>
+                                      </p:to>
+                                    </p:set>
+                                    <p:animEffect transition="in" filter="fade">
+                                      <p:cBhvr>
+                                        <p:cTn id="13" dur="500"/>
+                                        <p:tgtEl>
+                                          <p:spTgt spid="90"/>
+                                        </p:tgtEl>
+                                      </p:cBhvr>
+                                    </p:animEffect>
+                                  </p:childTnLst>
+                                </p:cTn>
+                              </p:par>
+                              <p:par>
+                                <p:cTn id="14" presetID="10" presetClass="entr" presetSubtype="0" fill="hold" nodeType="withEffect">
+                                  <p:stCondLst>
+                                    <p:cond delay="900"/>
+                                  </p:stCondLst>
+                                  <p:childTnLst>
+                                    <p:set>
+                                      <p:cBhvr>
+                                        <p:cTn id="15" dur="1" fill="hold">
+                                          <p:stCondLst>
+                                            <p:cond delay="0"/>
+                                          </p:stCondLst>
+                                        </p:cTn>
+                                        <p:tgtEl>
+                                          <p:spTgt spid="91"/>
+                                        </p:tgtEl>
+                                        <p:attrNameLst>
+                                          <p:attrName>style.visibility</p:attrName>
+                                        </p:attrNameLst>
+                                      </p:cBhvr>
+                                      <p:to>
+                                        <p:strVal val="visible"/>
+                                      </p:to>
+                                    </p:set>
+                                    <p:animEffect transition="in" filter="fade">
+                                      <p:cBhvr>
+                                        <p:cTn id="16" dur="500"/>
+                                        <p:tgtEl>
+                                          <p:spTgt spid="91"/>
+                                        </p:tgtEl>
+                                      </p:cBhvr>
+                                    </p:animEffect>
+                                  </p:childTnLst>
+                                </p:cTn>
+                              </p:par>
+                            </p:childTnLst>
+                          </p:cTn>
+                        </p:par>
+                      </p:childTnLst>
+                    </p:cTn>
+                  </p:par>
+                </p:childTnLst>
+              </p:cTn>
+              <p:prevCondLst>
+                <p:cond evt="onPrev" delay="0">
+                  <p:tgtEl>
+                    <p:sldTgt/>
+                  </p:tgtEl>
+                </p:cond>
+              </p:prevCondLst>
+              <p:nextCondLst>
+                <p:cond evt="onNext" delay="0">
+                  <p:tgtEl>
+                    <p:sldTgt/>
+                  </p:tgtEl>
+                </p:cond>
+              </p:nextCondLst>
+            </p:seq>
+          </p:childTnLst>
+        </p:cTn>
+      </p:par>
+    </p:tnLst>
+  </p:timing>
 </p:sld>
 </file>
 
@@ -21732,6 +23125,279 @@
   <p:clrMapOvr>
     <a:masterClrMapping/>
   </p:clrMapOvr>
+  <mc:AlternateContent xmlns:mc="http://schemas.openxmlformats.org/markup-compatibility/2006">
+    <mc:Choice xmlns:p14="http://schemas.microsoft.com/office/powerpoint/2010/main" Requires="p14">
+      <p:transition spd="med" p14:dur="700">
+        <p:fade/>
+      </p:transition>
+    </mc:Choice>
+    <mc:Fallback>
+      <p:transition spd="med">
+        <p:fade/>
+      </p:transition>
+    </mc:Fallback>
+  </mc:AlternateContent>
+  <p:timing>
+    <p:tnLst>
+      <p:par>
+        <p:cTn id="1" dur="indefinite" restart="never" nodeType="tmRoot">
+          <p:childTnLst>
+            <p:seq concurrent="1" nextAc="seek">
+              <p:cTn id="2" dur="indefinite" nodeType="mainSeq">
+                <p:childTnLst>
+                  <p:par>
+                    <p:cTn id="3" fill="hold">
+                      <p:stCondLst>
+                        <p:cond delay="indefinite"/>
+                        <p:cond evt="onBegin" delay="0">
+                          <p:tn val="2"/>
+                        </p:cond>
+                      </p:stCondLst>
+                      <p:childTnLst>
+                        <p:par>
+                          <p:cTn id="4" fill="hold">
+                            <p:stCondLst>
+                              <p:cond delay="0"/>
+                            </p:stCondLst>
+                            <p:childTnLst>
+                              <p:par>
+                                <p:cTn id="5" presetID="10" presetClass="entr" presetSubtype="0" fill="hold" nodeType="afterEffect">
+                                  <p:stCondLst>
+                                    <p:cond delay="0"/>
+                                  </p:stCondLst>
+                                  <p:childTnLst>
+                                    <p:set>
+                                      <p:cBhvr>
+                                        <p:cTn id="6" dur="1" fill="hold">
+                                          <p:stCondLst>
+                                            <p:cond delay="0"/>
+                                          </p:stCondLst>
+                                        </p:cTn>
+                                        <p:tgtEl>
+                                          <p:spTgt spid="4"/>
+                                        </p:tgtEl>
+                                        <p:attrNameLst>
+                                          <p:attrName>style.visibility</p:attrName>
+                                        </p:attrNameLst>
+                                      </p:cBhvr>
+                                      <p:to>
+                                        <p:strVal val="visible"/>
+                                      </p:to>
+                                    </p:set>
+                                    <p:animEffect transition="in" filter="fade">
+                                      <p:cBhvr>
+                                        <p:cTn id="7" dur="500"/>
+                                        <p:tgtEl>
+                                          <p:spTgt spid="4"/>
+                                        </p:tgtEl>
+                                      </p:cBhvr>
+                                    </p:animEffect>
+                                  </p:childTnLst>
+                                </p:cTn>
+                              </p:par>
+                              <p:par>
+                                <p:cTn id="8" presetID="10" presetClass="entr" presetSubtype="0" fill="hold" nodeType="withEffect">
+                                  <p:stCondLst>
+                                    <p:cond delay="300"/>
+                                  </p:stCondLst>
+                                  <p:childTnLst>
+                                    <p:set>
+                                      <p:cBhvr>
+                                        <p:cTn id="9" dur="1" fill="hold">
+                                          <p:stCondLst>
+                                            <p:cond delay="0"/>
+                                          </p:stCondLst>
+                                        </p:cTn>
+                                        <p:tgtEl>
+                                          <p:spTgt spid="12"/>
+                                        </p:tgtEl>
+                                        <p:attrNameLst>
+                                          <p:attrName>style.visibility</p:attrName>
+                                        </p:attrNameLst>
+                                      </p:cBhvr>
+                                      <p:to>
+                                        <p:strVal val="visible"/>
+                                      </p:to>
+                                    </p:set>
+                                    <p:animEffect transition="in" filter="fade">
+                                      <p:cBhvr>
+                                        <p:cTn id="10" dur="500"/>
+                                        <p:tgtEl>
+                                          <p:spTgt spid="12"/>
+                                        </p:tgtEl>
+                                      </p:cBhvr>
+                                    </p:animEffect>
+                                  </p:childTnLst>
+                                </p:cTn>
+                              </p:par>
+                              <p:par>
+                                <p:cTn id="11" presetID="10" presetClass="entr" presetSubtype="0" fill="hold" nodeType="withEffect">
+                                  <p:stCondLst>
+                                    <p:cond delay="600"/>
+                                  </p:stCondLst>
+                                  <p:childTnLst>
+                                    <p:set>
+                                      <p:cBhvr>
+                                        <p:cTn id="12" dur="1" fill="hold">
+                                          <p:stCondLst>
+                                            <p:cond delay="0"/>
+                                          </p:stCondLst>
+                                        </p:cTn>
+                                        <p:tgtEl>
+                                          <p:spTgt spid="13"/>
+                                        </p:tgtEl>
+                                        <p:attrNameLst>
+                                          <p:attrName>style.visibility</p:attrName>
+                                        </p:attrNameLst>
+                                      </p:cBhvr>
+                                      <p:to>
+                                        <p:strVal val="visible"/>
+                                      </p:to>
+                                    </p:set>
+                                    <p:animEffect transition="in" filter="fade">
+                                      <p:cBhvr>
+                                        <p:cTn id="13" dur="500"/>
+                                        <p:tgtEl>
+                                          <p:spTgt spid="13"/>
+                                        </p:tgtEl>
+                                      </p:cBhvr>
+                                    </p:animEffect>
+                                  </p:childTnLst>
+                                </p:cTn>
+                              </p:par>
+                              <p:par>
+                                <p:cTn id="14" presetID="10" presetClass="entr" presetSubtype="0" fill="hold" nodeType="withEffect">
+                                  <p:stCondLst>
+                                    <p:cond delay="900"/>
+                                  </p:stCondLst>
+                                  <p:childTnLst>
+                                    <p:set>
+                                      <p:cBhvr>
+                                        <p:cTn id="15" dur="1" fill="hold">
+                                          <p:stCondLst>
+                                            <p:cond delay="0"/>
+                                          </p:stCondLst>
+                                        </p:cTn>
+                                        <p:tgtEl>
+                                          <p:spTgt spid="19"/>
+                                        </p:tgtEl>
+                                        <p:attrNameLst>
+                                          <p:attrName>style.visibility</p:attrName>
+                                        </p:attrNameLst>
+                                      </p:cBhvr>
+                                      <p:to>
+                                        <p:strVal val="visible"/>
+                                      </p:to>
+                                    </p:set>
+                                    <p:animEffect transition="in" filter="fade">
+                                      <p:cBhvr>
+                                        <p:cTn id="16" dur="500"/>
+                                        <p:tgtEl>
+                                          <p:spTgt spid="19"/>
+                                        </p:tgtEl>
+                                      </p:cBhvr>
+                                    </p:animEffect>
+                                  </p:childTnLst>
+                                </p:cTn>
+                              </p:par>
+                              <p:par>
+                                <p:cTn id="17" presetID="10" presetClass="entr" presetSubtype="0" fill="hold" nodeType="withEffect">
+                                  <p:stCondLst>
+                                    <p:cond delay="1200"/>
+                                  </p:stCondLst>
+                                  <p:childTnLst>
+                                    <p:set>
+                                      <p:cBhvr>
+                                        <p:cTn id="18" dur="1" fill="hold">
+                                          <p:stCondLst>
+                                            <p:cond delay="0"/>
+                                          </p:stCondLst>
+                                        </p:cTn>
+                                        <p:tgtEl>
+                                          <p:spTgt spid="20"/>
+                                        </p:tgtEl>
+                                        <p:attrNameLst>
+                                          <p:attrName>style.visibility</p:attrName>
+                                        </p:attrNameLst>
+                                      </p:cBhvr>
+                                      <p:to>
+                                        <p:strVal val="visible"/>
+                                      </p:to>
+                                    </p:set>
+                                    <p:animEffect transition="in" filter="fade">
+                                      <p:cBhvr>
+                                        <p:cTn id="19" dur="500"/>
+                                        <p:tgtEl>
+                                          <p:spTgt spid="20"/>
+                                        </p:tgtEl>
+                                      </p:cBhvr>
+                                    </p:animEffect>
+                                  </p:childTnLst>
+                                </p:cTn>
+                              </p:par>
+                              <p:par>
+                                <p:cTn id="20" presetID="10" presetClass="entr" presetSubtype="0" fill="hold" nodeType="withEffect">
+                                  <p:stCondLst>
+                                    <p:cond delay="1500"/>
+                                  </p:stCondLst>
+                                  <p:childTnLst>
+                                    <p:set>
+                                      <p:cBhvr>
+                                        <p:cTn id="21" dur="1" fill="hold">
+                                          <p:stCondLst>
+                                            <p:cond delay="0"/>
+                                          </p:stCondLst>
+                                        </p:cTn>
+                                        <p:tgtEl>
+                                          <p:spTgt spid="21"/>
+                                        </p:tgtEl>
+                                        <p:attrNameLst>
+                                          <p:attrName>style.visibility</p:attrName>
+                                        </p:attrNameLst>
+                                      </p:cBhvr>
+                                      <p:to>
+                                        <p:strVal val="visible"/>
+                                      </p:to>
+                                    </p:set>
+                                    <p:animEffect transition="in" filter="fade">
+                                      <p:cBhvr>
+                                        <p:cTn id="22" dur="500"/>
+                                        <p:tgtEl>
+                                          <p:spTgt spid="21"/>
+                                        </p:tgtEl>
+                                      </p:cBhvr>
+                                    </p:animEffect>
+                                  </p:childTnLst>
+                                </p:cTn>
+                              </p:par>
+                            </p:childTnLst>
+                          </p:cTn>
+                        </p:par>
+                      </p:childTnLst>
+                    </p:cTn>
+                  </p:par>
+                </p:childTnLst>
+              </p:cTn>
+              <p:prevCondLst>
+                <p:cond evt="onPrev" delay="0">
+                  <p:tgtEl>
+                    <p:sldTgt/>
+                  </p:tgtEl>
+                </p:cond>
+              </p:prevCondLst>
+              <p:nextCondLst>
+                <p:cond evt="onNext" delay="0">
+                  <p:tgtEl>
+                    <p:sldTgt/>
+                  </p:tgtEl>
+                </p:cond>
+              </p:nextCondLst>
+            </p:seq>
+          </p:childTnLst>
+        </p:cTn>
+      </p:par>
+    </p:tnLst>
+  </p:timing>
 </p:sld>
 </file>
 
@@ -25245,6 +26911,384 @@
   <p:clrMapOvr>
     <a:masterClrMapping/>
   </p:clrMapOvr>
+  <mc:AlternateContent xmlns:mc="http://schemas.openxmlformats.org/markup-compatibility/2006">
+    <mc:Choice xmlns:p14="http://schemas.microsoft.com/office/powerpoint/2010/main" Requires="p14">
+      <p:transition spd="med" p14:dur="700">
+        <p:fade/>
+      </p:transition>
+    </mc:Choice>
+    <mc:Fallback>
+      <p:transition spd="med">
+        <p:fade/>
+      </p:transition>
+    </mc:Fallback>
+  </mc:AlternateContent>
+  <p:timing>
+    <p:tnLst>
+      <p:par>
+        <p:cTn id="1" dur="indefinite" restart="never" nodeType="tmRoot">
+          <p:childTnLst>
+            <p:seq concurrent="1" nextAc="seek">
+              <p:cTn id="2" dur="indefinite" nodeType="mainSeq">
+                <p:childTnLst>
+                  <p:par>
+                    <p:cTn id="3" fill="hold">
+                      <p:stCondLst>
+                        <p:cond delay="indefinite"/>
+                        <p:cond evt="onBegin" delay="0">
+                          <p:tn val="2"/>
+                        </p:cond>
+                      </p:stCondLst>
+                      <p:childTnLst>
+                        <p:par>
+                          <p:cTn id="4" fill="hold">
+                            <p:stCondLst>
+                              <p:cond delay="0"/>
+                            </p:stCondLst>
+                            <p:childTnLst>
+                              <p:par>
+                                <p:cTn id="5" presetID="10" presetClass="entr" presetSubtype="0" fill="hold" nodeType="afterEffect">
+                                  <p:stCondLst>
+                                    <p:cond delay="0"/>
+                                  </p:stCondLst>
+                                  <p:childTnLst>
+                                    <p:set>
+                                      <p:cBhvr>
+                                        <p:cTn id="6" dur="1" fill="hold">
+                                          <p:stCondLst>
+                                            <p:cond delay="0"/>
+                                          </p:stCondLst>
+                                        </p:cTn>
+                                        <p:tgtEl>
+                                          <p:spTgt spid="4"/>
+                                        </p:tgtEl>
+                                        <p:attrNameLst>
+                                          <p:attrName>style.visibility</p:attrName>
+                                        </p:attrNameLst>
+                                      </p:cBhvr>
+                                      <p:to>
+                                        <p:strVal val="visible"/>
+                                      </p:to>
+                                    </p:set>
+                                    <p:animEffect transition="in" filter="fade">
+                                      <p:cBhvr>
+                                        <p:cTn id="7" dur="500"/>
+                                        <p:tgtEl>
+                                          <p:spTgt spid="4"/>
+                                        </p:tgtEl>
+                                      </p:cBhvr>
+                                    </p:animEffect>
+                                  </p:childTnLst>
+                                </p:cTn>
+                              </p:par>
+                              <p:par>
+                                <p:cTn id="8" presetID="10" presetClass="entr" presetSubtype="0" fill="hold" nodeType="withEffect">
+                                  <p:stCondLst>
+                                    <p:cond delay="200"/>
+                                  </p:stCondLst>
+                                  <p:childTnLst>
+                                    <p:set>
+                                      <p:cBhvr>
+                                        <p:cTn id="9" dur="1" fill="hold">
+                                          <p:stCondLst>
+                                            <p:cond delay="0"/>
+                                          </p:stCondLst>
+                                        </p:cTn>
+                                        <p:tgtEl>
+                                          <p:spTgt spid="5"/>
+                                        </p:tgtEl>
+                                        <p:attrNameLst>
+                                          <p:attrName>style.visibility</p:attrName>
+                                        </p:attrNameLst>
+                                      </p:cBhvr>
+                                      <p:to>
+                                        <p:strVal val="visible"/>
+                                      </p:to>
+                                    </p:set>
+                                    <p:animEffect transition="in" filter="fade">
+                                      <p:cBhvr>
+                                        <p:cTn id="10" dur="500"/>
+                                        <p:tgtEl>
+                                          <p:spTgt spid="5"/>
+                                        </p:tgtEl>
+                                      </p:cBhvr>
+                                    </p:animEffect>
+                                  </p:childTnLst>
+                                </p:cTn>
+                              </p:par>
+                              <p:par>
+                                <p:cTn id="11" presetID="10" presetClass="entr" presetSubtype="0" fill="hold" nodeType="withEffect">
+                                  <p:stCondLst>
+                                    <p:cond delay="400"/>
+                                  </p:stCondLst>
+                                  <p:childTnLst>
+                                    <p:set>
+                                      <p:cBhvr>
+                                        <p:cTn id="12" dur="1" fill="hold">
+                                          <p:stCondLst>
+                                            <p:cond delay="0"/>
+                                          </p:stCondLst>
+                                        </p:cTn>
+                                        <p:tgtEl>
+                                          <p:spTgt spid="6"/>
+                                        </p:tgtEl>
+                                        <p:attrNameLst>
+                                          <p:attrName>style.visibility</p:attrName>
+                                        </p:attrNameLst>
+                                      </p:cBhvr>
+                                      <p:to>
+                                        <p:strVal val="visible"/>
+                                      </p:to>
+                                    </p:set>
+                                    <p:animEffect transition="in" filter="fade">
+                                      <p:cBhvr>
+                                        <p:cTn id="13" dur="500"/>
+                                        <p:tgtEl>
+                                          <p:spTgt spid="6"/>
+                                        </p:tgtEl>
+                                      </p:cBhvr>
+                                    </p:animEffect>
+                                  </p:childTnLst>
+                                </p:cTn>
+                              </p:par>
+                              <p:par>
+                                <p:cTn id="14" presetID="10" presetClass="entr" presetSubtype="0" fill="hold" nodeType="withEffect">
+                                  <p:stCondLst>
+                                    <p:cond delay="600"/>
+                                  </p:stCondLst>
+                                  <p:childTnLst>
+                                    <p:set>
+                                      <p:cBhvr>
+                                        <p:cTn id="15" dur="1" fill="hold">
+                                          <p:stCondLst>
+                                            <p:cond delay="0"/>
+                                          </p:stCondLst>
+                                        </p:cTn>
+                                        <p:tgtEl>
+                                          <p:spTgt spid="9"/>
+                                        </p:tgtEl>
+                                        <p:attrNameLst>
+                                          <p:attrName>style.visibility</p:attrName>
+                                        </p:attrNameLst>
+                                      </p:cBhvr>
+                                      <p:to>
+                                        <p:strVal val="visible"/>
+                                      </p:to>
+                                    </p:set>
+                                    <p:animEffect transition="in" filter="fade">
+                                      <p:cBhvr>
+                                        <p:cTn id="16" dur="500"/>
+                                        <p:tgtEl>
+                                          <p:spTgt spid="9"/>
+                                        </p:tgtEl>
+                                      </p:cBhvr>
+                                    </p:animEffect>
+                                  </p:childTnLst>
+                                </p:cTn>
+                              </p:par>
+                              <p:par>
+                                <p:cTn id="17" presetID="10" presetClass="entr" presetSubtype="0" fill="hold" nodeType="withEffect">
+                                  <p:stCondLst>
+                                    <p:cond delay="800"/>
+                                  </p:stCondLst>
+                                  <p:childTnLst>
+                                    <p:set>
+                                      <p:cBhvr>
+                                        <p:cTn id="18" dur="1" fill="hold">
+                                          <p:stCondLst>
+                                            <p:cond delay="0"/>
+                                          </p:stCondLst>
+                                        </p:cTn>
+                                        <p:tgtEl>
+                                          <p:spTgt spid="15"/>
+                                        </p:tgtEl>
+                                        <p:attrNameLst>
+                                          <p:attrName>style.visibility</p:attrName>
+                                        </p:attrNameLst>
+                                      </p:cBhvr>
+                                      <p:to>
+                                        <p:strVal val="visible"/>
+                                      </p:to>
+                                    </p:set>
+                                    <p:animEffect transition="in" filter="fade">
+                                      <p:cBhvr>
+                                        <p:cTn id="19" dur="500"/>
+                                        <p:tgtEl>
+                                          <p:spTgt spid="15"/>
+                                        </p:tgtEl>
+                                      </p:cBhvr>
+                                    </p:animEffect>
+                                  </p:childTnLst>
+                                </p:cTn>
+                              </p:par>
+                              <p:par>
+                                <p:cTn id="20" presetID="10" presetClass="entr" presetSubtype="0" fill="hold" nodeType="withEffect">
+                                  <p:stCondLst>
+                                    <p:cond delay="1000"/>
+                                  </p:stCondLst>
+                                  <p:childTnLst>
+                                    <p:set>
+                                      <p:cBhvr>
+                                        <p:cTn id="21" dur="1" fill="hold">
+                                          <p:stCondLst>
+                                            <p:cond delay="0"/>
+                                          </p:stCondLst>
+                                        </p:cTn>
+                                        <p:tgtEl>
+                                          <p:spTgt spid="22"/>
+                                        </p:tgtEl>
+                                        <p:attrNameLst>
+                                          <p:attrName>style.visibility</p:attrName>
+                                        </p:attrNameLst>
+                                      </p:cBhvr>
+                                      <p:to>
+                                        <p:strVal val="visible"/>
+                                      </p:to>
+                                    </p:set>
+                                    <p:animEffect transition="in" filter="fade">
+                                      <p:cBhvr>
+                                        <p:cTn id="22" dur="500"/>
+                                        <p:tgtEl>
+                                          <p:spTgt spid="22"/>
+                                        </p:tgtEl>
+                                      </p:cBhvr>
+                                    </p:animEffect>
+                                  </p:childTnLst>
+                                </p:cTn>
+                              </p:par>
+                              <p:par>
+                                <p:cTn id="23" presetID="10" presetClass="entr" presetSubtype="0" fill="hold" nodeType="withEffect">
+                                  <p:stCondLst>
+                                    <p:cond delay="1200"/>
+                                  </p:stCondLst>
+                                  <p:childTnLst>
+                                    <p:set>
+                                      <p:cBhvr>
+                                        <p:cTn id="24" dur="1" fill="hold">
+                                          <p:stCondLst>
+                                            <p:cond delay="0"/>
+                                          </p:stCondLst>
+                                        </p:cTn>
+                                        <p:tgtEl>
+                                          <p:spTgt spid="112"/>
+                                        </p:tgtEl>
+                                        <p:attrNameLst>
+                                          <p:attrName>style.visibility</p:attrName>
+                                        </p:attrNameLst>
+                                      </p:cBhvr>
+                                      <p:to>
+                                        <p:strVal val="visible"/>
+                                      </p:to>
+                                    </p:set>
+                                    <p:animEffect transition="in" filter="fade">
+                                      <p:cBhvr>
+                                        <p:cTn id="25" dur="500"/>
+                                        <p:tgtEl>
+                                          <p:spTgt spid="112"/>
+                                        </p:tgtEl>
+                                      </p:cBhvr>
+                                    </p:animEffect>
+                                  </p:childTnLst>
+                                </p:cTn>
+                              </p:par>
+                              <p:par>
+                                <p:cTn id="26" presetID="10" presetClass="entr" presetSubtype="0" fill="hold" nodeType="withEffect">
+                                  <p:stCondLst>
+                                    <p:cond delay="1400"/>
+                                  </p:stCondLst>
+                                  <p:childTnLst>
+                                    <p:set>
+                                      <p:cBhvr>
+                                        <p:cTn id="27" dur="1" fill="hold">
+                                          <p:stCondLst>
+                                            <p:cond delay="0"/>
+                                          </p:stCondLst>
+                                        </p:cTn>
+                                        <p:tgtEl>
+                                          <p:spTgt spid="113"/>
+                                        </p:tgtEl>
+                                        <p:attrNameLst>
+                                          <p:attrName>style.visibility</p:attrName>
+                                        </p:attrNameLst>
+                                      </p:cBhvr>
+                                      <p:to>
+                                        <p:strVal val="visible"/>
+                                      </p:to>
+                                    </p:set>
+                                    <p:animEffect transition="in" filter="fade">
+                                      <p:cBhvr>
+                                        <p:cTn id="28" dur="500"/>
+                                        <p:tgtEl>
+                                          <p:spTgt spid="113"/>
+                                        </p:tgtEl>
+                                      </p:cBhvr>
+                                    </p:animEffect>
+                                  </p:childTnLst>
+                                </p:cTn>
+                              </p:par>
+                              <p:par>
+                                <p:cTn id="29" presetID="10" presetClass="entr" presetSubtype="0" fill="hold" nodeType="withEffect">
+                                  <p:stCondLst>
+                                    <p:cond delay="1600"/>
+                                  </p:stCondLst>
+                                  <p:childTnLst>
+                                    <p:set>
+                                      <p:cBhvr>
+                                        <p:cTn id="30" dur="1" fill="hold">
+                                          <p:stCondLst>
+                                            <p:cond delay="0"/>
+                                          </p:stCondLst>
+                                        </p:cTn>
+                                        <p:tgtEl>
+                                          <p:spTgt spid="114"/>
+                                        </p:tgtEl>
+                                        <p:attrNameLst>
+                                          <p:attrName>style.visibility</p:attrName>
+                                        </p:attrNameLst>
+                                      </p:cBhvr>
+                                      <p:to>
+                                        <p:strVal val="visible"/>
+                                      </p:to>
+                                    </p:set>
+                                    <p:animEffect transition="in" filter="fade">
+                                      <p:cBhvr>
+                                        <p:cTn id="31" dur="500"/>
+                                        <p:tgtEl>
+                                          <p:spTgt spid="114"/>
+                                        </p:tgtEl>
+                                      </p:cBhvr>
+                                    </p:animEffect>
+                                  </p:childTnLst>
+                                </p:cTn>
+                              </p:par>
+                            </p:childTnLst>
+                          </p:cTn>
+                        </p:par>
+                      </p:childTnLst>
+                    </p:cTn>
+                  </p:par>
+                </p:childTnLst>
+              </p:cTn>
+              <p:prevCondLst>
+                <p:cond evt="onPrev" delay="0">
+                  <p:tgtEl>
+                    <p:sldTgt/>
+                  </p:tgtEl>
+                </p:cond>
+              </p:prevCondLst>
+              <p:nextCondLst>
+                <p:cond evt="onNext" delay="0">
+                  <p:tgtEl>
+                    <p:sldTgt/>
+                  </p:tgtEl>
+                </p:cond>
+              </p:nextCondLst>
+            </p:seq>
+          </p:childTnLst>
+        </p:cTn>
+      </p:par>
+    </p:tnLst>
+  </p:timing>
 </p:sld>
 </file>
 
@@ -26502,6 +28546,279 @@
   <p:clrMapOvr>
     <a:masterClrMapping/>
   </p:clrMapOvr>
+  <mc:AlternateContent xmlns:mc="http://schemas.openxmlformats.org/markup-compatibility/2006">
+    <mc:Choice xmlns:p14="http://schemas.microsoft.com/office/powerpoint/2010/main" Requires="p14">
+      <p:transition spd="med" p14:dur="700">
+        <p:fade/>
+      </p:transition>
+    </mc:Choice>
+    <mc:Fallback>
+      <p:transition spd="med">
+        <p:fade/>
+      </p:transition>
+    </mc:Fallback>
+  </mc:AlternateContent>
+  <p:timing>
+    <p:tnLst>
+      <p:par>
+        <p:cTn id="1" dur="indefinite" restart="never" nodeType="tmRoot">
+          <p:childTnLst>
+            <p:seq concurrent="1" nextAc="seek">
+              <p:cTn id="2" dur="indefinite" nodeType="mainSeq">
+                <p:childTnLst>
+                  <p:par>
+                    <p:cTn id="3" fill="hold">
+                      <p:stCondLst>
+                        <p:cond delay="indefinite"/>
+                        <p:cond evt="onBegin" delay="0">
+                          <p:tn val="2"/>
+                        </p:cond>
+                      </p:stCondLst>
+                      <p:childTnLst>
+                        <p:par>
+                          <p:cTn id="4" fill="hold">
+                            <p:stCondLst>
+                              <p:cond delay="0"/>
+                            </p:stCondLst>
+                            <p:childTnLst>
+                              <p:par>
+                                <p:cTn id="5" presetID="10" presetClass="entr" presetSubtype="0" fill="hold" nodeType="afterEffect">
+                                  <p:stCondLst>
+                                    <p:cond delay="0"/>
+                                  </p:stCondLst>
+                                  <p:childTnLst>
+                                    <p:set>
+                                      <p:cBhvr>
+                                        <p:cTn id="6" dur="1" fill="hold">
+                                          <p:stCondLst>
+                                            <p:cond delay="0"/>
+                                          </p:stCondLst>
+                                        </p:cTn>
+                                        <p:tgtEl>
+                                          <p:spTgt spid="4"/>
+                                        </p:tgtEl>
+                                        <p:attrNameLst>
+                                          <p:attrName>style.visibility</p:attrName>
+                                        </p:attrNameLst>
+                                      </p:cBhvr>
+                                      <p:to>
+                                        <p:strVal val="visible"/>
+                                      </p:to>
+                                    </p:set>
+                                    <p:animEffect transition="in" filter="fade">
+                                      <p:cBhvr>
+                                        <p:cTn id="7" dur="500"/>
+                                        <p:tgtEl>
+                                          <p:spTgt spid="4"/>
+                                        </p:tgtEl>
+                                      </p:cBhvr>
+                                    </p:animEffect>
+                                  </p:childTnLst>
+                                </p:cTn>
+                              </p:par>
+                              <p:par>
+                                <p:cTn id="8" presetID="10" presetClass="entr" presetSubtype="0" fill="hold" nodeType="withEffect">
+                                  <p:stCondLst>
+                                    <p:cond delay="300"/>
+                                  </p:stCondLst>
+                                  <p:childTnLst>
+                                    <p:set>
+                                      <p:cBhvr>
+                                        <p:cTn id="9" dur="1" fill="hold">
+                                          <p:stCondLst>
+                                            <p:cond delay="0"/>
+                                          </p:stCondLst>
+                                        </p:cTn>
+                                        <p:tgtEl>
+                                          <p:spTgt spid="16"/>
+                                        </p:tgtEl>
+                                        <p:attrNameLst>
+                                          <p:attrName>style.visibility</p:attrName>
+                                        </p:attrNameLst>
+                                      </p:cBhvr>
+                                      <p:to>
+                                        <p:strVal val="visible"/>
+                                      </p:to>
+                                    </p:set>
+                                    <p:animEffect transition="in" filter="fade">
+                                      <p:cBhvr>
+                                        <p:cTn id="10" dur="500"/>
+                                        <p:tgtEl>
+                                          <p:spTgt spid="16"/>
+                                        </p:tgtEl>
+                                      </p:cBhvr>
+                                    </p:animEffect>
+                                  </p:childTnLst>
+                                </p:cTn>
+                              </p:par>
+                              <p:par>
+                                <p:cTn id="11" presetID="10" presetClass="entr" presetSubtype="0" fill="hold" nodeType="withEffect">
+                                  <p:stCondLst>
+                                    <p:cond delay="600"/>
+                                  </p:stCondLst>
+                                  <p:childTnLst>
+                                    <p:set>
+                                      <p:cBhvr>
+                                        <p:cTn id="12" dur="1" fill="hold">
+                                          <p:stCondLst>
+                                            <p:cond delay="0"/>
+                                          </p:stCondLst>
+                                        </p:cTn>
+                                        <p:tgtEl>
+                                          <p:spTgt spid="30"/>
+                                        </p:tgtEl>
+                                        <p:attrNameLst>
+                                          <p:attrName>style.visibility</p:attrName>
+                                        </p:attrNameLst>
+                                      </p:cBhvr>
+                                      <p:to>
+                                        <p:strVal val="visible"/>
+                                      </p:to>
+                                    </p:set>
+                                    <p:animEffect transition="in" filter="fade">
+                                      <p:cBhvr>
+                                        <p:cTn id="13" dur="500"/>
+                                        <p:tgtEl>
+                                          <p:spTgt spid="30"/>
+                                        </p:tgtEl>
+                                      </p:cBhvr>
+                                    </p:animEffect>
+                                  </p:childTnLst>
+                                </p:cTn>
+                              </p:par>
+                              <p:par>
+                                <p:cTn id="14" presetID="10" presetClass="entr" presetSubtype="0" fill="hold" nodeType="withEffect">
+                                  <p:stCondLst>
+                                    <p:cond delay="900"/>
+                                  </p:stCondLst>
+                                  <p:childTnLst>
+                                    <p:set>
+                                      <p:cBhvr>
+                                        <p:cTn id="15" dur="1" fill="hold">
+                                          <p:stCondLst>
+                                            <p:cond delay="0"/>
+                                          </p:stCondLst>
+                                        </p:cTn>
+                                        <p:tgtEl>
+                                          <p:spTgt spid="35"/>
+                                        </p:tgtEl>
+                                        <p:attrNameLst>
+                                          <p:attrName>style.visibility</p:attrName>
+                                        </p:attrNameLst>
+                                      </p:cBhvr>
+                                      <p:to>
+                                        <p:strVal val="visible"/>
+                                      </p:to>
+                                    </p:set>
+                                    <p:animEffect transition="in" filter="fade">
+                                      <p:cBhvr>
+                                        <p:cTn id="16" dur="500"/>
+                                        <p:tgtEl>
+                                          <p:spTgt spid="35"/>
+                                        </p:tgtEl>
+                                      </p:cBhvr>
+                                    </p:animEffect>
+                                  </p:childTnLst>
+                                </p:cTn>
+                              </p:par>
+                              <p:par>
+                                <p:cTn id="17" presetID="10" presetClass="entr" presetSubtype="0" fill="hold" nodeType="withEffect">
+                                  <p:stCondLst>
+                                    <p:cond delay="1200"/>
+                                  </p:stCondLst>
+                                  <p:childTnLst>
+                                    <p:set>
+                                      <p:cBhvr>
+                                        <p:cTn id="18" dur="1" fill="hold">
+                                          <p:stCondLst>
+                                            <p:cond delay="0"/>
+                                          </p:stCondLst>
+                                        </p:cTn>
+                                        <p:tgtEl>
+                                          <p:spTgt spid="36"/>
+                                        </p:tgtEl>
+                                        <p:attrNameLst>
+                                          <p:attrName>style.visibility</p:attrName>
+                                        </p:attrNameLst>
+                                      </p:cBhvr>
+                                      <p:to>
+                                        <p:strVal val="visible"/>
+                                      </p:to>
+                                    </p:set>
+                                    <p:animEffect transition="in" filter="fade">
+                                      <p:cBhvr>
+                                        <p:cTn id="19" dur="500"/>
+                                        <p:tgtEl>
+                                          <p:spTgt spid="36"/>
+                                        </p:tgtEl>
+                                      </p:cBhvr>
+                                    </p:animEffect>
+                                  </p:childTnLst>
+                                </p:cTn>
+                              </p:par>
+                              <p:par>
+                                <p:cTn id="20" presetID="10" presetClass="entr" presetSubtype="0" fill="hold" nodeType="withEffect">
+                                  <p:stCondLst>
+                                    <p:cond delay="1500"/>
+                                  </p:stCondLst>
+                                  <p:childTnLst>
+                                    <p:set>
+                                      <p:cBhvr>
+                                        <p:cTn id="21" dur="1" fill="hold">
+                                          <p:stCondLst>
+                                            <p:cond delay="0"/>
+                                          </p:stCondLst>
+                                        </p:cTn>
+                                        <p:tgtEl>
+                                          <p:spTgt spid="37"/>
+                                        </p:tgtEl>
+                                        <p:attrNameLst>
+                                          <p:attrName>style.visibility</p:attrName>
+                                        </p:attrNameLst>
+                                      </p:cBhvr>
+                                      <p:to>
+                                        <p:strVal val="visible"/>
+                                      </p:to>
+                                    </p:set>
+                                    <p:animEffect transition="in" filter="fade">
+                                      <p:cBhvr>
+                                        <p:cTn id="22" dur="500"/>
+                                        <p:tgtEl>
+                                          <p:spTgt spid="37"/>
+                                        </p:tgtEl>
+                                      </p:cBhvr>
+                                    </p:animEffect>
+                                  </p:childTnLst>
+                                </p:cTn>
+                              </p:par>
+                            </p:childTnLst>
+                          </p:cTn>
+                        </p:par>
+                      </p:childTnLst>
+                    </p:cTn>
+                  </p:par>
+                </p:childTnLst>
+              </p:cTn>
+              <p:prevCondLst>
+                <p:cond evt="onPrev" delay="0">
+                  <p:tgtEl>
+                    <p:sldTgt/>
+                  </p:tgtEl>
+                </p:cond>
+              </p:prevCondLst>
+              <p:nextCondLst>
+                <p:cond evt="onNext" delay="0">
+                  <p:tgtEl>
+                    <p:sldTgt/>
+                  </p:tgtEl>
+                </p:cond>
+              </p:nextCondLst>
+            </p:seq>
+          </p:childTnLst>
+        </p:cTn>
+      </p:par>
+    </p:tnLst>
+  </p:timing>
 </p:sld>
 </file>
 
@@ -27657,6 +29974,279 @@
   <p:clrMapOvr>
     <a:masterClrMapping/>
   </p:clrMapOvr>
+  <mc:AlternateContent xmlns:mc="http://schemas.openxmlformats.org/markup-compatibility/2006">
+    <mc:Choice xmlns:p14="http://schemas.microsoft.com/office/powerpoint/2010/main" Requires="p14">
+      <p:transition spd="med" p14:dur="700">
+        <p:fade/>
+      </p:transition>
+    </mc:Choice>
+    <mc:Fallback>
+      <p:transition spd="med">
+        <p:fade/>
+      </p:transition>
+    </mc:Fallback>
+  </mc:AlternateContent>
+  <p:timing>
+    <p:tnLst>
+      <p:par>
+        <p:cTn id="1" dur="indefinite" restart="never" nodeType="tmRoot">
+          <p:childTnLst>
+            <p:seq concurrent="1" nextAc="seek">
+              <p:cTn id="2" dur="indefinite" nodeType="mainSeq">
+                <p:childTnLst>
+                  <p:par>
+                    <p:cTn id="3" fill="hold">
+                      <p:stCondLst>
+                        <p:cond delay="indefinite"/>
+                        <p:cond evt="onBegin" delay="0">
+                          <p:tn val="2"/>
+                        </p:cond>
+                      </p:stCondLst>
+                      <p:childTnLst>
+                        <p:par>
+                          <p:cTn id="4" fill="hold">
+                            <p:stCondLst>
+                              <p:cond delay="0"/>
+                            </p:stCondLst>
+                            <p:childTnLst>
+                              <p:par>
+                                <p:cTn id="5" presetID="10" presetClass="entr" presetSubtype="0" fill="hold" nodeType="afterEffect">
+                                  <p:stCondLst>
+                                    <p:cond delay="0"/>
+                                  </p:stCondLst>
+                                  <p:childTnLst>
+                                    <p:set>
+                                      <p:cBhvr>
+                                        <p:cTn id="6" dur="1" fill="hold">
+                                          <p:stCondLst>
+                                            <p:cond delay="0"/>
+                                          </p:stCondLst>
+                                        </p:cTn>
+                                        <p:tgtEl>
+                                          <p:spTgt spid="4"/>
+                                        </p:tgtEl>
+                                        <p:attrNameLst>
+                                          <p:attrName>style.visibility</p:attrName>
+                                        </p:attrNameLst>
+                                      </p:cBhvr>
+                                      <p:to>
+                                        <p:strVal val="visible"/>
+                                      </p:to>
+                                    </p:set>
+                                    <p:animEffect transition="in" filter="fade">
+                                      <p:cBhvr>
+                                        <p:cTn id="7" dur="500"/>
+                                        <p:tgtEl>
+                                          <p:spTgt spid="4"/>
+                                        </p:tgtEl>
+                                      </p:cBhvr>
+                                    </p:animEffect>
+                                  </p:childTnLst>
+                                </p:cTn>
+                              </p:par>
+                              <p:par>
+                                <p:cTn id="8" presetID="10" presetClass="entr" presetSubtype="0" fill="hold" nodeType="withEffect">
+                                  <p:stCondLst>
+                                    <p:cond delay="300"/>
+                                  </p:stCondLst>
+                                  <p:childTnLst>
+                                    <p:set>
+                                      <p:cBhvr>
+                                        <p:cTn id="9" dur="1" fill="hold">
+                                          <p:stCondLst>
+                                            <p:cond delay="0"/>
+                                          </p:stCondLst>
+                                        </p:cTn>
+                                        <p:tgtEl>
+                                          <p:spTgt spid="14"/>
+                                        </p:tgtEl>
+                                        <p:attrNameLst>
+                                          <p:attrName>style.visibility</p:attrName>
+                                        </p:attrNameLst>
+                                      </p:cBhvr>
+                                      <p:to>
+                                        <p:strVal val="visible"/>
+                                      </p:to>
+                                    </p:set>
+                                    <p:animEffect transition="in" filter="fade">
+                                      <p:cBhvr>
+                                        <p:cTn id="10" dur="500"/>
+                                        <p:tgtEl>
+                                          <p:spTgt spid="14"/>
+                                        </p:tgtEl>
+                                      </p:cBhvr>
+                                    </p:animEffect>
+                                  </p:childTnLst>
+                                </p:cTn>
+                              </p:par>
+                              <p:par>
+                                <p:cTn id="11" presetID="10" presetClass="entr" presetSubtype="0" fill="hold" nodeType="withEffect">
+                                  <p:stCondLst>
+                                    <p:cond delay="600"/>
+                                  </p:stCondLst>
+                                  <p:childTnLst>
+                                    <p:set>
+                                      <p:cBhvr>
+                                        <p:cTn id="12" dur="1" fill="hold">
+                                          <p:stCondLst>
+                                            <p:cond delay="0"/>
+                                          </p:stCondLst>
+                                        </p:cTn>
+                                        <p:tgtEl>
+                                          <p:spTgt spid="32"/>
+                                        </p:tgtEl>
+                                        <p:attrNameLst>
+                                          <p:attrName>style.visibility</p:attrName>
+                                        </p:attrNameLst>
+                                      </p:cBhvr>
+                                      <p:to>
+                                        <p:strVal val="visible"/>
+                                      </p:to>
+                                    </p:set>
+                                    <p:animEffect transition="in" filter="fade">
+                                      <p:cBhvr>
+                                        <p:cTn id="13" dur="500"/>
+                                        <p:tgtEl>
+                                          <p:spTgt spid="32"/>
+                                        </p:tgtEl>
+                                      </p:cBhvr>
+                                    </p:animEffect>
+                                  </p:childTnLst>
+                                </p:cTn>
+                              </p:par>
+                              <p:par>
+                                <p:cTn id="14" presetID="10" presetClass="entr" presetSubtype="0" fill="hold" nodeType="withEffect">
+                                  <p:stCondLst>
+                                    <p:cond delay="900"/>
+                                  </p:stCondLst>
+                                  <p:childTnLst>
+                                    <p:set>
+                                      <p:cBhvr>
+                                        <p:cTn id="15" dur="1" fill="hold">
+                                          <p:stCondLst>
+                                            <p:cond delay="0"/>
+                                          </p:stCondLst>
+                                        </p:cTn>
+                                        <p:tgtEl>
+                                          <p:spTgt spid="33"/>
+                                        </p:tgtEl>
+                                        <p:attrNameLst>
+                                          <p:attrName>style.visibility</p:attrName>
+                                        </p:attrNameLst>
+                                      </p:cBhvr>
+                                      <p:to>
+                                        <p:strVal val="visible"/>
+                                      </p:to>
+                                    </p:set>
+                                    <p:animEffect transition="in" filter="fade">
+                                      <p:cBhvr>
+                                        <p:cTn id="16" dur="500"/>
+                                        <p:tgtEl>
+                                          <p:spTgt spid="33"/>
+                                        </p:tgtEl>
+                                      </p:cBhvr>
+                                    </p:animEffect>
+                                  </p:childTnLst>
+                                </p:cTn>
+                              </p:par>
+                              <p:par>
+                                <p:cTn id="17" presetID="10" presetClass="entr" presetSubtype="0" fill="hold" nodeType="withEffect">
+                                  <p:stCondLst>
+                                    <p:cond delay="1200"/>
+                                  </p:stCondLst>
+                                  <p:childTnLst>
+                                    <p:set>
+                                      <p:cBhvr>
+                                        <p:cTn id="18" dur="1" fill="hold">
+                                          <p:stCondLst>
+                                            <p:cond delay="0"/>
+                                          </p:stCondLst>
+                                        </p:cTn>
+                                        <p:tgtEl>
+                                          <p:spTgt spid="34"/>
+                                        </p:tgtEl>
+                                        <p:attrNameLst>
+                                          <p:attrName>style.visibility</p:attrName>
+                                        </p:attrNameLst>
+                                      </p:cBhvr>
+                                      <p:to>
+                                        <p:strVal val="visible"/>
+                                      </p:to>
+                                    </p:set>
+                                    <p:animEffect transition="in" filter="fade">
+                                      <p:cBhvr>
+                                        <p:cTn id="19" dur="500"/>
+                                        <p:tgtEl>
+                                          <p:spTgt spid="34"/>
+                                        </p:tgtEl>
+                                      </p:cBhvr>
+                                    </p:animEffect>
+                                  </p:childTnLst>
+                                </p:cTn>
+                              </p:par>
+                              <p:par>
+                                <p:cTn id="20" presetID="10" presetClass="entr" presetSubtype="0" fill="hold" nodeType="withEffect">
+                                  <p:stCondLst>
+                                    <p:cond delay="1500"/>
+                                  </p:stCondLst>
+                                  <p:childTnLst>
+                                    <p:set>
+                                      <p:cBhvr>
+                                        <p:cTn id="21" dur="1" fill="hold">
+                                          <p:stCondLst>
+                                            <p:cond delay="0"/>
+                                          </p:stCondLst>
+                                        </p:cTn>
+                                        <p:tgtEl>
+                                          <p:spTgt spid="35"/>
+                                        </p:tgtEl>
+                                        <p:attrNameLst>
+                                          <p:attrName>style.visibility</p:attrName>
+                                        </p:attrNameLst>
+                                      </p:cBhvr>
+                                      <p:to>
+                                        <p:strVal val="visible"/>
+                                      </p:to>
+                                    </p:set>
+                                    <p:animEffect transition="in" filter="fade">
+                                      <p:cBhvr>
+                                        <p:cTn id="22" dur="500"/>
+                                        <p:tgtEl>
+                                          <p:spTgt spid="35"/>
+                                        </p:tgtEl>
+                                      </p:cBhvr>
+                                    </p:animEffect>
+                                  </p:childTnLst>
+                                </p:cTn>
+                              </p:par>
+                            </p:childTnLst>
+                          </p:cTn>
+                        </p:par>
+                      </p:childTnLst>
+                    </p:cTn>
+                  </p:par>
+                </p:childTnLst>
+              </p:cTn>
+              <p:prevCondLst>
+                <p:cond evt="onPrev" delay="0">
+                  <p:tgtEl>
+                    <p:sldTgt/>
+                  </p:tgtEl>
+                </p:cond>
+              </p:prevCondLst>
+              <p:nextCondLst>
+                <p:cond evt="onNext" delay="0">
+                  <p:tgtEl>
+                    <p:sldTgt/>
+                  </p:tgtEl>
+                </p:cond>
+              </p:nextCondLst>
+            </p:seq>
+          </p:childTnLst>
+        </p:cTn>
+      </p:par>
+    </p:tnLst>
+  </p:timing>
 </p:sld>
 </file>
 
@@ -32083,6 +34673,349 @@
   <p:clrMapOvr>
     <a:masterClrMapping/>
   </p:clrMapOvr>
+  <mc:AlternateContent xmlns:mc="http://schemas.openxmlformats.org/markup-compatibility/2006">
+    <mc:Choice xmlns:p14="http://schemas.microsoft.com/office/powerpoint/2010/main" Requires="p14">
+      <p:transition spd="med" p14:dur="700">
+        <p:fade/>
+      </p:transition>
+    </mc:Choice>
+    <mc:Fallback>
+      <p:transition spd="med">
+        <p:fade/>
+      </p:transition>
+    </mc:Fallback>
+  </mc:AlternateContent>
+  <p:timing>
+    <p:tnLst>
+      <p:par>
+        <p:cTn id="1" dur="indefinite" restart="never" nodeType="tmRoot">
+          <p:childTnLst>
+            <p:seq concurrent="1" nextAc="seek">
+              <p:cTn id="2" dur="indefinite" nodeType="mainSeq">
+                <p:childTnLst>
+                  <p:par>
+                    <p:cTn id="3" fill="hold">
+                      <p:stCondLst>
+                        <p:cond delay="indefinite"/>
+                        <p:cond evt="onBegin" delay="0">
+                          <p:tn val="2"/>
+                        </p:cond>
+                      </p:stCondLst>
+                      <p:childTnLst>
+                        <p:par>
+                          <p:cTn id="4" fill="hold">
+                            <p:stCondLst>
+                              <p:cond delay="0"/>
+                            </p:stCondLst>
+                            <p:childTnLst>
+                              <p:par>
+                                <p:cTn id="5" presetID="10" presetClass="entr" presetSubtype="0" fill="hold" nodeType="afterEffect">
+                                  <p:stCondLst>
+                                    <p:cond delay="0"/>
+                                  </p:stCondLst>
+                                  <p:childTnLst>
+                                    <p:set>
+                                      <p:cBhvr>
+                                        <p:cTn id="6" dur="1" fill="hold">
+                                          <p:stCondLst>
+                                            <p:cond delay="0"/>
+                                          </p:stCondLst>
+                                        </p:cTn>
+                                        <p:tgtEl>
+                                          <p:spTgt spid="4"/>
+                                        </p:tgtEl>
+                                        <p:attrNameLst>
+                                          <p:attrName>style.visibility</p:attrName>
+                                        </p:attrNameLst>
+                                      </p:cBhvr>
+                                      <p:to>
+                                        <p:strVal val="visible"/>
+                                      </p:to>
+                                    </p:set>
+                                    <p:animEffect transition="in" filter="fade">
+                                      <p:cBhvr>
+                                        <p:cTn id="7" dur="500"/>
+                                        <p:tgtEl>
+                                          <p:spTgt spid="4"/>
+                                        </p:tgtEl>
+                                      </p:cBhvr>
+                                    </p:animEffect>
+                                  </p:childTnLst>
+                                </p:cTn>
+                              </p:par>
+                              <p:par>
+                                <p:cTn id="8" presetID="10" presetClass="entr" presetSubtype="0" fill="hold" nodeType="withEffect">
+                                  <p:stCondLst>
+                                    <p:cond delay="225"/>
+                                  </p:stCondLst>
+                                  <p:childTnLst>
+                                    <p:set>
+                                      <p:cBhvr>
+                                        <p:cTn id="9" dur="1" fill="hold">
+                                          <p:stCondLst>
+                                            <p:cond delay="0"/>
+                                          </p:stCondLst>
+                                        </p:cTn>
+                                        <p:tgtEl>
+                                          <p:spTgt spid="8"/>
+                                        </p:tgtEl>
+                                        <p:attrNameLst>
+                                          <p:attrName>style.visibility</p:attrName>
+                                        </p:attrNameLst>
+                                      </p:cBhvr>
+                                      <p:to>
+                                        <p:strVal val="visible"/>
+                                      </p:to>
+                                    </p:set>
+                                    <p:animEffect transition="in" filter="fade">
+                                      <p:cBhvr>
+                                        <p:cTn id="10" dur="500"/>
+                                        <p:tgtEl>
+                                          <p:spTgt spid="8"/>
+                                        </p:tgtEl>
+                                      </p:cBhvr>
+                                    </p:animEffect>
+                                  </p:childTnLst>
+                                </p:cTn>
+                              </p:par>
+                              <p:par>
+                                <p:cTn id="11" presetID="10" presetClass="entr" presetSubtype="0" fill="hold" nodeType="withEffect">
+                                  <p:stCondLst>
+                                    <p:cond delay="450"/>
+                                  </p:stCondLst>
+                                  <p:childTnLst>
+                                    <p:set>
+                                      <p:cBhvr>
+                                        <p:cTn id="12" dur="1" fill="hold">
+                                          <p:stCondLst>
+                                            <p:cond delay="0"/>
+                                          </p:stCondLst>
+                                        </p:cTn>
+                                        <p:tgtEl>
+                                          <p:spTgt spid="9"/>
+                                        </p:tgtEl>
+                                        <p:attrNameLst>
+                                          <p:attrName>style.visibility</p:attrName>
+                                        </p:attrNameLst>
+                                      </p:cBhvr>
+                                      <p:to>
+                                        <p:strVal val="visible"/>
+                                      </p:to>
+                                    </p:set>
+                                    <p:animEffect transition="in" filter="fade">
+                                      <p:cBhvr>
+                                        <p:cTn id="13" dur="500"/>
+                                        <p:tgtEl>
+                                          <p:spTgt spid="9"/>
+                                        </p:tgtEl>
+                                      </p:cBhvr>
+                                    </p:animEffect>
+                                  </p:childTnLst>
+                                </p:cTn>
+                              </p:par>
+                              <p:par>
+                                <p:cTn id="14" presetID="10" presetClass="entr" presetSubtype="0" fill="hold" nodeType="withEffect">
+                                  <p:stCondLst>
+                                    <p:cond delay="675"/>
+                                  </p:stCondLst>
+                                  <p:childTnLst>
+                                    <p:set>
+                                      <p:cBhvr>
+                                        <p:cTn id="15" dur="1" fill="hold">
+                                          <p:stCondLst>
+                                            <p:cond delay="0"/>
+                                          </p:stCondLst>
+                                        </p:cTn>
+                                        <p:tgtEl>
+                                          <p:spTgt spid="52"/>
+                                        </p:tgtEl>
+                                        <p:attrNameLst>
+                                          <p:attrName>style.visibility</p:attrName>
+                                        </p:attrNameLst>
+                                      </p:cBhvr>
+                                      <p:to>
+                                        <p:strVal val="visible"/>
+                                      </p:to>
+                                    </p:set>
+                                    <p:animEffect transition="in" filter="fade">
+                                      <p:cBhvr>
+                                        <p:cTn id="16" dur="500"/>
+                                        <p:tgtEl>
+                                          <p:spTgt spid="52"/>
+                                        </p:tgtEl>
+                                      </p:cBhvr>
+                                    </p:animEffect>
+                                  </p:childTnLst>
+                                </p:cTn>
+                              </p:par>
+                              <p:par>
+                                <p:cTn id="17" presetID="10" presetClass="entr" presetSubtype="0" fill="hold" nodeType="withEffect">
+                                  <p:stCondLst>
+                                    <p:cond delay="900"/>
+                                  </p:stCondLst>
+                                  <p:childTnLst>
+                                    <p:set>
+                                      <p:cBhvr>
+                                        <p:cTn id="18" dur="1" fill="hold">
+                                          <p:stCondLst>
+                                            <p:cond delay="0"/>
+                                          </p:stCondLst>
+                                        </p:cTn>
+                                        <p:tgtEl>
+                                          <p:spTgt spid="101"/>
+                                        </p:tgtEl>
+                                        <p:attrNameLst>
+                                          <p:attrName>style.visibility</p:attrName>
+                                        </p:attrNameLst>
+                                      </p:cBhvr>
+                                      <p:to>
+                                        <p:strVal val="visible"/>
+                                      </p:to>
+                                    </p:set>
+                                    <p:animEffect transition="in" filter="fade">
+                                      <p:cBhvr>
+                                        <p:cTn id="19" dur="500"/>
+                                        <p:tgtEl>
+                                          <p:spTgt spid="101"/>
+                                        </p:tgtEl>
+                                      </p:cBhvr>
+                                    </p:animEffect>
+                                  </p:childTnLst>
+                                </p:cTn>
+                              </p:par>
+                              <p:par>
+                                <p:cTn id="20" presetID="10" presetClass="entr" presetSubtype="0" fill="hold" nodeType="withEffect">
+                                  <p:stCondLst>
+                                    <p:cond delay="1125"/>
+                                  </p:stCondLst>
+                                  <p:childTnLst>
+                                    <p:set>
+                                      <p:cBhvr>
+                                        <p:cTn id="21" dur="1" fill="hold">
+                                          <p:stCondLst>
+                                            <p:cond delay="0"/>
+                                          </p:stCondLst>
+                                        </p:cTn>
+                                        <p:tgtEl>
+                                          <p:spTgt spid="139"/>
+                                        </p:tgtEl>
+                                        <p:attrNameLst>
+                                          <p:attrName>style.visibility</p:attrName>
+                                        </p:attrNameLst>
+                                      </p:cBhvr>
+                                      <p:to>
+                                        <p:strVal val="visible"/>
+                                      </p:to>
+                                    </p:set>
+                                    <p:animEffect transition="in" filter="fade">
+                                      <p:cBhvr>
+                                        <p:cTn id="22" dur="500"/>
+                                        <p:tgtEl>
+                                          <p:spTgt spid="139"/>
+                                        </p:tgtEl>
+                                      </p:cBhvr>
+                                    </p:animEffect>
+                                  </p:childTnLst>
+                                </p:cTn>
+                              </p:par>
+                              <p:par>
+                                <p:cTn id="23" presetID="10" presetClass="entr" presetSubtype="0" fill="hold" nodeType="withEffect">
+                                  <p:stCondLst>
+                                    <p:cond delay="1350"/>
+                                  </p:stCondLst>
+                                  <p:childTnLst>
+                                    <p:set>
+                                      <p:cBhvr>
+                                        <p:cTn id="24" dur="1" fill="hold">
+                                          <p:stCondLst>
+                                            <p:cond delay="0"/>
+                                          </p:stCondLst>
+                                        </p:cTn>
+                                        <p:tgtEl>
+                                          <p:spTgt spid="140"/>
+                                        </p:tgtEl>
+                                        <p:attrNameLst>
+                                          <p:attrName>style.visibility</p:attrName>
+                                        </p:attrNameLst>
+                                      </p:cBhvr>
+                                      <p:to>
+                                        <p:strVal val="visible"/>
+                                      </p:to>
+                                    </p:set>
+                                    <p:animEffect transition="in" filter="fade">
+                                      <p:cBhvr>
+                                        <p:cTn id="25" dur="500"/>
+                                        <p:tgtEl>
+                                          <p:spTgt spid="140"/>
+                                        </p:tgtEl>
+                                      </p:cBhvr>
+                                    </p:animEffect>
+                                  </p:childTnLst>
+                                </p:cTn>
+                              </p:par>
+                              <p:par>
+                                <p:cTn id="26" presetID="10" presetClass="entr" presetSubtype="0" fill="hold" nodeType="withEffect">
+                                  <p:stCondLst>
+                                    <p:cond delay="1575"/>
+                                  </p:stCondLst>
+                                  <p:childTnLst>
+                                    <p:set>
+                                      <p:cBhvr>
+                                        <p:cTn id="27" dur="1" fill="hold">
+                                          <p:stCondLst>
+                                            <p:cond delay="0"/>
+                                          </p:stCondLst>
+                                        </p:cTn>
+                                        <p:tgtEl>
+                                          <p:spTgt spid="141"/>
+                                        </p:tgtEl>
+                                        <p:attrNameLst>
+                                          <p:attrName>style.visibility</p:attrName>
+                                        </p:attrNameLst>
+                                      </p:cBhvr>
+                                      <p:to>
+                                        <p:strVal val="visible"/>
+                                      </p:to>
+                                    </p:set>
+                                    <p:animEffect transition="in" filter="fade">
+                                      <p:cBhvr>
+                                        <p:cTn id="28" dur="500"/>
+                                        <p:tgtEl>
+                                          <p:spTgt spid="141"/>
+                                        </p:tgtEl>
+                                      </p:cBhvr>
+                                    </p:animEffect>
+                                  </p:childTnLst>
+                                </p:cTn>
+                              </p:par>
+                            </p:childTnLst>
+                          </p:cTn>
+                        </p:par>
+                      </p:childTnLst>
+                    </p:cTn>
+                  </p:par>
+                </p:childTnLst>
+              </p:cTn>
+              <p:prevCondLst>
+                <p:cond evt="onPrev" delay="0">
+                  <p:tgtEl>
+                    <p:sldTgt/>
+                  </p:tgtEl>
+                </p:cond>
+              </p:prevCondLst>
+              <p:nextCondLst>
+                <p:cond evt="onNext" delay="0">
+                  <p:tgtEl>
+                    <p:sldTgt/>
+                  </p:tgtEl>
+                </p:cond>
+              </p:nextCondLst>
+            </p:seq>
+          </p:childTnLst>
+        </p:cTn>
+      </p:par>
+    </p:tnLst>
+  </p:timing>
 </p:sld>
 </file>
 
@@ -32803,6 +35736,664 @@
   <p:clrMapOvr>
     <a:masterClrMapping/>
   </p:clrMapOvr>
+  <mc:AlternateContent xmlns:mc="http://schemas.openxmlformats.org/markup-compatibility/2006">
+    <mc:Choice xmlns:p14="http://schemas.microsoft.com/office/powerpoint/2010/main" Requires="p14">
+      <p:transition spd="med" p14:dur="700">
+        <p:fade/>
+      </p:transition>
+    </mc:Choice>
+    <mc:Fallback>
+      <p:transition spd="med">
+        <p:fade/>
+      </p:transition>
+    </mc:Fallback>
+  </mc:AlternateContent>
+  <p:timing>
+    <p:tnLst>
+      <p:par>
+        <p:cTn id="1" dur="indefinite" restart="never" nodeType="tmRoot">
+          <p:childTnLst>
+            <p:seq concurrent="1" nextAc="seek">
+              <p:cTn id="2" dur="indefinite" nodeType="mainSeq">
+                <p:childTnLst>
+                  <p:par>
+                    <p:cTn id="3" fill="hold">
+                      <p:stCondLst>
+                        <p:cond delay="indefinite"/>
+                        <p:cond evt="onBegin" delay="0">
+                          <p:tn val="2"/>
+                        </p:cond>
+                      </p:stCondLst>
+                      <p:childTnLst>
+                        <p:par>
+                          <p:cTn id="4" fill="hold">
+                            <p:stCondLst>
+                              <p:cond delay="0"/>
+                            </p:stCondLst>
+                            <p:childTnLst>
+                              <p:par>
+                                <p:cTn id="5" presetID="10" presetClass="entr" presetSubtype="0" fill="hold" nodeType="afterEffect">
+                                  <p:stCondLst>
+                                    <p:cond delay="0"/>
+                                  </p:stCondLst>
+                                  <p:childTnLst>
+                                    <p:set>
+                                      <p:cBhvr>
+                                        <p:cTn id="6" dur="1" fill="hold">
+                                          <p:stCondLst>
+                                            <p:cond delay="0"/>
+                                          </p:stCondLst>
+                                        </p:cTn>
+                                        <p:tgtEl>
+                                          <p:spTgt spid="3"/>
+                                        </p:tgtEl>
+                                        <p:attrNameLst>
+                                          <p:attrName>style.visibility</p:attrName>
+                                        </p:attrNameLst>
+                                      </p:cBhvr>
+                                      <p:to>
+                                        <p:strVal val="visible"/>
+                                      </p:to>
+                                    </p:set>
+                                    <p:animEffect transition="in" filter="fade">
+                                      <p:cBhvr>
+                                        <p:cTn id="7" dur="500"/>
+                                        <p:tgtEl>
+                                          <p:spTgt spid="3"/>
+                                        </p:tgtEl>
+                                      </p:cBhvr>
+                                    </p:animEffect>
+                                  </p:childTnLst>
+                                </p:cTn>
+                              </p:par>
+                              <p:par>
+                                <p:cTn id="8" presetID="10" presetClass="entr" presetSubtype="0" fill="hold" nodeType="withEffect">
+                                  <p:stCondLst>
+                                    <p:cond delay="105"/>
+                                  </p:stCondLst>
+                                  <p:childTnLst>
+                                    <p:set>
+                                      <p:cBhvr>
+                                        <p:cTn id="9" dur="1" fill="hold">
+                                          <p:stCondLst>
+                                            <p:cond delay="0"/>
+                                          </p:stCondLst>
+                                        </p:cTn>
+                                        <p:tgtEl>
+                                          <p:spTgt spid="4"/>
+                                        </p:tgtEl>
+                                        <p:attrNameLst>
+                                          <p:attrName>style.visibility</p:attrName>
+                                        </p:attrNameLst>
+                                      </p:cBhvr>
+                                      <p:to>
+                                        <p:strVal val="visible"/>
+                                      </p:to>
+                                    </p:set>
+                                    <p:animEffect transition="in" filter="fade">
+                                      <p:cBhvr>
+                                        <p:cTn id="10" dur="500"/>
+                                        <p:tgtEl>
+                                          <p:spTgt spid="4"/>
+                                        </p:tgtEl>
+                                      </p:cBhvr>
+                                    </p:animEffect>
+                                  </p:childTnLst>
+                                </p:cTn>
+                              </p:par>
+                              <p:par>
+                                <p:cTn id="11" presetID="10" presetClass="entr" presetSubtype="0" fill="hold" nodeType="withEffect">
+                                  <p:stCondLst>
+                                    <p:cond delay="210"/>
+                                  </p:stCondLst>
+                                  <p:childTnLst>
+                                    <p:set>
+                                      <p:cBhvr>
+                                        <p:cTn id="12" dur="1" fill="hold">
+                                          <p:stCondLst>
+                                            <p:cond delay="0"/>
+                                          </p:stCondLst>
+                                        </p:cTn>
+                                        <p:tgtEl>
+                                          <p:spTgt spid="5"/>
+                                        </p:tgtEl>
+                                        <p:attrNameLst>
+                                          <p:attrName>style.visibility</p:attrName>
+                                        </p:attrNameLst>
+                                      </p:cBhvr>
+                                      <p:to>
+                                        <p:strVal val="visible"/>
+                                      </p:to>
+                                    </p:set>
+                                    <p:animEffect transition="in" filter="fade">
+                                      <p:cBhvr>
+                                        <p:cTn id="13" dur="500"/>
+                                        <p:tgtEl>
+                                          <p:spTgt spid="5"/>
+                                        </p:tgtEl>
+                                      </p:cBhvr>
+                                    </p:animEffect>
+                                  </p:childTnLst>
+                                </p:cTn>
+                              </p:par>
+                              <p:par>
+                                <p:cTn id="14" presetID="10" presetClass="entr" presetSubtype="0" fill="hold" nodeType="withEffect">
+                                  <p:stCondLst>
+                                    <p:cond delay="315"/>
+                                  </p:stCondLst>
+                                  <p:childTnLst>
+                                    <p:set>
+                                      <p:cBhvr>
+                                        <p:cTn id="15" dur="1" fill="hold">
+                                          <p:stCondLst>
+                                            <p:cond delay="0"/>
+                                          </p:stCondLst>
+                                        </p:cTn>
+                                        <p:tgtEl>
+                                          <p:spTgt spid="6"/>
+                                        </p:tgtEl>
+                                        <p:attrNameLst>
+                                          <p:attrName>style.visibility</p:attrName>
+                                        </p:attrNameLst>
+                                      </p:cBhvr>
+                                      <p:to>
+                                        <p:strVal val="visible"/>
+                                      </p:to>
+                                    </p:set>
+                                    <p:animEffect transition="in" filter="fade">
+                                      <p:cBhvr>
+                                        <p:cTn id="16" dur="500"/>
+                                        <p:tgtEl>
+                                          <p:spTgt spid="6"/>
+                                        </p:tgtEl>
+                                      </p:cBhvr>
+                                    </p:animEffect>
+                                  </p:childTnLst>
+                                </p:cTn>
+                              </p:par>
+                              <p:par>
+                                <p:cTn id="17" presetID="10" presetClass="entr" presetSubtype="0" fill="hold" nodeType="withEffect">
+                                  <p:stCondLst>
+                                    <p:cond delay="420"/>
+                                  </p:stCondLst>
+                                  <p:childTnLst>
+                                    <p:set>
+                                      <p:cBhvr>
+                                        <p:cTn id="18" dur="1" fill="hold">
+                                          <p:stCondLst>
+                                            <p:cond delay="0"/>
+                                          </p:stCondLst>
+                                        </p:cTn>
+                                        <p:tgtEl>
+                                          <p:spTgt spid="7"/>
+                                        </p:tgtEl>
+                                        <p:attrNameLst>
+                                          <p:attrName>style.visibility</p:attrName>
+                                        </p:attrNameLst>
+                                      </p:cBhvr>
+                                      <p:to>
+                                        <p:strVal val="visible"/>
+                                      </p:to>
+                                    </p:set>
+                                    <p:animEffect transition="in" filter="fade">
+                                      <p:cBhvr>
+                                        <p:cTn id="19" dur="500"/>
+                                        <p:tgtEl>
+                                          <p:spTgt spid="7"/>
+                                        </p:tgtEl>
+                                      </p:cBhvr>
+                                    </p:animEffect>
+                                  </p:childTnLst>
+                                </p:cTn>
+                              </p:par>
+                              <p:par>
+                                <p:cTn id="20" presetID="10" presetClass="entr" presetSubtype="0" fill="hold" nodeType="withEffect">
+                                  <p:stCondLst>
+                                    <p:cond delay="525"/>
+                                  </p:stCondLst>
+                                  <p:childTnLst>
+                                    <p:set>
+                                      <p:cBhvr>
+                                        <p:cTn id="21" dur="1" fill="hold">
+                                          <p:stCondLst>
+                                            <p:cond delay="0"/>
+                                          </p:stCondLst>
+                                        </p:cTn>
+                                        <p:tgtEl>
+                                          <p:spTgt spid="8"/>
+                                        </p:tgtEl>
+                                        <p:attrNameLst>
+                                          <p:attrName>style.visibility</p:attrName>
+                                        </p:attrNameLst>
+                                      </p:cBhvr>
+                                      <p:to>
+                                        <p:strVal val="visible"/>
+                                      </p:to>
+                                    </p:set>
+                                    <p:animEffect transition="in" filter="fade">
+                                      <p:cBhvr>
+                                        <p:cTn id="22" dur="500"/>
+                                        <p:tgtEl>
+                                          <p:spTgt spid="8"/>
+                                        </p:tgtEl>
+                                      </p:cBhvr>
+                                    </p:animEffect>
+                                  </p:childTnLst>
+                                </p:cTn>
+                              </p:par>
+                              <p:par>
+                                <p:cTn id="23" presetID="10" presetClass="entr" presetSubtype="0" fill="hold" nodeType="withEffect">
+                                  <p:stCondLst>
+                                    <p:cond delay="630"/>
+                                  </p:stCondLst>
+                                  <p:childTnLst>
+                                    <p:set>
+                                      <p:cBhvr>
+                                        <p:cTn id="24" dur="1" fill="hold">
+                                          <p:stCondLst>
+                                            <p:cond delay="0"/>
+                                          </p:stCondLst>
+                                        </p:cTn>
+                                        <p:tgtEl>
+                                          <p:spTgt spid="9"/>
+                                        </p:tgtEl>
+                                        <p:attrNameLst>
+                                          <p:attrName>style.visibility</p:attrName>
+                                        </p:attrNameLst>
+                                      </p:cBhvr>
+                                      <p:to>
+                                        <p:strVal val="visible"/>
+                                      </p:to>
+                                    </p:set>
+                                    <p:animEffect transition="in" filter="fade">
+                                      <p:cBhvr>
+                                        <p:cTn id="25" dur="500"/>
+                                        <p:tgtEl>
+                                          <p:spTgt spid="9"/>
+                                        </p:tgtEl>
+                                      </p:cBhvr>
+                                    </p:animEffect>
+                                  </p:childTnLst>
+                                </p:cTn>
+                              </p:par>
+                              <p:par>
+                                <p:cTn id="26" presetID="10" presetClass="entr" presetSubtype="0" fill="hold" nodeType="withEffect">
+                                  <p:stCondLst>
+                                    <p:cond delay="735"/>
+                                  </p:stCondLst>
+                                  <p:childTnLst>
+                                    <p:set>
+                                      <p:cBhvr>
+                                        <p:cTn id="27" dur="1" fill="hold">
+                                          <p:stCondLst>
+                                            <p:cond delay="0"/>
+                                          </p:stCondLst>
+                                        </p:cTn>
+                                        <p:tgtEl>
+                                          <p:spTgt spid="10"/>
+                                        </p:tgtEl>
+                                        <p:attrNameLst>
+                                          <p:attrName>style.visibility</p:attrName>
+                                        </p:attrNameLst>
+                                      </p:cBhvr>
+                                      <p:to>
+                                        <p:strVal val="visible"/>
+                                      </p:to>
+                                    </p:set>
+                                    <p:animEffect transition="in" filter="fade">
+                                      <p:cBhvr>
+                                        <p:cTn id="28" dur="500"/>
+                                        <p:tgtEl>
+                                          <p:spTgt spid="10"/>
+                                        </p:tgtEl>
+                                      </p:cBhvr>
+                                    </p:animEffect>
+                                  </p:childTnLst>
+                                </p:cTn>
+                              </p:par>
+                              <p:par>
+                                <p:cTn id="29" presetID="10" presetClass="entr" presetSubtype="0" fill="hold" nodeType="withEffect">
+                                  <p:stCondLst>
+                                    <p:cond delay="840"/>
+                                  </p:stCondLst>
+                                  <p:childTnLst>
+                                    <p:set>
+                                      <p:cBhvr>
+                                        <p:cTn id="30" dur="1" fill="hold">
+                                          <p:stCondLst>
+                                            <p:cond delay="0"/>
+                                          </p:stCondLst>
+                                        </p:cTn>
+                                        <p:tgtEl>
+                                          <p:spTgt spid="11"/>
+                                        </p:tgtEl>
+                                        <p:attrNameLst>
+                                          <p:attrName>style.visibility</p:attrName>
+                                        </p:attrNameLst>
+                                      </p:cBhvr>
+                                      <p:to>
+                                        <p:strVal val="visible"/>
+                                      </p:to>
+                                    </p:set>
+                                    <p:animEffect transition="in" filter="fade">
+                                      <p:cBhvr>
+                                        <p:cTn id="31" dur="500"/>
+                                        <p:tgtEl>
+                                          <p:spTgt spid="11"/>
+                                        </p:tgtEl>
+                                      </p:cBhvr>
+                                    </p:animEffect>
+                                  </p:childTnLst>
+                                </p:cTn>
+                              </p:par>
+                              <p:par>
+                                <p:cTn id="32" presetID="10" presetClass="entr" presetSubtype="0" fill="hold" nodeType="withEffect">
+                                  <p:stCondLst>
+                                    <p:cond delay="945"/>
+                                  </p:stCondLst>
+                                  <p:childTnLst>
+                                    <p:set>
+                                      <p:cBhvr>
+                                        <p:cTn id="33" dur="1" fill="hold">
+                                          <p:stCondLst>
+                                            <p:cond delay="0"/>
+                                          </p:stCondLst>
+                                        </p:cTn>
+                                        <p:tgtEl>
+                                          <p:spTgt spid="12"/>
+                                        </p:tgtEl>
+                                        <p:attrNameLst>
+                                          <p:attrName>style.visibility</p:attrName>
+                                        </p:attrNameLst>
+                                      </p:cBhvr>
+                                      <p:to>
+                                        <p:strVal val="visible"/>
+                                      </p:to>
+                                    </p:set>
+                                    <p:animEffect transition="in" filter="fade">
+                                      <p:cBhvr>
+                                        <p:cTn id="34" dur="500"/>
+                                        <p:tgtEl>
+                                          <p:spTgt spid="12"/>
+                                        </p:tgtEl>
+                                      </p:cBhvr>
+                                    </p:animEffect>
+                                  </p:childTnLst>
+                                </p:cTn>
+                              </p:par>
+                              <p:par>
+                                <p:cTn id="35" presetID="10" presetClass="entr" presetSubtype="0" fill="hold" nodeType="withEffect">
+                                  <p:stCondLst>
+                                    <p:cond delay="1050"/>
+                                  </p:stCondLst>
+                                  <p:childTnLst>
+                                    <p:set>
+                                      <p:cBhvr>
+                                        <p:cTn id="36" dur="1" fill="hold">
+                                          <p:stCondLst>
+                                            <p:cond delay="0"/>
+                                          </p:stCondLst>
+                                        </p:cTn>
+                                        <p:tgtEl>
+                                          <p:spTgt spid="13"/>
+                                        </p:tgtEl>
+                                        <p:attrNameLst>
+                                          <p:attrName>style.visibility</p:attrName>
+                                        </p:attrNameLst>
+                                      </p:cBhvr>
+                                      <p:to>
+                                        <p:strVal val="visible"/>
+                                      </p:to>
+                                    </p:set>
+                                    <p:animEffect transition="in" filter="fade">
+                                      <p:cBhvr>
+                                        <p:cTn id="37" dur="500"/>
+                                        <p:tgtEl>
+                                          <p:spTgt spid="13"/>
+                                        </p:tgtEl>
+                                      </p:cBhvr>
+                                    </p:animEffect>
+                                  </p:childTnLst>
+                                </p:cTn>
+                              </p:par>
+                              <p:par>
+                                <p:cTn id="38" presetID="10" presetClass="entr" presetSubtype="0" fill="hold" nodeType="withEffect">
+                                  <p:stCondLst>
+                                    <p:cond delay="1155"/>
+                                  </p:stCondLst>
+                                  <p:childTnLst>
+                                    <p:set>
+                                      <p:cBhvr>
+                                        <p:cTn id="39" dur="1" fill="hold">
+                                          <p:stCondLst>
+                                            <p:cond delay="0"/>
+                                          </p:stCondLst>
+                                        </p:cTn>
+                                        <p:tgtEl>
+                                          <p:spTgt spid="14"/>
+                                        </p:tgtEl>
+                                        <p:attrNameLst>
+                                          <p:attrName>style.visibility</p:attrName>
+                                        </p:attrNameLst>
+                                      </p:cBhvr>
+                                      <p:to>
+                                        <p:strVal val="visible"/>
+                                      </p:to>
+                                    </p:set>
+                                    <p:animEffect transition="in" filter="fade">
+                                      <p:cBhvr>
+                                        <p:cTn id="40" dur="500"/>
+                                        <p:tgtEl>
+                                          <p:spTgt spid="14"/>
+                                        </p:tgtEl>
+                                      </p:cBhvr>
+                                    </p:animEffect>
+                                  </p:childTnLst>
+                                </p:cTn>
+                              </p:par>
+                              <p:par>
+                                <p:cTn id="41" presetID="10" presetClass="entr" presetSubtype="0" fill="hold" nodeType="withEffect">
+                                  <p:stCondLst>
+                                    <p:cond delay="1260"/>
+                                  </p:stCondLst>
+                                  <p:childTnLst>
+                                    <p:set>
+                                      <p:cBhvr>
+                                        <p:cTn id="42" dur="1" fill="hold">
+                                          <p:stCondLst>
+                                            <p:cond delay="0"/>
+                                          </p:stCondLst>
+                                        </p:cTn>
+                                        <p:tgtEl>
+                                          <p:spTgt spid="15"/>
+                                        </p:tgtEl>
+                                        <p:attrNameLst>
+                                          <p:attrName>style.visibility</p:attrName>
+                                        </p:attrNameLst>
+                                      </p:cBhvr>
+                                      <p:to>
+                                        <p:strVal val="visible"/>
+                                      </p:to>
+                                    </p:set>
+                                    <p:animEffect transition="in" filter="fade">
+                                      <p:cBhvr>
+                                        <p:cTn id="43" dur="500"/>
+                                        <p:tgtEl>
+                                          <p:spTgt spid="15"/>
+                                        </p:tgtEl>
+                                      </p:cBhvr>
+                                    </p:animEffect>
+                                  </p:childTnLst>
+                                </p:cTn>
+                              </p:par>
+                              <p:par>
+                                <p:cTn id="44" presetID="10" presetClass="entr" presetSubtype="0" fill="hold" nodeType="withEffect">
+                                  <p:stCondLst>
+                                    <p:cond delay="1365"/>
+                                  </p:stCondLst>
+                                  <p:childTnLst>
+                                    <p:set>
+                                      <p:cBhvr>
+                                        <p:cTn id="45" dur="1" fill="hold">
+                                          <p:stCondLst>
+                                            <p:cond delay="0"/>
+                                          </p:stCondLst>
+                                        </p:cTn>
+                                        <p:tgtEl>
+                                          <p:spTgt spid="16"/>
+                                        </p:tgtEl>
+                                        <p:attrNameLst>
+                                          <p:attrName>style.visibility</p:attrName>
+                                        </p:attrNameLst>
+                                      </p:cBhvr>
+                                      <p:to>
+                                        <p:strVal val="visible"/>
+                                      </p:to>
+                                    </p:set>
+                                    <p:animEffect transition="in" filter="fade">
+                                      <p:cBhvr>
+                                        <p:cTn id="46" dur="500"/>
+                                        <p:tgtEl>
+                                          <p:spTgt spid="16"/>
+                                        </p:tgtEl>
+                                      </p:cBhvr>
+                                    </p:animEffect>
+                                  </p:childTnLst>
+                                </p:cTn>
+                              </p:par>
+                              <p:par>
+                                <p:cTn id="47" presetID="10" presetClass="entr" presetSubtype="0" fill="hold" nodeType="withEffect">
+                                  <p:stCondLst>
+                                    <p:cond delay="1470"/>
+                                  </p:stCondLst>
+                                  <p:childTnLst>
+                                    <p:set>
+                                      <p:cBhvr>
+                                        <p:cTn id="48" dur="1" fill="hold">
+                                          <p:stCondLst>
+                                            <p:cond delay="0"/>
+                                          </p:stCondLst>
+                                        </p:cTn>
+                                        <p:tgtEl>
+                                          <p:spTgt spid="17"/>
+                                        </p:tgtEl>
+                                        <p:attrNameLst>
+                                          <p:attrName>style.visibility</p:attrName>
+                                        </p:attrNameLst>
+                                      </p:cBhvr>
+                                      <p:to>
+                                        <p:strVal val="visible"/>
+                                      </p:to>
+                                    </p:set>
+                                    <p:animEffect transition="in" filter="fade">
+                                      <p:cBhvr>
+                                        <p:cTn id="49" dur="500"/>
+                                        <p:tgtEl>
+                                          <p:spTgt spid="17"/>
+                                        </p:tgtEl>
+                                      </p:cBhvr>
+                                    </p:animEffect>
+                                  </p:childTnLst>
+                                </p:cTn>
+                              </p:par>
+                              <p:par>
+                                <p:cTn id="50" presetID="10" presetClass="entr" presetSubtype="0" fill="hold" nodeType="withEffect">
+                                  <p:stCondLst>
+                                    <p:cond delay="1575"/>
+                                  </p:stCondLst>
+                                  <p:childTnLst>
+                                    <p:set>
+                                      <p:cBhvr>
+                                        <p:cTn id="51" dur="1" fill="hold">
+                                          <p:stCondLst>
+                                            <p:cond delay="0"/>
+                                          </p:stCondLst>
+                                        </p:cTn>
+                                        <p:tgtEl>
+                                          <p:spTgt spid="18"/>
+                                        </p:tgtEl>
+                                        <p:attrNameLst>
+                                          <p:attrName>style.visibility</p:attrName>
+                                        </p:attrNameLst>
+                                      </p:cBhvr>
+                                      <p:to>
+                                        <p:strVal val="visible"/>
+                                      </p:to>
+                                    </p:set>
+                                    <p:animEffect transition="in" filter="fade">
+                                      <p:cBhvr>
+                                        <p:cTn id="52" dur="500"/>
+                                        <p:tgtEl>
+                                          <p:spTgt spid="18"/>
+                                        </p:tgtEl>
+                                      </p:cBhvr>
+                                    </p:animEffect>
+                                  </p:childTnLst>
+                                </p:cTn>
+                              </p:par>
+                              <p:par>
+                                <p:cTn id="53" presetID="10" presetClass="entr" presetSubtype="0" fill="hold" nodeType="withEffect">
+                                  <p:stCondLst>
+                                    <p:cond delay="1680"/>
+                                  </p:stCondLst>
+                                  <p:childTnLst>
+                                    <p:set>
+                                      <p:cBhvr>
+                                        <p:cTn id="54" dur="1" fill="hold">
+                                          <p:stCondLst>
+                                            <p:cond delay="0"/>
+                                          </p:stCondLst>
+                                        </p:cTn>
+                                        <p:tgtEl>
+                                          <p:spTgt spid="19"/>
+                                        </p:tgtEl>
+                                        <p:attrNameLst>
+                                          <p:attrName>style.visibility</p:attrName>
+                                        </p:attrNameLst>
+                                      </p:cBhvr>
+                                      <p:to>
+                                        <p:strVal val="visible"/>
+                                      </p:to>
+                                    </p:set>
+                                    <p:animEffect transition="in" filter="fade">
+                                      <p:cBhvr>
+                                        <p:cTn id="55" dur="500"/>
+                                        <p:tgtEl>
+                                          <p:spTgt spid="19"/>
+                                        </p:tgtEl>
+                                      </p:cBhvr>
+                                    </p:animEffect>
+                                  </p:childTnLst>
+                                </p:cTn>
+                              </p:par>
+                            </p:childTnLst>
+                          </p:cTn>
+                        </p:par>
+                      </p:childTnLst>
+                    </p:cTn>
+                  </p:par>
+                </p:childTnLst>
+              </p:cTn>
+              <p:prevCondLst>
+                <p:cond evt="onPrev" delay="0">
+                  <p:tgtEl>
+                    <p:sldTgt/>
+                  </p:tgtEl>
+                </p:cond>
+              </p:prevCondLst>
+              <p:nextCondLst>
+                <p:cond evt="onNext" delay="0">
+                  <p:tgtEl>
+                    <p:sldTgt/>
+                  </p:tgtEl>
+                </p:cond>
+              </p:nextCondLst>
+            </p:seq>
+          </p:childTnLst>
+        </p:cTn>
+      </p:par>
+    </p:tnLst>
+  </p:timing>
 </p:sld>
 </file>
 
@@ -33654,6 +37245,419 @@
   <p:clrMapOvr>
     <a:masterClrMapping/>
   </p:clrMapOvr>
+  <mc:AlternateContent xmlns:mc="http://schemas.openxmlformats.org/markup-compatibility/2006">
+    <mc:Choice xmlns:p14="http://schemas.microsoft.com/office/powerpoint/2010/main" Requires="p14">
+      <p:transition spd="med" p14:dur="700">
+        <p:fade/>
+      </p:transition>
+    </mc:Choice>
+    <mc:Fallback>
+      <p:transition spd="med">
+        <p:fade/>
+      </p:transition>
+    </mc:Fallback>
+  </mc:AlternateContent>
+  <p:timing>
+    <p:tnLst>
+      <p:par>
+        <p:cTn id="1" dur="indefinite" restart="never" nodeType="tmRoot">
+          <p:childTnLst>
+            <p:seq concurrent="1" nextAc="seek">
+              <p:cTn id="2" dur="indefinite" nodeType="mainSeq">
+                <p:childTnLst>
+                  <p:par>
+                    <p:cTn id="3" fill="hold">
+                      <p:stCondLst>
+                        <p:cond delay="indefinite"/>
+                        <p:cond evt="onBegin" delay="0">
+                          <p:tn val="2"/>
+                        </p:cond>
+                      </p:stCondLst>
+                      <p:childTnLst>
+                        <p:par>
+                          <p:cTn id="4" fill="hold">
+                            <p:stCondLst>
+                              <p:cond delay="0"/>
+                            </p:stCondLst>
+                            <p:childTnLst>
+                              <p:par>
+                                <p:cTn id="5" presetID="10" presetClass="entr" presetSubtype="0" fill="hold" nodeType="afterEffect">
+                                  <p:stCondLst>
+                                    <p:cond delay="0"/>
+                                  </p:stCondLst>
+                                  <p:childTnLst>
+                                    <p:set>
+                                      <p:cBhvr>
+                                        <p:cTn id="6" dur="1" fill="hold">
+                                          <p:stCondLst>
+                                            <p:cond delay="0"/>
+                                          </p:stCondLst>
+                                        </p:cTn>
+                                        <p:tgtEl>
+                                          <p:spTgt spid="4"/>
+                                        </p:tgtEl>
+                                        <p:attrNameLst>
+                                          <p:attrName>style.visibility</p:attrName>
+                                        </p:attrNameLst>
+                                      </p:cBhvr>
+                                      <p:to>
+                                        <p:strVal val="visible"/>
+                                      </p:to>
+                                    </p:set>
+                                    <p:animEffect transition="in" filter="fade">
+                                      <p:cBhvr>
+                                        <p:cTn id="7" dur="500"/>
+                                        <p:tgtEl>
+                                          <p:spTgt spid="4"/>
+                                        </p:tgtEl>
+                                      </p:cBhvr>
+                                    </p:animEffect>
+                                  </p:childTnLst>
+                                </p:cTn>
+                              </p:par>
+                              <p:par>
+                                <p:cTn id="8" presetID="10" presetClass="entr" presetSubtype="0" fill="hold" nodeType="withEffect">
+                                  <p:stCondLst>
+                                    <p:cond delay="180"/>
+                                  </p:stCondLst>
+                                  <p:childTnLst>
+                                    <p:set>
+                                      <p:cBhvr>
+                                        <p:cTn id="9" dur="1" fill="hold">
+                                          <p:stCondLst>
+                                            <p:cond delay="0"/>
+                                          </p:stCondLst>
+                                        </p:cTn>
+                                        <p:tgtEl>
+                                          <p:spTgt spid="9"/>
+                                        </p:tgtEl>
+                                        <p:attrNameLst>
+                                          <p:attrName>style.visibility</p:attrName>
+                                        </p:attrNameLst>
+                                      </p:cBhvr>
+                                      <p:to>
+                                        <p:strVal val="visible"/>
+                                      </p:to>
+                                    </p:set>
+                                    <p:animEffect transition="in" filter="fade">
+                                      <p:cBhvr>
+                                        <p:cTn id="10" dur="500"/>
+                                        <p:tgtEl>
+                                          <p:spTgt spid="9"/>
+                                        </p:tgtEl>
+                                      </p:cBhvr>
+                                    </p:animEffect>
+                                  </p:childTnLst>
+                                </p:cTn>
+                              </p:par>
+                              <p:par>
+                                <p:cTn id="11" presetID="10" presetClass="entr" presetSubtype="0" fill="hold" nodeType="withEffect">
+                                  <p:stCondLst>
+                                    <p:cond delay="360"/>
+                                  </p:stCondLst>
+                                  <p:childTnLst>
+                                    <p:set>
+                                      <p:cBhvr>
+                                        <p:cTn id="12" dur="1" fill="hold">
+                                          <p:stCondLst>
+                                            <p:cond delay="0"/>
+                                          </p:stCondLst>
+                                        </p:cTn>
+                                        <p:tgtEl>
+                                          <p:spTgt spid="10"/>
+                                        </p:tgtEl>
+                                        <p:attrNameLst>
+                                          <p:attrName>style.visibility</p:attrName>
+                                        </p:attrNameLst>
+                                      </p:cBhvr>
+                                      <p:to>
+                                        <p:strVal val="visible"/>
+                                      </p:to>
+                                    </p:set>
+                                    <p:animEffect transition="in" filter="fade">
+                                      <p:cBhvr>
+                                        <p:cTn id="13" dur="500"/>
+                                        <p:tgtEl>
+                                          <p:spTgt spid="10"/>
+                                        </p:tgtEl>
+                                      </p:cBhvr>
+                                    </p:animEffect>
+                                  </p:childTnLst>
+                                </p:cTn>
+                              </p:par>
+                              <p:par>
+                                <p:cTn id="14" presetID="10" presetClass="entr" presetSubtype="0" fill="hold" nodeType="withEffect">
+                                  <p:stCondLst>
+                                    <p:cond delay="540"/>
+                                  </p:stCondLst>
+                                  <p:childTnLst>
+                                    <p:set>
+                                      <p:cBhvr>
+                                        <p:cTn id="15" dur="1" fill="hold">
+                                          <p:stCondLst>
+                                            <p:cond delay="0"/>
+                                          </p:stCondLst>
+                                        </p:cTn>
+                                        <p:tgtEl>
+                                          <p:spTgt spid="13"/>
+                                        </p:tgtEl>
+                                        <p:attrNameLst>
+                                          <p:attrName>style.visibility</p:attrName>
+                                        </p:attrNameLst>
+                                      </p:cBhvr>
+                                      <p:to>
+                                        <p:strVal val="visible"/>
+                                      </p:to>
+                                    </p:set>
+                                    <p:animEffect transition="in" filter="fade">
+                                      <p:cBhvr>
+                                        <p:cTn id="16" dur="500"/>
+                                        <p:tgtEl>
+                                          <p:spTgt spid="13"/>
+                                        </p:tgtEl>
+                                      </p:cBhvr>
+                                    </p:animEffect>
+                                  </p:childTnLst>
+                                </p:cTn>
+                              </p:par>
+                              <p:par>
+                                <p:cTn id="17" presetID="10" presetClass="entr" presetSubtype="0" fill="hold" nodeType="withEffect">
+                                  <p:stCondLst>
+                                    <p:cond delay="720"/>
+                                  </p:stCondLst>
+                                  <p:childTnLst>
+                                    <p:set>
+                                      <p:cBhvr>
+                                        <p:cTn id="18" dur="1" fill="hold">
+                                          <p:stCondLst>
+                                            <p:cond delay="0"/>
+                                          </p:stCondLst>
+                                        </p:cTn>
+                                        <p:tgtEl>
+                                          <p:spTgt spid="14"/>
+                                        </p:tgtEl>
+                                        <p:attrNameLst>
+                                          <p:attrName>style.visibility</p:attrName>
+                                        </p:attrNameLst>
+                                      </p:cBhvr>
+                                      <p:to>
+                                        <p:strVal val="visible"/>
+                                      </p:to>
+                                    </p:set>
+                                    <p:animEffect transition="in" filter="fade">
+                                      <p:cBhvr>
+                                        <p:cTn id="19" dur="500"/>
+                                        <p:tgtEl>
+                                          <p:spTgt spid="14"/>
+                                        </p:tgtEl>
+                                      </p:cBhvr>
+                                    </p:animEffect>
+                                  </p:childTnLst>
+                                </p:cTn>
+                              </p:par>
+                              <p:par>
+                                <p:cTn id="20" presetID="10" presetClass="entr" presetSubtype="0" fill="hold" nodeType="withEffect">
+                                  <p:stCondLst>
+                                    <p:cond delay="900"/>
+                                  </p:stCondLst>
+                                  <p:childTnLst>
+                                    <p:set>
+                                      <p:cBhvr>
+                                        <p:cTn id="21" dur="1" fill="hold">
+                                          <p:stCondLst>
+                                            <p:cond delay="0"/>
+                                          </p:stCondLst>
+                                        </p:cTn>
+                                        <p:tgtEl>
+                                          <p:spTgt spid="19"/>
+                                        </p:tgtEl>
+                                        <p:attrNameLst>
+                                          <p:attrName>style.visibility</p:attrName>
+                                        </p:attrNameLst>
+                                      </p:cBhvr>
+                                      <p:to>
+                                        <p:strVal val="visible"/>
+                                      </p:to>
+                                    </p:set>
+                                    <p:animEffect transition="in" filter="fade">
+                                      <p:cBhvr>
+                                        <p:cTn id="22" dur="500"/>
+                                        <p:tgtEl>
+                                          <p:spTgt spid="19"/>
+                                        </p:tgtEl>
+                                      </p:cBhvr>
+                                    </p:animEffect>
+                                  </p:childTnLst>
+                                </p:cTn>
+                              </p:par>
+                              <p:par>
+                                <p:cTn id="23" presetID="10" presetClass="entr" presetSubtype="0" fill="hold" nodeType="withEffect">
+                                  <p:stCondLst>
+                                    <p:cond delay="1080"/>
+                                  </p:stCondLst>
+                                  <p:childTnLst>
+                                    <p:set>
+                                      <p:cBhvr>
+                                        <p:cTn id="24" dur="1" fill="hold">
+                                          <p:stCondLst>
+                                            <p:cond delay="0"/>
+                                          </p:stCondLst>
+                                        </p:cTn>
+                                        <p:tgtEl>
+                                          <p:spTgt spid="24"/>
+                                        </p:tgtEl>
+                                        <p:attrNameLst>
+                                          <p:attrName>style.visibility</p:attrName>
+                                        </p:attrNameLst>
+                                      </p:cBhvr>
+                                      <p:to>
+                                        <p:strVal val="visible"/>
+                                      </p:to>
+                                    </p:set>
+                                    <p:animEffect transition="in" filter="fade">
+                                      <p:cBhvr>
+                                        <p:cTn id="25" dur="500"/>
+                                        <p:tgtEl>
+                                          <p:spTgt spid="24"/>
+                                        </p:tgtEl>
+                                      </p:cBhvr>
+                                    </p:animEffect>
+                                  </p:childTnLst>
+                                </p:cTn>
+                              </p:par>
+                              <p:par>
+                                <p:cTn id="26" presetID="10" presetClass="entr" presetSubtype="0" fill="hold" nodeType="withEffect">
+                                  <p:stCondLst>
+                                    <p:cond delay="1260"/>
+                                  </p:stCondLst>
+                                  <p:childTnLst>
+                                    <p:set>
+                                      <p:cBhvr>
+                                        <p:cTn id="27" dur="1" fill="hold">
+                                          <p:stCondLst>
+                                            <p:cond delay="0"/>
+                                          </p:stCondLst>
+                                        </p:cTn>
+                                        <p:tgtEl>
+                                          <p:spTgt spid="25"/>
+                                        </p:tgtEl>
+                                        <p:attrNameLst>
+                                          <p:attrName>style.visibility</p:attrName>
+                                        </p:attrNameLst>
+                                      </p:cBhvr>
+                                      <p:to>
+                                        <p:strVal val="visible"/>
+                                      </p:to>
+                                    </p:set>
+                                    <p:animEffect transition="in" filter="fade">
+                                      <p:cBhvr>
+                                        <p:cTn id="28" dur="500"/>
+                                        <p:tgtEl>
+                                          <p:spTgt spid="25"/>
+                                        </p:tgtEl>
+                                      </p:cBhvr>
+                                    </p:animEffect>
+                                  </p:childTnLst>
+                                </p:cTn>
+                              </p:par>
+                              <p:par>
+                                <p:cTn id="29" presetID="10" presetClass="entr" presetSubtype="0" fill="hold" nodeType="withEffect">
+                                  <p:stCondLst>
+                                    <p:cond delay="1440"/>
+                                  </p:stCondLst>
+                                  <p:childTnLst>
+                                    <p:set>
+                                      <p:cBhvr>
+                                        <p:cTn id="30" dur="1" fill="hold">
+                                          <p:stCondLst>
+                                            <p:cond delay="0"/>
+                                          </p:stCondLst>
+                                        </p:cTn>
+                                        <p:tgtEl>
+                                          <p:spTgt spid="26"/>
+                                        </p:tgtEl>
+                                        <p:attrNameLst>
+                                          <p:attrName>style.visibility</p:attrName>
+                                        </p:attrNameLst>
+                                      </p:cBhvr>
+                                      <p:to>
+                                        <p:strVal val="visible"/>
+                                      </p:to>
+                                    </p:set>
+                                    <p:animEffect transition="in" filter="fade">
+                                      <p:cBhvr>
+                                        <p:cTn id="31" dur="500"/>
+                                        <p:tgtEl>
+                                          <p:spTgt spid="26"/>
+                                        </p:tgtEl>
+                                      </p:cBhvr>
+                                    </p:animEffect>
+                                  </p:childTnLst>
+                                </p:cTn>
+                              </p:par>
+                              <p:par>
+                                <p:cTn id="32" presetID="10" presetClass="entr" presetSubtype="0" fill="hold" nodeType="withEffect">
+                                  <p:stCondLst>
+                                    <p:cond delay="1620"/>
+                                  </p:stCondLst>
+                                  <p:childTnLst>
+                                    <p:set>
+                                      <p:cBhvr>
+                                        <p:cTn id="33" dur="1" fill="hold">
+                                          <p:stCondLst>
+                                            <p:cond delay="0"/>
+                                          </p:stCondLst>
+                                        </p:cTn>
+                                        <p:tgtEl>
+                                          <p:spTgt spid="27"/>
+                                        </p:tgtEl>
+                                        <p:attrNameLst>
+                                          <p:attrName>style.visibility</p:attrName>
+                                        </p:attrNameLst>
+                                      </p:cBhvr>
+                                      <p:to>
+                                        <p:strVal val="visible"/>
+                                      </p:to>
+                                    </p:set>
+                                    <p:animEffect transition="in" filter="fade">
+                                      <p:cBhvr>
+                                        <p:cTn id="34" dur="500"/>
+                                        <p:tgtEl>
+                                          <p:spTgt spid="27"/>
+                                        </p:tgtEl>
+                                      </p:cBhvr>
+                                    </p:animEffect>
+                                  </p:childTnLst>
+                                </p:cTn>
+                              </p:par>
+                            </p:childTnLst>
+                          </p:cTn>
+                        </p:par>
+                      </p:childTnLst>
+                    </p:cTn>
+                  </p:par>
+                </p:childTnLst>
+              </p:cTn>
+              <p:prevCondLst>
+                <p:cond evt="onPrev" delay="0">
+                  <p:tgtEl>
+                    <p:sldTgt/>
+                  </p:tgtEl>
+                </p:cond>
+              </p:prevCondLst>
+              <p:nextCondLst>
+                <p:cond evt="onNext" delay="0">
+                  <p:tgtEl>
+                    <p:sldTgt/>
+                  </p:tgtEl>
+                </p:cond>
+              </p:nextCondLst>
+            </p:seq>
+          </p:childTnLst>
+        </p:cTn>
+      </p:par>
+    </p:tnLst>
+  </p:timing>
 </p:sld>
 </file>
 
@@ -34278,6 +38282,279 @@
   <p:clrMapOvr>
     <a:masterClrMapping/>
   </p:clrMapOvr>
+  <mc:AlternateContent xmlns:mc="http://schemas.openxmlformats.org/markup-compatibility/2006">
+    <mc:Choice xmlns:p14="http://schemas.microsoft.com/office/powerpoint/2010/main" Requires="p14">
+      <p:transition spd="med" p14:dur="700">
+        <p:fade/>
+      </p:transition>
+    </mc:Choice>
+    <mc:Fallback>
+      <p:transition spd="med">
+        <p:fade/>
+      </p:transition>
+    </mc:Fallback>
+  </mc:AlternateContent>
+  <p:timing>
+    <p:tnLst>
+      <p:par>
+        <p:cTn id="1" dur="indefinite" restart="never" nodeType="tmRoot">
+          <p:childTnLst>
+            <p:seq concurrent="1" nextAc="seek">
+              <p:cTn id="2" dur="indefinite" nodeType="mainSeq">
+                <p:childTnLst>
+                  <p:par>
+                    <p:cTn id="3" fill="hold">
+                      <p:stCondLst>
+                        <p:cond delay="indefinite"/>
+                        <p:cond evt="onBegin" delay="0">
+                          <p:tn val="2"/>
+                        </p:cond>
+                      </p:stCondLst>
+                      <p:childTnLst>
+                        <p:par>
+                          <p:cTn id="4" fill="hold">
+                            <p:stCondLst>
+                              <p:cond delay="0"/>
+                            </p:stCondLst>
+                            <p:childTnLst>
+                              <p:par>
+                                <p:cTn id="5" presetID="10" presetClass="entr" presetSubtype="0" fill="hold" nodeType="afterEffect">
+                                  <p:stCondLst>
+                                    <p:cond delay="0"/>
+                                  </p:stCondLst>
+                                  <p:childTnLst>
+                                    <p:set>
+                                      <p:cBhvr>
+                                        <p:cTn id="6" dur="1" fill="hold">
+                                          <p:stCondLst>
+                                            <p:cond delay="0"/>
+                                          </p:stCondLst>
+                                        </p:cTn>
+                                        <p:tgtEl>
+                                          <p:spTgt spid="4"/>
+                                        </p:tgtEl>
+                                        <p:attrNameLst>
+                                          <p:attrName>style.visibility</p:attrName>
+                                        </p:attrNameLst>
+                                      </p:cBhvr>
+                                      <p:to>
+                                        <p:strVal val="visible"/>
+                                      </p:to>
+                                    </p:set>
+                                    <p:animEffect transition="in" filter="fade">
+                                      <p:cBhvr>
+                                        <p:cTn id="7" dur="500"/>
+                                        <p:tgtEl>
+                                          <p:spTgt spid="4"/>
+                                        </p:tgtEl>
+                                      </p:cBhvr>
+                                    </p:animEffect>
+                                  </p:childTnLst>
+                                </p:cTn>
+                              </p:par>
+                              <p:par>
+                                <p:cTn id="8" presetID="10" presetClass="entr" presetSubtype="0" fill="hold" nodeType="withEffect">
+                                  <p:stCondLst>
+                                    <p:cond delay="300"/>
+                                  </p:stCondLst>
+                                  <p:childTnLst>
+                                    <p:set>
+                                      <p:cBhvr>
+                                        <p:cTn id="9" dur="1" fill="hold">
+                                          <p:stCondLst>
+                                            <p:cond delay="0"/>
+                                          </p:stCondLst>
+                                        </p:cTn>
+                                        <p:tgtEl>
+                                          <p:spTgt spid="8"/>
+                                        </p:tgtEl>
+                                        <p:attrNameLst>
+                                          <p:attrName>style.visibility</p:attrName>
+                                        </p:attrNameLst>
+                                      </p:cBhvr>
+                                      <p:to>
+                                        <p:strVal val="visible"/>
+                                      </p:to>
+                                    </p:set>
+                                    <p:animEffect transition="in" filter="fade">
+                                      <p:cBhvr>
+                                        <p:cTn id="10" dur="500"/>
+                                        <p:tgtEl>
+                                          <p:spTgt spid="8"/>
+                                        </p:tgtEl>
+                                      </p:cBhvr>
+                                    </p:animEffect>
+                                  </p:childTnLst>
+                                </p:cTn>
+                              </p:par>
+                              <p:par>
+                                <p:cTn id="11" presetID="10" presetClass="entr" presetSubtype="0" fill="hold" nodeType="withEffect">
+                                  <p:stCondLst>
+                                    <p:cond delay="600"/>
+                                  </p:stCondLst>
+                                  <p:childTnLst>
+                                    <p:set>
+                                      <p:cBhvr>
+                                        <p:cTn id="12" dur="1" fill="hold">
+                                          <p:stCondLst>
+                                            <p:cond delay="0"/>
+                                          </p:stCondLst>
+                                        </p:cTn>
+                                        <p:tgtEl>
+                                          <p:spTgt spid="12"/>
+                                        </p:tgtEl>
+                                        <p:attrNameLst>
+                                          <p:attrName>style.visibility</p:attrName>
+                                        </p:attrNameLst>
+                                      </p:cBhvr>
+                                      <p:to>
+                                        <p:strVal val="visible"/>
+                                      </p:to>
+                                    </p:set>
+                                    <p:animEffect transition="in" filter="fade">
+                                      <p:cBhvr>
+                                        <p:cTn id="13" dur="500"/>
+                                        <p:tgtEl>
+                                          <p:spTgt spid="12"/>
+                                        </p:tgtEl>
+                                      </p:cBhvr>
+                                    </p:animEffect>
+                                  </p:childTnLst>
+                                </p:cTn>
+                              </p:par>
+                              <p:par>
+                                <p:cTn id="14" presetID="10" presetClass="entr" presetSubtype="0" fill="hold" nodeType="withEffect">
+                                  <p:stCondLst>
+                                    <p:cond delay="900"/>
+                                  </p:stCondLst>
+                                  <p:childTnLst>
+                                    <p:set>
+                                      <p:cBhvr>
+                                        <p:cTn id="15" dur="1" fill="hold">
+                                          <p:stCondLst>
+                                            <p:cond delay="0"/>
+                                          </p:stCondLst>
+                                        </p:cTn>
+                                        <p:tgtEl>
+                                          <p:spTgt spid="16"/>
+                                        </p:tgtEl>
+                                        <p:attrNameLst>
+                                          <p:attrName>style.visibility</p:attrName>
+                                        </p:attrNameLst>
+                                      </p:cBhvr>
+                                      <p:to>
+                                        <p:strVal val="visible"/>
+                                      </p:to>
+                                    </p:set>
+                                    <p:animEffect transition="in" filter="fade">
+                                      <p:cBhvr>
+                                        <p:cTn id="16" dur="500"/>
+                                        <p:tgtEl>
+                                          <p:spTgt spid="16"/>
+                                        </p:tgtEl>
+                                      </p:cBhvr>
+                                    </p:animEffect>
+                                  </p:childTnLst>
+                                </p:cTn>
+                              </p:par>
+                              <p:par>
+                                <p:cTn id="17" presetID="10" presetClass="entr" presetSubtype="0" fill="hold" nodeType="withEffect">
+                                  <p:stCondLst>
+                                    <p:cond delay="1200"/>
+                                  </p:stCondLst>
+                                  <p:childTnLst>
+                                    <p:set>
+                                      <p:cBhvr>
+                                        <p:cTn id="18" dur="1" fill="hold">
+                                          <p:stCondLst>
+                                            <p:cond delay="0"/>
+                                          </p:stCondLst>
+                                        </p:cTn>
+                                        <p:tgtEl>
+                                          <p:spTgt spid="17"/>
+                                        </p:tgtEl>
+                                        <p:attrNameLst>
+                                          <p:attrName>style.visibility</p:attrName>
+                                        </p:attrNameLst>
+                                      </p:cBhvr>
+                                      <p:to>
+                                        <p:strVal val="visible"/>
+                                      </p:to>
+                                    </p:set>
+                                    <p:animEffect transition="in" filter="fade">
+                                      <p:cBhvr>
+                                        <p:cTn id="19" dur="500"/>
+                                        <p:tgtEl>
+                                          <p:spTgt spid="17"/>
+                                        </p:tgtEl>
+                                      </p:cBhvr>
+                                    </p:animEffect>
+                                  </p:childTnLst>
+                                </p:cTn>
+                              </p:par>
+                              <p:par>
+                                <p:cTn id="20" presetID="10" presetClass="entr" presetSubtype="0" fill="hold" nodeType="withEffect">
+                                  <p:stCondLst>
+                                    <p:cond delay="1500"/>
+                                  </p:stCondLst>
+                                  <p:childTnLst>
+                                    <p:set>
+                                      <p:cBhvr>
+                                        <p:cTn id="21" dur="1" fill="hold">
+                                          <p:stCondLst>
+                                            <p:cond delay="0"/>
+                                          </p:stCondLst>
+                                        </p:cTn>
+                                        <p:tgtEl>
+                                          <p:spTgt spid="18"/>
+                                        </p:tgtEl>
+                                        <p:attrNameLst>
+                                          <p:attrName>style.visibility</p:attrName>
+                                        </p:attrNameLst>
+                                      </p:cBhvr>
+                                      <p:to>
+                                        <p:strVal val="visible"/>
+                                      </p:to>
+                                    </p:set>
+                                    <p:animEffect transition="in" filter="fade">
+                                      <p:cBhvr>
+                                        <p:cTn id="22" dur="500"/>
+                                        <p:tgtEl>
+                                          <p:spTgt spid="18"/>
+                                        </p:tgtEl>
+                                      </p:cBhvr>
+                                    </p:animEffect>
+                                  </p:childTnLst>
+                                </p:cTn>
+                              </p:par>
+                            </p:childTnLst>
+                          </p:cTn>
+                        </p:par>
+                      </p:childTnLst>
+                    </p:cTn>
+                  </p:par>
+                </p:childTnLst>
+              </p:cTn>
+              <p:prevCondLst>
+                <p:cond evt="onPrev" delay="0">
+                  <p:tgtEl>
+                    <p:sldTgt/>
+                  </p:tgtEl>
+                </p:cond>
+              </p:prevCondLst>
+              <p:nextCondLst>
+                <p:cond evt="onNext" delay="0">
+                  <p:tgtEl>
+                    <p:sldTgt/>
+                  </p:tgtEl>
+                </p:cond>
+              </p:nextCondLst>
+            </p:seq>
+          </p:childTnLst>
+        </p:cTn>
+      </p:par>
+    </p:tnLst>
+  </p:timing>
 </p:sld>
 </file>
 
@@ -34936,6 +39213,314 @@
   <p:clrMapOvr>
     <a:masterClrMapping/>
   </p:clrMapOvr>
+  <mc:AlternateContent xmlns:mc="http://schemas.openxmlformats.org/markup-compatibility/2006">
+    <mc:Choice xmlns:p14="http://schemas.microsoft.com/office/powerpoint/2010/main" Requires="p14">
+      <p:transition spd="med" p14:dur="700">
+        <p:fade/>
+      </p:transition>
+    </mc:Choice>
+    <mc:Fallback>
+      <p:transition spd="med">
+        <p:fade/>
+      </p:transition>
+    </mc:Fallback>
+  </mc:AlternateContent>
+  <p:timing>
+    <p:tnLst>
+      <p:par>
+        <p:cTn id="1" dur="indefinite" restart="never" nodeType="tmRoot">
+          <p:childTnLst>
+            <p:seq concurrent="1" nextAc="seek">
+              <p:cTn id="2" dur="indefinite" nodeType="mainSeq">
+                <p:childTnLst>
+                  <p:par>
+                    <p:cTn id="3" fill="hold">
+                      <p:stCondLst>
+                        <p:cond delay="indefinite"/>
+                        <p:cond evt="onBegin" delay="0">
+                          <p:tn val="2"/>
+                        </p:cond>
+                      </p:stCondLst>
+                      <p:childTnLst>
+                        <p:par>
+                          <p:cTn id="4" fill="hold">
+                            <p:stCondLst>
+                              <p:cond delay="0"/>
+                            </p:stCondLst>
+                            <p:childTnLst>
+                              <p:par>
+                                <p:cTn id="5" presetID="10" presetClass="entr" presetSubtype="0" fill="hold" nodeType="afterEffect">
+                                  <p:stCondLst>
+                                    <p:cond delay="0"/>
+                                  </p:stCondLst>
+                                  <p:childTnLst>
+                                    <p:set>
+                                      <p:cBhvr>
+                                        <p:cTn id="6" dur="1" fill="hold">
+                                          <p:stCondLst>
+                                            <p:cond delay="0"/>
+                                          </p:stCondLst>
+                                        </p:cTn>
+                                        <p:tgtEl>
+                                          <p:spTgt spid="4"/>
+                                        </p:tgtEl>
+                                        <p:attrNameLst>
+                                          <p:attrName>style.visibility</p:attrName>
+                                        </p:attrNameLst>
+                                      </p:cBhvr>
+                                      <p:to>
+                                        <p:strVal val="visible"/>
+                                      </p:to>
+                                    </p:set>
+                                    <p:animEffect transition="in" filter="fade">
+                                      <p:cBhvr>
+                                        <p:cTn id="7" dur="500"/>
+                                        <p:tgtEl>
+                                          <p:spTgt spid="4"/>
+                                        </p:tgtEl>
+                                      </p:cBhvr>
+                                    </p:animEffect>
+                                  </p:childTnLst>
+                                </p:cTn>
+                              </p:par>
+                              <p:par>
+                                <p:cTn id="8" presetID="10" presetClass="entr" presetSubtype="0" fill="hold" nodeType="withEffect">
+                                  <p:stCondLst>
+                                    <p:cond delay="257"/>
+                                  </p:stCondLst>
+                                  <p:childTnLst>
+                                    <p:set>
+                                      <p:cBhvr>
+                                        <p:cTn id="9" dur="1" fill="hold">
+                                          <p:stCondLst>
+                                            <p:cond delay="0"/>
+                                          </p:stCondLst>
+                                        </p:cTn>
+                                        <p:tgtEl>
+                                          <p:spTgt spid="7"/>
+                                        </p:tgtEl>
+                                        <p:attrNameLst>
+                                          <p:attrName>style.visibility</p:attrName>
+                                        </p:attrNameLst>
+                                      </p:cBhvr>
+                                      <p:to>
+                                        <p:strVal val="visible"/>
+                                      </p:to>
+                                    </p:set>
+                                    <p:animEffect transition="in" filter="fade">
+                                      <p:cBhvr>
+                                        <p:cTn id="10" dur="500"/>
+                                        <p:tgtEl>
+                                          <p:spTgt spid="7"/>
+                                        </p:tgtEl>
+                                      </p:cBhvr>
+                                    </p:animEffect>
+                                  </p:childTnLst>
+                                </p:cTn>
+                              </p:par>
+                              <p:par>
+                                <p:cTn id="11" presetID="10" presetClass="entr" presetSubtype="0" fill="hold" nodeType="withEffect">
+                                  <p:stCondLst>
+                                    <p:cond delay="514"/>
+                                  </p:stCondLst>
+                                  <p:childTnLst>
+                                    <p:set>
+                                      <p:cBhvr>
+                                        <p:cTn id="12" dur="1" fill="hold">
+                                          <p:stCondLst>
+                                            <p:cond delay="0"/>
+                                          </p:stCondLst>
+                                        </p:cTn>
+                                        <p:tgtEl>
+                                          <p:spTgt spid="10"/>
+                                        </p:tgtEl>
+                                        <p:attrNameLst>
+                                          <p:attrName>style.visibility</p:attrName>
+                                        </p:attrNameLst>
+                                      </p:cBhvr>
+                                      <p:to>
+                                        <p:strVal val="visible"/>
+                                      </p:to>
+                                    </p:set>
+                                    <p:animEffect transition="in" filter="fade">
+                                      <p:cBhvr>
+                                        <p:cTn id="13" dur="500"/>
+                                        <p:tgtEl>
+                                          <p:spTgt spid="10"/>
+                                        </p:tgtEl>
+                                      </p:cBhvr>
+                                    </p:animEffect>
+                                  </p:childTnLst>
+                                </p:cTn>
+                              </p:par>
+                              <p:par>
+                                <p:cTn id="14" presetID="10" presetClass="entr" presetSubtype="0" fill="hold" nodeType="withEffect">
+                                  <p:stCondLst>
+                                    <p:cond delay="771"/>
+                                  </p:stCondLst>
+                                  <p:childTnLst>
+                                    <p:set>
+                                      <p:cBhvr>
+                                        <p:cTn id="15" dur="1" fill="hold">
+                                          <p:stCondLst>
+                                            <p:cond delay="0"/>
+                                          </p:stCondLst>
+                                        </p:cTn>
+                                        <p:tgtEl>
+                                          <p:spTgt spid="13"/>
+                                        </p:tgtEl>
+                                        <p:attrNameLst>
+                                          <p:attrName>style.visibility</p:attrName>
+                                        </p:attrNameLst>
+                                      </p:cBhvr>
+                                      <p:to>
+                                        <p:strVal val="visible"/>
+                                      </p:to>
+                                    </p:set>
+                                    <p:animEffect transition="in" filter="fade">
+                                      <p:cBhvr>
+                                        <p:cTn id="16" dur="500"/>
+                                        <p:tgtEl>
+                                          <p:spTgt spid="13"/>
+                                        </p:tgtEl>
+                                      </p:cBhvr>
+                                    </p:animEffect>
+                                  </p:childTnLst>
+                                </p:cTn>
+                              </p:par>
+                              <p:par>
+                                <p:cTn id="17" presetID="10" presetClass="entr" presetSubtype="0" fill="hold" nodeType="withEffect">
+                                  <p:stCondLst>
+                                    <p:cond delay="1028"/>
+                                  </p:stCondLst>
+                                  <p:childTnLst>
+                                    <p:set>
+                                      <p:cBhvr>
+                                        <p:cTn id="18" dur="1" fill="hold">
+                                          <p:stCondLst>
+                                            <p:cond delay="0"/>
+                                          </p:stCondLst>
+                                        </p:cTn>
+                                        <p:tgtEl>
+                                          <p:spTgt spid="15"/>
+                                        </p:tgtEl>
+                                        <p:attrNameLst>
+                                          <p:attrName>style.visibility</p:attrName>
+                                        </p:attrNameLst>
+                                      </p:cBhvr>
+                                      <p:to>
+                                        <p:strVal val="visible"/>
+                                      </p:to>
+                                    </p:set>
+                                    <p:animEffect transition="in" filter="fade">
+                                      <p:cBhvr>
+                                        <p:cTn id="19" dur="500"/>
+                                        <p:tgtEl>
+                                          <p:spTgt spid="15"/>
+                                        </p:tgtEl>
+                                      </p:cBhvr>
+                                    </p:animEffect>
+                                  </p:childTnLst>
+                                </p:cTn>
+                              </p:par>
+                              <p:par>
+                                <p:cTn id="20" presetID="10" presetClass="entr" presetSubtype="0" fill="hold" nodeType="withEffect">
+                                  <p:stCondLst>
+                                    <p:cond delay="1285"/>
+                                  </p:stCondLst>
+                                  <p:childTnLst>
+                                    <p:set>
+                                      <p:cBhvr>
+                                        <p:cTn id="21" dur="1" fill="hold">
+                                          <p:stCondLst>
+                                            <p:cond delay="0"/>
+                                          </p:stCondLst>
+                                        </p:cTn>
+                                        <p:tgtEl>
+                                          <p:spTgt spid="16"/>
+                                        </p:tgtEl>
+                                        <p:attrNameLst>
+                                          <p:attrName>style.visibility</p:attrName>
+                                        </p:attrNameLst>
+                                      </p:cBhvr>
+                                      <p:to>
+                                        <p:strVal val="visible"/>
+                                      </p:to>
+                                    </p:set>
+                                    <p:animEffect transition="in" filter="fade">
+                                      <p:cBhvr>
+                                        <p:cTn id="22" dur="500"/>
+                                        <p:tgtEl>
+                                          <p:spTgt spid="16"/>
+                                        </p:tgtEl>
+                                      </p:cBhvr>
+                                    </p:animEffect>
+                                  </p:childTnLst>
+                                </p:cTn>
+                              </p:par>
+                              <p:par>
+                                <p:cTn id="23" presetID="10" presetClass="entr" presetSubtype="0" fill="hold" nodeType="withEffect">
+                                  <p:stCondLst>
+                                    <p:cond delay="1542"/>
+                                  </p:stCondLst>
+                                  <p:childTnLst>
+                                    <p:set>
+                                      <p:cBhvr>
+                                        <p:cTn id="24" dur="1" fill="hold">
+                                          <p:stCondLst>
+                                            <p:cond delay="0"/>
+                                          </p:stCondLst>
+                                        </p:cTn>
+                                        <p:tgtEl>
+                                          <p:spTgt spid="17"/>
+                                        </p:tgtEl>
+                                        <p:attrNameLst>
+                                          <p:attrName>style.visibility</p:attrName>
+                                        </p:attrNameLst>
+                                      </p:cBhvr>
+                                      <p:to>
+                                        <p:strVal val="visible"/>
+                                      </p:to>
+                                    </p:set>
+                                    <p:animEffect transition="in" filter="fade">
+                                      <p:cBhvr>
+                                        <p:cTn id="25" dur="500"/>
+                                        <p:tgtEl>
+                                          <p:spTgt spid="17"/>
+                                        </p:tgtEl>
+                                      </p:cBhvr>
+                                    </p:animEffect>
+                                  </p:childTnLst>
+                                </p:cTn>
+                              </p:par>
+                            </p:childTnLst>
+                          </p:cTn>
+                        </p:par>
+                      </p:childTnLst>
+                    </p:cTn>
+                  </p:par>
+                </p:childTnLst>
+              </p:cTn>
+              <p:prevCondLst>
+                <p:cond evt="onPrev" delay="0">
+                  <p:tgtEl>
+                    <p:sldTgt/>
+                  </p:tgtEl>
+                </p:cond>
+              </p:prevCondLst>
+              <p:nextCondLst>
+                <p:cond evt="onNext" delay="0">
+                  <p:tgtEl>
+                    <p:sldTgt/>
+                  </p:tgtEl>
+                </p:cond>
+              </p:nextCondLst>
+            </p:seq>
+          </p:childTnLst>
+        </p:cTn>
+      </p:par>
+    </p:tnLst>
+  </p:timing>
 </p:sld>
 </file>
 
@@ -36189,6 +40774,419 @@
   <p:clrMapOvr>
     <a:masterClrMapping/>
   </p:clrMapOvr>
+  <mc:AlternateContent xmlns:mc="http://schemas.openxmlformats.org/markup-compatibility/2006">
+    <mc:Choice xmlns:p14="http://schemas.microsoft.com/office/powerpoint/2010/main" Requires="p14">
+      <p:transition spd="med" p14:dur="700">
+        <p:fade/>
+      </p:transition>
+    </mc:Choice>
+    <mc:Fallback>
+      <p:transition spd="med">
+        <p:fade/>
+      </p:transition>
+    </mc:Fallback>
+  </mc:AlternateContent>
+  <p:timing>
+    <p:tnLst>
+      <p:par>
+        <p:cTn id="1" dur="indefinite" restart="never" nodeType="tmRoot">
+          <p:childTnLst>
+            <p:seq concurrent="1" nextAc="seek">
+              <p:cTn id="2" dur="indefinite" nodeType="mainSeq">
+                <p:childTnLst>
+                  <p:par>
+                    <p:cTn id="3" fill="hold">
+                      <p:stCondLst>
+                        <p:cond delay="indefinite"/>
+                        <p:cond evt="onBegin" delay="0">
+                          <p:tn val="2"/>
+                        </p:cond>
+                      </p:stCondLst>
+                      <p:childTnLst>
+                        <p:par>
+                          <p:cTn id="4" fill="hold">
+                            <p:stCondLst>
+                              <p:cond delay="0"/>
+                            </p:stCondLst>
+                            <p:childTnLst>
+                              <p:par>
+                                <p:cTn id="5" presetID="10" presetClass="entr" presetSubtype="0" fill="hold" nodeType="afterEffect">
+                                  <p:stCondLst>
+                                    <p:cond delay="0"/>
+                                  </p:stCondLst>
+                                  <p:childTnLst>
+                                    <p:set>
+                                      <p:cBhvr>
+                                        <p:cTn id="6" dur="1" fill="hold">
+                                          <p:stCondLst>
+                                            <p:cond delay="0"/>
+                                          </p:stCondLst>
+                                        </p:cTn>
+                                        <p:tgtEl>
+                                          <p:spTgt spid="4"/>
+                                        </p:tgtEl>
+                                        <p:attrNameLst>
+                                          <p:attrName>style.visibility</p:attrName>
+                                        </p:attrNameLst>
+                                      </p:cBhvr>
+                                      <p:to>
+                                        <p:strVal val="visible"/>
+                                      </p:to>
+                                    </p:set>
+                                    <p:animEffect transition="in" filter="fade">
+                                      <p:cBhvr>
+                                        <p:cTn id="7" dur="500"/>
+                                        <p:tgtEl>
+                                          <p:spTgt spid="4"/>
+                                        </p:tgtEl>
+                                      </p:cBhvr>
+                                    </p:animEffect>
+                                  </p:childTnLst>
+                                </p:cTn>
+                              </p:par>
+                              <p:par>
+                                <p:cTn id="8" presetID="10" presetClass="entr" presetSubtype="0" fill="hold" nodeType="withEffect">
+                                  <p:stCondLst>
+                                    <p:cond delay="180"/>
+                                  </p:stCondLst>
+                                  <p:childTnLst>
+                                    <p:set>
+                                      <p:cBhvr>
+                                        <p:cTn id="9" dur="1" fill="hold">
+                                          <p:stCondLst>
+                                            <p:cond delay="0"/>
+                                          </p:stCondLst>
+                                        </p:cTn>
+                                        <p:tgtEl>
+                                          <p:spTgt spid="8"/>
+                                        </p:tgtEl>
+                                        <p:attrNameLst>
+                                          <p:attrName>style.visibility</p:attrName>
+                                        </p:attrNameLst>
+                                      </p:cBhvr>
+                                      <p:to>
+                                        <p:strVal val="visible"/>
+                                      </p:to>
+                                    </p:set>
+                                    <p:animEffect transition="in" filter="fade">
+                                      <p:cBhvr>
+                                        <p:cTn id="10" dur="500"/>
+                                        <p:tgtEl>
+                                          <p:spTgt spid="8"/>
+                                        </p:tgtEl>
+                                      </p:cBhvr>
+                                    </p:animEffect>
+                                  </p:childTnLst>
+                                </p:cTn>
+                              </p:par>
+                              <p:par>
+                                <p:cTn id="11" presetID="10" presetClass="entr" presetSubtype="0" fill="hold" nodeType="withEffect">
+                                  <p:stCondLst>
+                                    <p:cond delay="360"/>
+                                  </p:stCondLst>
+                                  <p:childTnLst>
+                                    <p:set>
+                                      <p:cBhvr>
+                                        <p:cTn id="12" dur="1" fill="hold">
+                                          <p:stCondLst>
+                                            <p:cond delay="0"/>
+                                          </p:stCondLst>
+                                        </p:cTn>
+                                        <p:tgtEl>
+                                          <p:spTgt spid="12"/>
+                                        </p:tgtEl>
+                                        <p:attrNameLst>
+                                          <p:attrName>style.visibility</p:attrName>
+                                        </p:attrNameLst>
+                                      </p:cBhvr>
+                                      <p:to>
+                                        <p:strVal val="visible"/>
+                                      </p:to>
+                                    </p:set>
+                                    <p:animEffect transition="in" filter="fade">
+                                      <p:cBhvr>
+                                        <p:cTn id="13" dur="500"/>
+                                        <p:tgtEl>
+                                          <p:spTgt spid="12"/>
+                                        </p:tgtEl>
+                                      </p:cBhvr>
+                                    </p:animEffect>
+                                  </p:childTnLst>
+                                </p:cTn>
+                              </p:par>
+                              <p:par>
+                                <p:cTn id="14" presetID="10" presetClass="entr" presetSubtype="0" fill="hold" nodeType="withEffect">
+                                  <p:stCondLst>
+                                    <p:cond delay="540"/>
+                                  </p:stCondLst>
+                                  <p:childTnLst>
+                                    <p:set>
+                                      <p:cBhvr>
+                                        <p:cTn id="15" dur="1" fill="hold">
+                                          <p:stCondLst>
+                                            <p:cond delay="0"/>
+                                          </p:stCondLst>
+                                        </p:cTn>
+                                        <p:tgtEl>
+                                          <p:spTgt spid="16"/>
+                                        </p:tgtEl>
+                                        <p:attrNameLst>
+                                          <p:attrName>style.visibility</p:attrName>
+                                        </p:attrNameLst>
+                                      </p:cBhvr>
+                                      <p:to>
+                                        <p:strVal val="visible"/>
+                                      </p:to>
+                                    </p:set>
+                                    <p:animEffect transition="in" filter="fade">
+                                      <p:cBhvr>
+                                        <p:cTn id="16" dur="500"/>
+                                        <p:tgtEl>
+                                          <p:spTgt spid="16"/>
+                                        </p:tgtEl>
+                                      </p:cBhvr>
+                                    </p:animEffect>
+                                  </p:childTnLst>
+                                </p:cTn>
+                              </p:par>
+                              <p:par>
+                                <p:cTn id="17" presetID="10" presetClass="entr" presetSubtype="0" fill="hold" nodeType="withEffect">
+                                  <p:stCondLst>
+                                    <p:cond delay="720"/>
+                                  </p:stCondLst>
+                                  <p:childTnLst>
+                                    <p:set>
+                                      <p:cBhvr>
+                                        <p:cTn id="18" dur="1" fill="hold">
+                                          <p:stCondLst>
+                                            <p:cond delay="0"/>
+                                          </p:stCondLst>
+                                        </p:cTn>
+                                        <p:tgtEl>
+                                          <p:spTgt spid="20"/>
+                                        </p:tgtEl>
+                                        <p:attrNameLst>
+                                          <p:attrName>style.visibility</p:attrName>
+                                        </p:attrNameLst>
+                                      </p:cBhvr>
+                                      <p:to>
+                                        <p:strVal val="visible"/>
+                                      </p:to>
+                                    </p:set>
+                                    <p:animEffect transition="in" filter="fade">
+                                      <p:cBhvr>
+                                        <p:cTn id="19" dur="500"/>
+                                        <p:tgtEl>
+                                          <p:spTgt spid="20"/>
+                                        </p:tgtEl>
+                                      </p:cBhvr>
+                                    </p:animEffect>
+                                  </p:childTnLst>
+                                </p:cTn>
+                              </p:par>
+                              <p:par>
+                                <p:cTn id="20" presetID="10" presetClass="entr" presetSubtype="0" fill="hold" nodeType="withEffect">
+                                  <p:stCondLst>
+                                    <p:cond delay="900"/>
+                                  </p:stCondLst>
+                                  <p:childTnLst>
+                                    <p:set>
+                                      <p:cBhvr>
+                                        <p:cTn id="21" dur="1" fill="hold">
+                                          <p:stCondLst>
+                                            <p:cond delay="0"/>
+                                          </p:stCondLst>
+                                        </p:cTn>
+                                        <p:tgtEl>
+                                          <p:spTgt spid="24"/>
+                                        </p:tgtEl>
+                                        <p:attrNameLst>
+                                          <p:attrName>style.visibility</p:attrName>
+                                        </p:attrNameLst>
+                                      </p:cBhvr>
+                                      <p:to>
+                                        <p:strVal val="visible"/>
+                                      </p:to>
+                                    </p:set>
+                                    <p:animEffect transition="in" filter="fade">
+                                      <p:cBhvr>
+                                        <p:cTn id="22" dur="500"/>
+                                        <p:tgtEl>
+                                          <p:spTgt spid="24"/>
+                                        </p:tgtEl>
+                                      </p:cBhvr>
+                                    </p:animEffect>
+                                  </p:childTnLst>
+                                </p:cTn>
+                              </p:par>
+                              <p:par>
+                                <p:cTn id="23" presetID="10" presetClass="entr" presetSubtype="0" fill="hold" nodeType="withEffect">
+                                  <p:stCondLst>
+                                    <p:cond delay="1080"/>
+                                  </p:stCondLst>
+                                  <p:childTnLst>
+                                    <p:set>
+                                      <p:cBhvr>
+                                        <p:cTn id="24" dur="1" fill="hold">
+                                          <p:stCondLst>
+                                            <p:cond delay="0"/>
+                                          </p:stCondLst>
+                                        </p:cTn>
+                                        <p:tgtEl>
+                                          <p:spTgt spid="28"/>
+                                        </p:tgtEl>
+                                        <p:attrNameLst>
+                                          <p:attrName>style.visibility</p:attrName>
+                                        </p:attrNameLst>
+                                      </p:cBhvr>
+                                      <p:to>
+                                        <p:strVal val="visible"/>
+                                      </p:to>
+                                    </p:set>
+                                    <p:animEffect transition="in" filter="fade">
+                                      <p:cBhvr>
+                                        <p:cTn id="25" dur="500"/>
+                                        <p:tgtEl>
+                                          <p:spTgt spid="28"/>
+                                        </p:tgtEl>
+                                      </p:cBhvr>
+                                    </p:animEffect>
+                                  </p:childTnLst>
+                                </p:cTn>
+                              </p:par>
+                              <p:par>
+                                <p:cTn id="26" presetID="10" presetClass="entr" presetSubtype="0" fill="hold" nodeType="withEffect">
+                                  <p:stCondLst>
+                                    <p:cond delay="1260"/>
+                                  </p:stCondLst>
+                                  <p:childTnLst>
+                                    <p:set>
+                                      <p:cBhvr>
+                                        <p:cTn id="27" dur="1" fill="hold">
+                                          <p:stCondLst>
+                                            <p:cond delay="0"/>
+                                          </p:stCondLst>
+                                        </p:cTn>
+                                        <p:tgtEl>
+                                          <p:spTgt spid="32"/>
+                                        </p:tgtEl>
+                                        <p:attrNameLst>
+                                          <p:attrName>style.visibility</p:attrName>
+                                        </p:attrNameLst>
+                                      </p:cBhvr>
+                                      <p:to>
+                                        <p:strVal val="visible"/>
+                                      </p:to>
+                                    </p:set>
+                                    <p:animEffect transition="in" filter="fade">
+                                      <p:cBhvr>
+                                        <p:cTn id="28" dur="500"/>
+                                        <p:tgtEl>
+                                          <p:spTgt spid="32"/>
+                                        </p:tgtEl>
+                                      </p:cBhvr>
+                                    </p:animEffect>
+                                  </p:childTnLst>
+                                </p:cTn>
+                              </p:par>
+                              <p:par>
+                                <p:cTn id="29" presetID="10" presetClass="entr" presetSubtype="0" fill="hold" nodeType="withEffect">
+                                  <p:stCondLst>
+                                    <p:cond delay="1440"/>
+                                  </p:stCondLst>
+                                  <p:childTnLst>
+                                    <p:set>
+                                      <p:cBhvr>
+                                        <p:cTn id="30" dur="1" fill="hold">
+                                          <p:stCondLst>
+                                            <p:cond delay="0"/>
+                                          </p:stCondLst>
+                                        </p:cTn>
+                                        <p:tgtEl>
+                                          <p:spTgt spid="36"/>
+                                        </p:tgtEl>
+                                        <p:attrNameLst>
+                                          <p:attrName>style.visibility</p:attrName>
+                                        </p:attrNameLst>
+                                      </p:cBhvr>
+                                      <p:to>
+                                        <p:strVal val="visible"/>
+                                      </p:to>
+                                    </p:set>
+                                    <p:animEffect transition="in" filter="fade">
+                                      <p:cBhvr>
+                                        <p:cTn id="31" dur="500"/>
+                                        <p:tgtEl>
+                                          <p:spTgt spid="36"/>
+                                        </p:tgtEl>
+                                      </p:cBhvr>
+                                    </p:animEffect>
+                                  </p:childTnLst>
+                                </p:cTn>
+                              </p:par>
+                              <p:par>
+                                <p:cTn id="32" presetID="10" presetClass="entr" presetSubtype="0" fill="hold" nodeType="withEffect">
+                                  <p:stCondLst>
+                                    <p:cond delay="1620"/>
+                                  </p:stCondLst>
+                                  <p:childTnLst>
+                                    <p:set>
+                                      <p:cBhvr>
+                                        <p:cTn id="33" dur="1" fill="hold">
+                                          <p:stCondLst>
+                                            <p:cond delay="0"/>
+                                          </p:stCondLst>
+                                        </p:cTn>
+                                        <p:tgtEl>
+                                          <p:spTgt spid="37"/>
+                                        </p:tgtEl>
+                                        <p:attrNameLst>
+                                          <p:attrName>style.visibility</p:attrName>
+                                        </p:attrNameLst>
+                                      </p:cBhvr>
+                                      <p:to>
+                                        <p:strVal val="visible"/>
+                                      </p:to>
+                                    </p:set>
+                                    <p:animEffect transition="in" filter="fade">
+                                      <p:cBhvr>
+                                        <p:cTn id="34" dur="500"/>
+                                        <p:tgtEl>
+                                          <p:spTgt spid="37"/>
+                                        </p:tgtEl>
+                                      </p:cBhvr>
+                                    </p:animEffect>
+                                  </p:childTnLst>
+                                </p:cTn>
+                              </p:par>
+                            </p:childTnLst>
+                          </p:cTn>
+                        </p:par>
+                      </p:childTnLst>
+                    </p:cTn>
+                  </p:par>
+                </p:childTnLst>
+              </p:cTn>
+              <p:prevCondLst>
+                <p:cond evt="onPrev" delay="0">
+                  <p:tgtEl>
+                    <p:sldTgt/>
+                  </p:tgtEl>
+                </p:cond>
+              </p:prevCondLst>
+              <p:nextCondLst>
+                <p:cond evt="onNext" delay="0">
+                  <p:tgtEl>
+                    <p:sldTgt/>
+                  </p:tgtEl>
+                </p:cond>
+              </p:nextCondLst>
+            </p:seq>
+          </p:childTnLst>
+        </p:cTn>
+      </p:par>
+    </p:tnLst>
+  </p:timing>
 </p:sld>
 </file>
 
@@ -36925,6 +41923,209 @@
   <p:clrMapOvr>
     <a:masterClrMapping/>
   </p:clrMapOvr>
+  <mc:AlternateContent xmlns:mc="http://schemas.openxmlformats.org/markup-compatibility/2006">
+    <mc:Choice xmlns:p14="http://schemas.microsoft.com/office/powerpoint/2010/main" Requires="p14">
+      <p:transition spd="med" p14:dur="700">
+        <p:fade/>
+      </p:transition>
+    </mc:Choice>
+    <mc:Fallback>
+      <p:transition spd="med">
+        <p:fade/>
+      </p:transition>
+    </mc:Fallback>
+  </mc:AlternateContent>
+  <p:timing>
+    <p:tnLst>
+      <p:par>
+        <p:cTn id="1" dur="indefinite" restart="never" nodeType="tmRoot">
+          <p:childTnLst>
+            <p:seq concurrent="1" nextAc="seek">
+              <p:cTn id="2" dur="indefinite" nodeType="mainSeq">
+                <p:childTnLst>
+                  <p:par>
+                    <p:cTn id="3" fill="hold">
+                      <p:stCondLst>
+                        <p:cond delay="indefinite"/>
+                        <p:cond evt="onBegin" delay="0">
+                          <p:tn val="2"/>
+                        </p:cond>
+                      </p:stCondLst>
+                      <p:childTnLst>
+                        <p:par>
+                          <p:cTn id="4" fill="hold">
+                            <p:stCondLst>
+                              <p:cond delay="0"/>
+                            </p:stCondLst>
+                            <p:childTnLst>
+                              <p:par>
+                                <p:cTn id="5" presetID="10" presetClass="entr" presetSubtype="0" fill="hold" nodeType="afterEffect">
+                                  <p:stCondLst>
+                                    <p:cond delay="0"/>
+                                  </p:stCondLst>
+                                  <p:childTnLst>
+                                    <p:set>
+                                      <p:cBhvr>
+                                        <p:cTn id="6" dur="1" fill="hold">
+                                          <p:stCondLst>
+                                            <p:cond delay="0"/>
+                                          </p:stCondLst>
+                                        </p:cTn>
+                                        <p:tgtEl>
+                                          <p:spTgt spid="4"/>
+                                        </p:tgtEl>
+                                        <p:attrNameLst>
+                                          <p:attrName>style.visibility</p:attrName>
+                                        </p:attrNameLst>
+                                      </p:cBhvr>
+                                      <p:to>
+                                        <p:strVal val="visible"/>
+                                      </p:to>
+                                    </p:set>
+                                    <p:animEffect transition="in" filter="fade">
+                                      <p:cBhvr>
+                                        <p:cTn id="7" dur="500"/>
+                                        <p:tgtEl>
+                                          <p:spTgt spid="4"/>
+                                        </p:tgtEl>
+                                      </p:cBhvr>
+                                    </p:animEffect>
+                                  </p:childTnLst>
+                                </p:cTn>
+                              </p:par>
+                              <p:par>
+                                <p:cTn id="8" presetID="10" presetClass="entr" presetSubtype="0" fill="hold" nodeType="withEffect">
+                                  <p:stCondLst>
+                                    <p:cond delay="300"/>
+                                  </p:stCondLst>
+                                  <p:childTnLst>
+                                    <p:set>
+                                      <p:cBhvr>
+                                        <p:cTn id="9" dur="1" fill="hold">
+                                          <p:stCondLst>
+                                            <p:cond delay="0"/>
+                                          </p:stCondLst>
+                                        </p:cTn>
+                                        <p:tgtEl>
+                                          <p:spTgt spid="5"/>
+                                        </p:tgtEl>
+                                        <p:attrNameLst>
+                                          <p:attrName>style.visibility</p:attrName>
+                                        </p:attrNameLst>
+                                      </p:cBhvr>
+                                      <p:to>
+                                        <p:strVal val="visible"/>
+                                      </p:to>
+                                    </p:set>
+                                    <p:animEffect transition="in" filter="fade">
+                                      <p:cBhvr>
+                                        <p:cTn id="10" dur="500"/>
+                                        <p:tgtEl>
+                                          <p:spTgt spid="5"/>
+                                        </p:tgtEl>
+                                      </p:cBhvr>
+                                    </p:animEffect>
+                                  </p:childTnLst>
+                                </p:cTn>
+                              </p:par>
+                              <p:par>
+                                <p:cTn id="11" presetID="10" presetClass="entr" presetSubtype="0" fill="hold" nodeType="withEffect">
+                                  <p:stCondLst>
+                                    <p:cond delay="600"/>
+                                  </p:stCondLst>
+                                  <p:childTnLst>
+                                    <p:set>
+                                      <p:cBhvr>
+                                        <p:cTn id="12" dur="1" fill="hold">
+                                          <p:stCondLst>
+                                            <p:cond delay="0"/>
+                                          </p:stCondLst>
+                                        </p:cTn>
+                                        <p:tgtEl>
+                                          <p:spTgt spid="6"/>
+                                        </p:tgtEl>
+                                        <p:attrNameLst>
+                                          <p:attrName>style.visibility</p:attrName>
+                                        </p:attrNameLst>
+                                      </p:cBhvr>
+                                      <p:to>
+                                        <p:strVal val="visible"/>
+                                      </p:to>
+                                    </p:set>
+                                    <p:animEffect transition="in" filter="fade">
+                                      <p:cBhvr>
+                                        <p:cTn id="13" dur="500"/>
+                                        <p:tgtEl>
+                                          <p:spTgt spid="6"/>
+                                        </p:tgtEl>
+                                      </p:cBhvr>
+                                    </p:animEffect>
+                                  </p:childTnLst>
+                                </p:cTn>
+                              </p:par>
+                              <p:par>
+                                <p:cTn id="14" presetID="10" presetClass="entr" presetSubtype="0" fill="hold" nodeType="withEffect">
+                                  <p:stCondLst>
+                                    <p:cond delay="900"/>
+                                  </p:stCondLst>
+                                  <p:childTnLst>
+                                    <p:set>
+                                      <p:cBhvr>
+                                        <p:cTn id="15" dur="1" fill="hold">
+                                          <p:stCondLst>
+                                            <p:cond delay="0"/>
+                                          </p:stCondLst>
+                                        </p:cTn>
+                                        <p:tgtEl>
+                                          <p:spTgt spid="7"/>
+                                        </p:tgtEl>
+                                        <p:attrNameLst>
+                                          <p:attrName>style.visibility</p:attrName>
+                                        </p:attrNameLst>
+                                      </p:cBhvr>
+                                      <p:to>
+                                        <p:strVal val="visible"/>
+                                      </p:to>
+                                    </p:set>
+                                    <p:animEffect transition="in" filter="fade">
+                                      <p:cBhvr>
+                                        <p:cTn id="16" dur="500"/>
+                                        <p:tgtEl>
+                                          <p:spTgt spid="7"/>
+                                        </p:tgtEl>
+                                      </p:cBhvr>
+                                    </p:animEffect>
+                                  </p:childTnLst>
+                                </p:cTn>
+                              </p:par>
+                            </p:childTnLst>
+                          </p:cTn>
+                        </p:par>
+                      </p:childTnLst>
+                    </p:cTn>
+                  </p:par>
+                </p:childTnLst>
+              </p:cTn>
+              <p:prevCondLst>
+                <p:cond evt="onPrev" delay="0">
+                  <p:tgtEl>
+                    <p:sldTgt/>
+                  </p:tgtEl>
+                </p:cond>
+              </p:prevCondLst>
+              <p:nextCondLst>
+                <p:cond evt="onNext" delay="0">
+                  <p:tgtEl>
+                    <p:sldTgt/>
+                  </p:tgtEl>
+                </p:cond>
+              </p:nextCondLst>
+            </p:seq>
+          </p:childTnLst>
+        </p:cTn>
+      </p:par>
+    </p:tnLst>
+  </p:timing>
 </p:sld>
 </file>
 
@@ -37355,6 +42556,209 @@
   <p:clrMapOvr>
     <a:masterClrMapping/>
   </p:clrMapOvr>
+  <mc:AlternateContent xmlns:mc="http://schemas.openxmlformats.org/markup-compatibility/2006">
+    <mc:Choice xmlns:p14="http://schemas.microsoft.com/office/powerpoint/2010/main" Requires="p14">
+      <p:transition spd="med" p14:dur="700">
+        <p:fade/>
+      </p:transition>
+    </mc:Choice>
+    <mc:Fallback>
+      <p:transition spd="med">
+        <p:fade/>
+      </p:transition>
+    </mc:Fallback>
+  </mc:AlternateContent>
+  <p:timing>
+    <p:tnLst>
+      <p:par>
+        <p:cTn id="1" dur="indefinite" restart="never" nodeType="tmRoot">
+          <p:childTnLst>
+            <p:seq concurrent="1" nextAc="seek">
+              <p:cTn id="2" dur="indefinite" nodeType="mainSeq">
+                <p:childTnLst>
+                  <p:par>
+                    <p:cTn id="3" fill="hold">
+                      <p:stCondLst>
+                        <p:cond delay="indefinite"/>
+                        <p:cond evt="onBegin" delay="0">
+                          <p:tn val="2"/>
+                        </p:cond>
+                      </p:stCondLst>
+                      <p:childTnLst>
+                        <p:par>
+                          <p:cTn id="4" fill="hold">
+                            <p:stCondLst>
+                              <p:cond delay="0"/>
+                            </p:stCondLst>
+                            <p:childTnLst>
+                              <p:par>
+                                <p:cTn id="5" presetID="10" presetClass="entr" presetSubtype="0" fill="hold" nodeType="afterEffect">
+                                  <p:stCondLst>
+                                    <p:cond delay="0"/>
+                                  </p:stCondLst>
+                                  <p:childTnLst>
+                                    <p:set>
+                                      <p:cBhvr>
+                                        <p:cTn id="6" dur="1" fill="hold">
+                                          <p:stCondLst>
+                                            <p:cond delay="0"/>
+                                          </p:stCondLst>
+                                        </p:cTn>
+                                        <p:tgtEl>
+                                          <p:spTgt spid="4"/>
+                                        </p:tgtEl>
+                                        <p:attrNameLst>
+                                          <p:attrName>style.visibility</p:attrName>
+                                        </p:attrNameLst>
+                                      </p:cBhvr>
+                                      <p:to>
+                                        <p:strVal val="visible"/>
+                                      </p:to>
+                                    </p:set>
+                                    <p:animEffect transition="in" filter="fade">
+                                      <p:cBhvr>
+                                        <p:cTn id="7" dur="500"/>
+                                        <p:tgtEl>
+                                          <p:spTgt spid="4"/>
+                                        </p:tgtEl>
+                                      </p:cBhvr>
+                                    </p:animEffect>
+                                  </p:childTnLst>
+                                </p:cTn>
+                              </p:par>
+                              <p:par>
+                                <p:cTn id="8" presetID="10" presetClass="entr" presetSubtype="0" fill="hold" nodeType="withEffect">
+                                  <p:stCondLst>
+                                    <p:cond delay="300"/>
+                                  </p:stCondLst>
+                                  <p:childTnLst>
+                                    <p:set>
+                                      <p:cBhvr>
+                                        <p:cTn id="9" dur="1" fill="hold">
+                                          <p:stCondLst>
+                                            <p:cond delay="0"/>
+                                          </p:stCondLst>
+                                        </p:cTn>
+                                        <p:tgtEl>
+                                          <p:spTgt spid="8"/>
+                                        </p:tgtEl>
+                                        <p:attrNameLst>
+                                          <p:attrName>style.visibility</p:attrName>
+                                        </p:attrNameLst>
+                                      </p:cBhvr>
+                                      <p:to>
+                                        <p:strVal val="visible"/>
+                                      </p:to>
+                                    </p:set>
+                                    <p:animEffect transition="in" filter="fade">
+                                      <p:cBhvr>
+                                        <p:cTn id="10" dur="500"/>
+                                        <p:tgtEl>
+                                          <p:spTgt spid="8"/>
+                                        </p:tgtEl>
+                                      </p:cBhvr>
+                                    </p:animEffect>
+                                  </p:childTnLst>
+                                </p:cTn>
+                              </p:par>
+                              <p:par>
+                                <p:cTn id="11" presetID="10" presetClass="entr" presetSubtype="0" fill="hold" nodeType="withEffect">
+                                  <p:stCondLst>
+                                    <p:cond delay="600"/>
+                                  </p:stCondLst>
+                                  <p:childTnLst>
+                                    <p:set>
+                                      <p:cBhvr>
+                                        <p:cTn id="12" dur="1" fill="hold">
+                                          <p:stCondLst>
+                                            <p:cond delay="0"/>
+                                          </p:stCondLst>
+                                        </p:cTn>
+                                        <p:tgtEl>
+                                          <p:spTgt spid="10"/>
+                                        </p:tgtEl>
+                                        <p:attrNameLst>
+                                          <p:attrName>style.visibility</p:attrName>
+                                        </p:attrNameLst>
+                                      </p:cBhvr>
+                                      <p:to>
+                                        <p:strVal val="visible"/>
+                                      </p:to>
+                                    </p:set>
+                                    <p:animEffect transition="in" filter="fade">
+                                      <p:cBhvr>
+                                        <p:cTn id="13" dur="500"/>
+                                        <p:tgtEl>
+                                          <p:spTgt spid="10"/>
+                                        </p:tgtEl>
+                                      </p:cBhvr>
+                                    </p:animEffect>
+                                  </p:childTnLst>
+                                </p:cTn>
+                              </p:par>
+                              <p:par>
+                                <p:cTn id="14" presetID="10" presetClass="entr" presetSubtype="0" fill="hold" nodeType="withEffect">
+                                  <p:stCondLst>
+                                    <p:cond delay="900"/>
+                                  </p:stCondLst>
+                                  <p:childTnLst>
+                                    <p:set>
+                                      <p:cBhvr>
+                                        <p:cTn id="15" dur="1" fill="hold">
+                                          <p:stCondLst>
+                                            <p:cond delay="0"/>
+                                          </p:stCondLst>
+                                        </p:cTn>
+                                        <p:tgtEl>
+                                          <p:spTgt spid="11"/>
+                                        </p:tgtEl>
+                                        <p:attrNameLst>
+                                          <p:attrName>style.visibility</p:attrName>
+                                        </p:attrNameLst>
+                                      </p:cBhvr>
+                                      <p:to>
+                                        <p:strVal val="visible"/>
+                                      </p:to>
+                                    </p:set>
+                                    <p:animEffect transition="in" filter="fade">
+                                      <p:cBhvr>
+                                        <p:cTn id="16" dur="500"/>
+                                        <p:tgtEl>
+                                          <p:spTgt spid="11"/>
+                                        </p:tgtEl>
+                                      </p:cBhvr>
+                                    </p:animEffect>
+                                  </p:childTnLst>
+                                </p:cTn>
+                              </p:par>
+                            </p:childTnLst>
+                          </p:cTn>
+                        </p:par>
+                      </p:childTnLst>
+                    </p:cTn>
+                  </p:par>
+                </p:childTnLst>
+              </p:cTn>
+              <p:prevCondLst>
+                <p:cond evt="onPrev" delay="0">
+                  <p:tgtEl>
+                    <p:sldTgt/>
+                  </p:tgtEl>
+                </p:cond>
+              </p:prevCondLst>
+              <p:nextCondLst>
+                <p:cond evt="onNext" delay="0">
+                  <p:tgtEl>
+                    <p:sldTgt/>
+                  </p:tgtEl>
+                </p:cond>
+              </p:nextCondLst>
+            </p:seq>
+          </p:childTnLst>
+        </p:cTn>
+      </p:par>
+    </p:tnLst>
+  </p:timing>
 </p:sld>
 </file>
 
@@ -39326,6 +44730,244 @@
   <p:clrMapOvr>
     <a:masterClrMapping/>
   </p:clrMapOvr>
+  <mc:AlternateContent xmlns:mc="http://schemas.openxmlformats.org/markup-compatibility/2006">
+    <mc:Choice xmlns:p14="http://schemas.microsoft.com/office/powerpoint/2010/main" Requires="p14">
+      <p:transition spd="med" p14:dur="700">
+        <p:fade/>
+      </p:transition>
+    </mc:Choice>
+    <mc:Fallback>
+      <p:transition spd="med">
+        <p:fade/>
+      </p:transition>
+    </mc:Fallback>
+  </mc:AlternateContent>
+  <p:timing>
+    <p:tnLst>
+      <p:par>
+        <p:cTn id="1" dur="indefinite" restart="never" nodeType="tmRoot">
+          <p:childTnLst>
+            <p:seq concurrent="1" nextAc="seek">
+              <p:cTn id="2" dur="indefinite" nodeType="mainSeq">
+                <p:childTnLst>
+                  <p:par>
+                    <p:cTn id="3" fill="hold">
+                      <p:stCondLst>
+                        <p:cond delay="indefinite"/>
+                        <p:cond evt="onBegin" delay="0">
+                          <p:tn val="2"/>
+                        </p:cond>
+                      </p:stCondLst>
+                      <p:childTnLst>
+                        <p:par>
+                          <p:cTn id="4" fill="hold">
+                            <p:stCondLst>
+                              <p:cond delay="0"/>
+                            </p:stCondLst>
+                            <p:childTnLst>
+                              <p:par>
+                                <p:cTn id="5" presetID="10" presetClass="entr" presetSubtype="0" fill="hold" nodeType="afterEffect">
+                                  <p:stCondLst>
+                                    <p:cond delay="0"/>
+                                  </p:stCondLst>
+                                  <p:childTnLst>
+                                    <p:set>
+                                      <p:cBhvr>
+                                        <p:cTn id="6" dur="1" fill="hold">
+                                          <p:stCondLst>
+                                            <p:cond delay="0"/>
+                                          </p:stCondLst>
+                                        </p:cTn>
+                                        <p:tgtEl>
+                                          <p:spTgt spid="4"/>
+                                        </p:tgtEl>
+                                        <p:attrNameLst>
+                                          <p:attrName>style.visibility</p:attrName>
+                                        </p:attrNameLst>
+                                      </p:cBhvr>
+                                      <p:to>
+                                        <p:strVal val="visible"/>
+                                      </p:to>
+                                    </p:set>
+                                    <p:animEffect transition="in" filter="fade">
+                                      <p:cBhvr>
+                                        <p:cTn id="7" dur="500"/>
+                                        <p:tgtEl>
+                                          <p:spTgt spid="4"/>
+                                        </p:tgtEl>
+                                      </p:cBhvr>
+                                    </p:animEffect>
+                                  </p:childTnLst>
+                                </p:cTn>
+                              </p:par>
+                              <p:par>
+                                <p:cTn id="8" presetID="10" presetClass="entr" presetSubtype="0" fill="hold" nodeType="withEffect">
+                                  <p:stCondLst>
+                                    <p:cond delay="300"/>
+                                  </p:stCondLst>
+                                  <p:childTnLst>
+                                    <p:set>
+                                      <p:cBhvr>
+                                        <p:cTn id="9" dur="1" fill="hold">
+                                          <p:stCondLst>
+                                            <p:cond delay="0"/>
+                                          </p:stCondLst>
+                                        </p:cTn>
+                                        <p:tgtEl>
+                                          <p:spTgt spid="6"/>
+                                        </p:tgtEl>
+                                        <p:attrNameLst>
+                                          <p:attrName>style.visibility</p:attrName>
+                                        </p:attrNameLst>
+                                      </p:cBhvr>
+                                      <p:to>
+                                        <p:strVal val="visible"/>
+                                      </p:to>
+                                    </p:set>
+                                    <p:animEffect transition="in" filter="fade">
+                                      <p:cBhvr>
+                                        <p:cTn id="10" dur="500"/>
+                                        <p:tgtEl>
+                                          <p:spTgt spid="6"/>
+                                        </p:tgtEl>
+                                      </p:cBhvr>
+                                    </p:animEffect>
+                                  </p:childTnLst>
+                                </p:cTn>
+                              </p:par>
+                              <p:par>
+                                <p:cTn id="11" presetID="10" presetClass="entr" presetSubtype="0" fill="hold" nodeType="withEffect">
+                                  <p:stCondLst>
+                                    <p:cond delay="600"/>
+                                  </p:stCondLst>
+                                  <p:childTnLst>
+                                    <p:set>
+                                      <p:cBhvr>
+                                        <p:cTn id="12" dur="1" fill="hold">
+                                          <p:stCondLst>
+                                            <p:cond delay="0"/>
+                                          </p:stCondLst>
+                                        </p:cTn>
+                                        <p:tgtEl>
+                                          <p:spTgt spid="31"/>
+                                        </p:tgtEl>
+                                        <p:attrNameLst>
+                                          <p:attrName>style.visibility</p:attrName>
+                                        </p:attrNameLst>
+                                      </p:cBhvr>
+                                      <p:to>
+                                        <p:strVal val="visible"/>
+                                      </p:to>
+                                    </p:set>
+                                    <p:animEffect transition="in" filter="fade">
+                                      <p:cBhvr>
+                                        <p:cTn id="13" dur="500"/>
+                                        <p:tgtEl>
+                                          <p:spTgt spid="31"/>
+                                        </p:tgtEl>
+                                      </p:cBhvr>
+                                    </p:animEffect>
+                                  </p:childTnLst>
+                                </p:cTn>
+                              </p:par>
+                              <p:par>
+                                <p:cTn id="14" presetID="10" presetClass="entr" presetSubtype="0" fill="hold" nodeType="withEffect">
+                                  <p:stCondLst>
+                                    <p:cond delay="900"/>
+                                  </p:stCondLst>
+                                  <p:childTnLst>
+                                    <p:set>
+                                      <p:cBhvr>
+                                        <p:cTn id="15" dur="1" fill="hold">
+                                          <p:stCondLst>
+                                            <p:cond delay="0"/>
+                                          </p:stCondLst>
+                                        </p:cTn>
+                                        <p:tgtEl>
+                                          <p:spTgt spid="62"/>
+                                        </p:tgtEl>
+                                        <p:attrNameLst>
+                                          <p:attrName>style.visibility</p:attrName>
+                                        </p:attrNameLst>
+                                      </p:cBhvr>
+                                      <p:to>
+                                        <p:strVal val="visible"/>
+                                      </p:to>
+                                    </p:set>
+                                    <p:animEffect transition="in" filter="fade">
+                                      <p:cBhvr>
+                                        <p:cTn id="16" dur="500"/>
+                                        <p:tgtEl>
+                                          <p:spTgt spid="62"/>
+                                        </p:tgtEl>
+                                      </p:cBhvr>
+                                    </p:animEffect>
+                                  </p:childTnLst>
+                                </p:cTn>
+                              </p:par>
+                              <p:par>
+                                <p:cTn id="17" presetID="10" presetClass="entr" presetSubtype="0" fill="hold" nodeType="withEffect">
+                                  <p:stCondLst>
+                                    <p:cond delay="1200"/>
+                                  </p:stCondLst>
+                                  <p:childTnLst>
+                                    <p:set>
+                                      <p:cBhvr>
+                                        <p:cTn id="18" dur="1" fill="hold">
+                                          <p:stCondLst>
+                                            <p:cond delay="0"/>
+                                          </p:stCondLst>
+                                        </p:cTn>
+                                        <p:tgtEl>
+                                          <p:spTgt spid="63"/>
+                                        </p:tgtEl>
+                                        <p:attrNameLst>
+                                          <p:attrName>style.visibility</p:attrName>
+                                        </p:attrNameLst>
+                                      </p:cBhvr>
+                                      <p:to>
+                                        <p:strVal val="visible"/>
+                                      </p:to>
+                                    </p:set>
+                                    <p:animEffect transition="in" filter="fade">
+                                      <p:cBhvr>
+                                        <p:cTn id="19" dur="500"/>
+                                        <p:tgtEl>
+                                          <p:spTgt spid="63"/>
+                                        </p:tgtEl>
+                                      </p:cBhvr>
+                                    </p:animEffect>
+                                  </p:childTnLst>
+                                </p:cTn>
+                              </p:par>
+                            </p:childTnLst>
+                          </p:cTn>
+                        </p:par>
+                      </p:childTnLst>
+                    </p:cTn>
+                  </p:par>
+                </p:childTnLst>
+              </p:cTn>
+              <p:prevCondLst>
+                <p:cond evt="onPrev" delay="0">
+                  <p:tgtEl>
+                    <p:sldTgt/>
+                  </p:tgtEl>
+                </p:cond>
+              </p:prevCondLst>
+              <p:nextCondLst>
+                <p:cond evt="onNext" delay="0">
+                  <p:tgtEl>
+                    <p:sldTgt/>
+                  </p:tgtEl>
+                </p:cond>
+              </p:nextCondLst>
+            </p:seq>
+          </p:childTnLst>
+        </p:cTn>
+      </p:par>
+    </p:tnLst>
+  </p:timing>
 </p:sld>
 </file>
 
@@ -42112,6 +47754,314 @@
   <p:clrMapOvr>
     <a:masterClrMapping/>
   </p:clrMapOvr>
+  <mc:AlternateContent xmlns:mc="http://schemas.openxmlformats.org/markup-compatibility/2006">
+    <mc:Choice xmlns:p14="http://schemas.microsoft.com/office/powerpoint/2010/main" Requires="p14">
+      <p:transition spd="med" p14:dur="700">
+        <p:fade/>
+      </p:transition>
+    </mc:Choice>
+    <mc:Fallback>
+      <p:transition spd="med">
+        <p:fade/>
+      </p:transition>
+    </mc:Fallback>
+  </mc:AlternateContent>
+  <p:timing>
+    <p:tnLst>
+      <p:par>
+        <p:cTn id="1" dur="indefinite" restart="never" nodeType="tmRoot">
+          <p:childTnLst>
+            <p:seq concurrent="1" nextAc="seek">
+              <p:cTn id="2" dur="indefinite" nodeType="mainSeq">
+                <p:childTnLst>
+                  <p:par>
+                    <p:cTn id="3" fill="hold">
+                      <p:stCondLst>
+                        <p:cond delay="indefinite"/>
+                        <p:cond evt="onBegin" delay="0">
+                          <p:tn val="2"/>
+                        </p:cond>
+                      </p:stCondLst>
+                      <p:childTnLst>
+                        <p:par>
+                          <p:cTn id="4" fill="hold">
+                            <p:stCondLst>
+                              <p:cond delay="0"/>
+                            </p:stCondLst>
+                            <p:childTnLst>
+                              <p:par>
+                                <p:cTn id="5" presetID="10" presetClass="entr" presetSubtype="0" fill="hold" nodeType="afterEffect">
+                                  <p:stCondLst>
+                                    <p:cond delay="0"/>
+                                  </p:stCondLst>
+                                  <p:childTnLst>
+                                    <p:set>
+                                      <p:cBhvr>
+                                        <p:cTn id="6" dur="1" fill="hold">
+                                          <p:stCondLst>
+                                            <p:cond delay="0"/>
+                                          </p:stCondLst>
+                                        </p:cTn>
+                                        <p:tgtEl>
+                                          <p:spTgt spid="4"/>
+                                        </p:tgtEl>
+                                        <p:attrNameLst>
+                                          <p:attrName>style.visibility</p:attrName>
+                                        </p:attrNameLst>
+                                      </p:cBhvr>
+                                      <p:to>
+                                        <p:strVal val="visible"/>
+                                      </p:to>
+                                    </p:set>
+                                    <p:animEffect transition="in" filter="fade">
+                                      <p:cBhvr>
+                                        <p:cTn id="7" dur="500"/>
+                                        <p:tgtEl>
+                                          <p:spTgt spid="4"/>
+                                        </p:tgtEl>
+                                      </p:cBhvr>
+                                    </p:animEffect>
+                                  </p:childTnLst>
+                                </p:cTn>
+                              </p:par>
+                              <p:par>
+                                <p:cTn id="8" presetID="10" presetClass="entr" presetSubtype="0" fill="hold" nodeType="withEffect">
+                                  <p:stCondLst>
+                                    <p:cond delay="257"/>
+                                  </p:stCondLst>
+                                  <p:childTnLst>
+                                    <p:set>
+                                      <p:cBhvr>
+                                        <p:cTn id="9" dur="1" fill="hold">
+                                          <p:stCondLst>
+                                            <p:cond delay="0"/>
+                                          </p:stCondLst>
+                                        </p:cTn>
+                                        <p:tgtEl>
+                                          <p:spTgt spid="31"/>
+                                        </p:tgtEl>
+                                        <p:attrNameLst>
+                                          <p:attrName>style.visibility</p:attrName>
+                                        </p:attrNameLst>
+                                      </p:cBhvr>
+                                      <p:to>
+                                        <p:strVal val="visible"/>
+                                      </p:to>
+                                    </p:set>
+                                    <p:animEffect transition="in" filter="fade">
+                                      <p:cBhvr>
+                                        <p:cTn id="10" dur="500"/>
+                                        <p:tgtEl>
+                                          <p:spTgt spid="31"/>
+                                        </p:tgtEl>
+                                      </p:cBhvr>
+                                    </p:animEffect>
+                                  </p:childTnLst>
+                                </p:cTn>
+                              </p:par>
+                              <p:par>
+                                <p:cTn id="11" presetID="10" presetClass="entr" presetSubtype="0" fill="hold" nodeType="withEffect">
+                                  <p:stCondLst>
+                                    <p:cond delay="514"/>
+                                  </p:stCondLst>
+                                  <p:childTnLst>
+                                    <p:set>
+                                      <p:cBhvr>
+                                        <p:cTn id="12" dur="1" fill="hold">
+                                          <p:stCondLst>
+                                            <p:cond delay="0"/>
+                                          </p:stCondLst>
+                                        </p:cTn>
+                                        <p:tgtEl>
+                                          <p:spTgt spid="58"/>
+                                        </p:tgtEl>
+                                        <p:attrNameLst>
+                                          <p:attrName>style.visibility</p:attrName>
+                                        </p:attrNameLst>
+                                      </p:cBhvr>
+                                      <p:to>
+                                        <p:strVal val="visible"/>
+                                      </p:to>
+                                    </p:set>
+                                    <p:animEffect transition="in" filter="fade">
+                                      <p:cBhvr>
+                                        <p:cTn id="13" dur="500"/>
+                                        <p:tgtEl>
+                                          <p:spTgt spid="58"/>
+                                        </p:tgtEl>
+                                      </p:cBhvr>
+                                    </p:animEffect>
+                                  </p:childTnLst>
+                                </p:cTn>
+                              </p:par>
+                              <p:par>
+                                <p:cTn id="14" presetID="10" presetClass="entr" presetSubtype="0" fill="hold" nodeType="withEffect">
+                                  <p:stCondLst>
+                                    <p:cond delay="771"/>
+                                  </p:stCondLst>
+                                  <p:childTnLst>
+                                    <p:set>
+                                      <p:cBhvr>
+                                        <p:cTn id="15" dur="1" fill="hold">
+                                          <p:stCondLst>
+                                            <p:cond delay="0"/>
+                                          </p:stCondLst>
+                                        </p:cTn>
+                                        <p:tgtEl>
+                                          <p:spTgt spid="85"/>
+                                        </p:tgtEl>
+                                        <p:attrNameLst>
+                                          <p:attrName>style.visibility</p:attrName>
+                                        </p:attrNameLst>
+                                      </p:cBhvr>
+                                      <p:to>
+                                        <p:strVal val="visible"/>
+                                      </p:to>
+                                    </p:set>
+                                    <p:animEffect transition="in" filter="fade">
+                                      <p:cBhvr>
+                                        <p:cTn id="16" dur="500"/>
+                                        <p:tgtEl>
+                                          <p:spTgt spid="85"/>
+                                        </p:tgtEl>
+                                      </p:cBhvr>
+                                    </p:animEffect>
+                                  </p:childTnLst>
+                                </p:cTn>
+                              </p:par>
+                              <p:par>
+                                <p:cTn id="17" presetID="10" presetClass="entr" presetSubtype="0" fill="hold" nodeType="withEffect">
+                                  <p:stCondLst>
+                                    <p:cond delay="1028"/>
+                                  </p:stCondLst>
+                                  <p:childTnLst>
+                                    <p:set>
+                                      <p:cBhvr>
+                                        <p:cTn id="18" dur="1" fill="hold">
+                                          <p:stCondLst>
+                                            <p:cond delay="0"/>
+                                          </p:stCondLst>
+                                        </p:cTn>
+                                        <p:tgtEl>
+                                          <p:spTgt spid="86"/>
+                                        </p:tgtEl>
+                                        <p:attrNameLst>
+                                          <p:attrName>style.visibility</p:attrName>
+                                        </p:attrNameLst>
+                                      </p:cBhvr>
+                                      <p:to>
+                                        <p:strVal val="visible"/>
+                                      </p:to>
+                                    </p:set>
+                                    <p:animEffect transition="in" filter="fade">
+                                      <p:cBhvr>
+                                        <p:cTn id="19" dur="500"/>
+                                        <p:tgtEl>
+                                          <p:spTgt spid="86"/>
+                                        </p:tgtEl>
+                                      </p:cBhvr>
+                                    </p:animEffect>
+                                  </p:childTnLst>
+                                </p:cTn>
+                              </p:par>
+                              <p:par>
+                                <p:cTn id="20" presetID="10" presetClass="entr" presetSubtype="0" fill="hold" nodeType="withEffect">
+                                  <p:stCondLst>
+                                    <p:cond delay="1285"/>
+                                  </p:stCondLst>
+                                  <p:childTnLst>
+                                    <p:set>
+                                      <p:cBhvr>
+                                        <p:cTn id="21" dur="1" fill="hold">
+                                          <p:stCondLst>
+                                            <p:cond delay="0"/>
+                                          </p:stCondLst>
+                                        </p:cTn>
+                                        <p:tgtEl>
+                                          <p:spTgt spid="87"/>
+                                        </p:tgtEl>
+                                        <p:attrNameLst>
+                                          <p:attrName>style.visibility</p:attrName>
+                                        </p:attrNameLst>
+                                      </p:cBhvr>
+                                      <p:to>
+                                        <p:strVal val="visible"/>
+                                      </p:to>
+                                    </p:set>
+                                    <p:animEffect transition="in" filter="fade">
+                                      <p:cBhvr>
+                                        <p:cTn id="22" dur="500"/>
+                                        <p:tgtEl>
+                                          <p:spTgt spid="87"/>
+                                        </p:tgtEl>
+                                      </p:cBhvr>
+                                    </p:animEffect>
+                                  </p:childTnLst>
+                                </p:cTn>
+                              </p:par>
+                              <p:par>
+                                <p:cTn id="23" presetID="10" presetClass="entr" presetSubtype="0" fill="hold" nodeType="withEffect">
+                                  <p:stCondLst>
+                                    <p:cond delay="1542"/>
+                                  </p:stCondLst>
+                                  <p:childTnLst>
+                                    <p:set>
+                                      <p:cBhvr>
+                                        <p:cTn id="24" dur="1" fill="hold">
+                                          <p:stCondLst>
+                                            <p:cond delay="0"/>
+                                          </p:stCondLst>
+                                        </p:cTn>
+                                        <p:tgtEl>
+                                          <p:spTgt spid="88"/>
+                                        </p:tgtEl>
+                                        <p:attrNameLst>
+                                          <p:attrName>style.visibility</p:attrName>
+                                        </p:attrNameLst>
+                                      </p:cBhvr>
+                                      <p:to>
+                                        <p:strVal val="visible"/>
+                                      </p:to>
+                                    </p:set>
+                                    <p:animEffect transition="in" filter="fade">
+                                      <p:cBhvr>
+                                        <p:cTn id="25" dur="500"/>
+                                        <p:tgtEl>
+                                          <p:spTgt spid="88"/>
+                                        </p:tgtEl>
+                                      </p:cBhvr>
+                                    </p:animEffect>
+                                  </p:childTnLst>
+                                </p:cTn>
+                              </p:par>
+                            </p:childTnLst>
+                          </p:cTn>
+                        </p:par>
+                      </p:childTnLst>
+                    </p:cTn>
+                  </p:par>
+                </p:childTnLst>
+              </p:cTn>
+              <p:prevCondLst>
+                <p:cond evt="onPrev" delay="0">
+                  <p:tgtEl>
+                    <p:sldTgt/>
+                  </p:tgtEl>
+                </p:cond>
+              </p:prevCondLst>
+              <p:nextCondLst>
+                <p:cond evt="onNext" delay="0">
+                  <p:tgtEl>
+                    <p:sldTgt/>
+                  </p:tgtEl>
+                </p:cond>
+              </p:nextCondLst>
+            </p:seq>
+          </p:childTnLst>
+        </p:cTn>
+      </p:par>
+    </p:tnLst>
+  </p:timing>
 </p:sld>
 </file>
 
@@ -42712,6 +48662,244 @@
   <p:clrMapOvr>
     <a:masterClrMapping/>
   </p:clrMapOvr>
+  <mc:AlternateContent xmlns:mc="http://schemas.openxmlformats.org/markup-compatibility/2006">
+    <mc:Choice xmlns:p14="http://schemas.microsoft.com/office/powerpoint/2010/main" Requires="p14">
+      <p:transition spd="med" p14:dur="700">
+        <p:fade/>
+      </p:transition>
+    </mc:Choice>
+    <mc:Fallback>
+      <p:transition spd="med">
+        <p:fade/>
+      </p:transition>
+    </mc:Fallback>
+  </mc:AlternateContent>
+  <p:timing>
+    <p:tnLst>
+      <p:par>
+        <p:cTn id="1" dur="indefinite" restart="never" nodeType="tmRoot">
+          <p:childTnLst>
+            <p:seq concurrent="1" nextAc="seek">
+              <p:cTn id="2" dur="indefinite" nodeType="mainSeq">
+                <p:childTnLst>
+                  <p:par>
+                    <p:cTn id="3" fill="hold">
+                      <p:stCondLst>
+                        <p:cond delay="indefinite"/>
+                        <p:cond evt="onBegin" delay="0">
+                          <p:tn val="2"/>
+                        </p:cond>
+                      </p:stCondLst>
+                      <p:childTnLst>
+                        <p:par>
+                          <p:cTn id="4" fill="hold">
+                            <p:stCondLst>
+                              <p:cond delay="0"/>
+                            </p:stCondLst>
+                            <p:childTnLst>
+                              <p:par>
+                                <p:cTn id="5" presetID="10" presetClass="entr" presetSubtype="0" fill="hold" nodeType="afterEffect">
+                                  <p:stCondLst>
+                                    <p:cond delay="0"/>
+                                  </p:stCondLst>
+                                  <p:childTnLst>
+                                    <p:set>
+                                      <p:cBhvr>
+                                        <p:cTn id="6" dur="1" fill="hold">
+                                          <p:stCondLst>
+                                            <p:cond delay="0"/>
+                                          </p:stCondLst>
+                                        </p:cTn>
+                                        <p:tgtEl>
+                                          <p:spTgt spid="4"/>
+                                        </p:tgtEl>
+                                        <p:attrNameLst>
+                                          <p:attrName>style.visibility</p:attrName>
+                                        </p:attrNameLst>
+                                      </p:cBhvr>
+                                      <p:to>
+                                        <p:strVal val="visible"/>
+                                      </p:to>
+                                    </p:set>
+                                    <p:animEffect transition="in" filter="fade">
+                                      <p:cBhvr>
+                                        <p:cTn id="7" dur="500"/>
+                                        <p:tgtEl>
+                                          <p:spTgt spid="4"/>
+                                        </p:tgtEl>
+                                      </p:cBhvr>
+                                    </p:animEffect>
+                                  </p:childTnLst>
+                                </p:cTn>
+                              </p:par>
+                              <p:par>
+                                <p:cTn id="8" presetID="10" presetClass="entr" presetSubtype="0" fill="hold" nodeType="withEffect">
+                                  <p:stCondLst>
+                                    <p:cond delay="300"/>
+                                  </p:stCondLst>
+                                  <p:childTnLst>
+                                    <p:set>
+                                      <p:cBhvr>
+                                        <p:cTn id="9" dur="1" fill="hold">
+                                          <p:stCondLst>
+                                            <p:cond delay="0"/>
+                                          </p:stCondLst>
+                                        </p:cTn>
+                                        <p:tgtEl>
+                                          <p:spTgt spid="8"/>
+                                        </p:tgtEl>
+                                        <p:attrNameLst>
+                                          <p:attrName>style.visibility</p:attrName>
+                                        </p:attrNameLst>
+                                      </p:cBhvr>
+                                      <p:to>
+                                        <p:strVal val="visible"/>
+                                      </p:to>
+                                    </p:set>
+                                    <p:animEffect transition="in" filter="fade">
+                                      <p:cBhvr>
+                                        <p:cTn id="10" dur="500"/>
+                                        <p:tgtEl>
+                                          <p:spTgt spid="8"/>
+                                        </p:tgtEl>
+                                      </p:cBhvr>
+                                    </p:animEffect>
+                                  </p:childTnLst>
+                                </p:cTn>
+                              </p:par>
+                              <p:par>
+                                <p:cTn id="11" presetID="10" presetClass="entr" presetSubtype="0" fill="hold" nodeType="withEffect">
+                                  <p:stCondLst>
+                                    <p:cond delay="600"/>
+                                  </p:stCondLst>
+                                  <p:childTnLst>
+                                    <p:set>
+                                      <p:cBhvr>
+                                        <p:cTn id="12" dur="1" fill="hold">
+                                          <p:stCondLst>
+                                            <p:cond delay="0"/>
+                                          </p:stCondLst>
+                                        </p:cTn>
+                                        <p:tgtEl>
+                                          <p:spTgt spid="14"/>
+                                        </p:tgtEl>
+                                        <p:attrNameLst>
+                                          <p:attrName>style.visibility</p:attrName>
+                                        </p:attrNameLst>
+                                      </p:cBhvr>
+                                      <p:to>
+                                        <p:strVal val="visible"/>
+                                      </p:to>
+                                    </p:set>
+                                    <p:animEffect transition="in" filter="fade">
+                                      <p:cBhvr>
+                                        <p:cTn id="13" dur="500"/>
+                                        <p:tgtEl>
+                                          <p:spTgt spid="14"/>
+                                        </p:tgtEl>
+                                      </p:cBhvr>
+                                    </p:animEffect>
+                                  </p:childTnLst>
+                                </p:cTn>
+                              </p:par>
+                              <p:par>
+                                <p:cTn id="14" presetID="10" presetClass="entr" presetSubtype="0" fill="hold" nodeType="withEffect">
+                                  <p:stCondLst>
+                                    <p:cond delay="900"/>
+                                  </p:stCondLst>
+                                  <p:childTnLst>
+                                    <p:set>
+                                      <p:cBhvr>
+                                        <p:cTn id="15" dur="1" fill="hold">
+                                          <p:stCondLst>
+                                            <p:cond delay="0"/>
+                                          </p:stCondLst>
+                                        </p:cTn>
+                                        <p:tgtEl>
+                                          <p:spTgt spid="15"/>
+                                        </p:tgtEl>
+                                        <p:attrNameLst>
+                                          <p:attrName>style.visibility</p:attrName>
+                                        </p:attrNameLst>
+                                      </p:cBhvr>
+                                      <p:to>
+                                        <p:strVal val="visible"/>
+                                      </p:to>
+                                    </p:set>
+                                    <p:animEffect transition="in" filter="fade">
+                                      <p:cBhvr>
+                                        <p:cTn id="16" dur="500"/>
+                                        <p:tgtEl>
+                                          <p:spTgt spid="15"/>
+                                        </p:tgtEl>
+                                      </p:cBhvr>
+                                    </p:animEffect>
+                                  </p:childTnLst>
+                                </p:cTn>
+                              </p:par>
+                              <p:par>
+                                <p:cTn id="17" presetID="10" presetClass="entr" presetSubtype="0" fill="hold" nodeType="withEffect">
+                                  <p:stCondLst>
+                                    <p:cond delay="1200"/>
+                                  </p:stCondLst>
+                                  <p:childTnLst>
+                                    <p:set>
+                                      <p:cBhvr>
+                                        <p:cTn id="18" dur="1" fill="hold">
+                                          <p:stCondLst>
+                                            <p:cond delay="0"/>
+                                          </p:stCondLst>
+                                        </p:cTn>
+                                        <p:tgtEl>
+                                          <p:spTgt spid="16"/>
+                                        </p:tgtEl>
+                                        <p:attrNameLst>
+                                          <p:attrName>style.visibility</p:attrName>
+                                        </p:attrNameLst>
+                                      </p:cBhvr>
+                                      <p:to>
+                                        <p:strVal val="visible"/>
+                                      </p:to>
+                                    </p:set>
+                                    <p:animEffect transition="in" filter="fade">
+                                      <p:cBhvr>
+                                        <p:cTn id="19" dur="500"/>
+                                        <p:tgtEl>
+                                          <p:spTgt spid="16"/>
+                                        </p:tgtEl>
+                                      </p:cBhvr>
+                                    </p:animEffect>
+                                  </p:childTnLst>
+                                </p:cTn>
+                              </p:par>
+                            </p:childTnLst>
+                          </p:cTn>
+                        </p:par>
+                      </p:childTnLst>
+                    </p:cTn>
+                  </p:par>
+                </p:childTnLst>
+              </p:cTn>
+              <p:prevCondLst>
+                <p:cond evt="onPrev" delay="0">
+                  <p:tgtEl>
+                    <p:sldTgt/>
+                  </p:tgtEl>
+                </p:cond>
+              </p:prevCondLst>
+              <p:nextCondLst>
+                <p:cond evt="onNext" delay="0">
+                  <p:tgtEl>
+                    <p:sldTgt/>
+                  </p:tgtEl>
+                </p:cond>
+              </p:nextCondLst>
+            </p:seq>
+          </p:childTnLst>
+        </p:cTn>
+      </p:par>
+    </p:tnLst>
+  </p:timing>
 </p:sld>
 </file>
 
@@ -43490,6 +49678,209 @@
   <p:clrMapOvr>
     <a:masterClrMapping/>
   </p:clrMapOvr>
+  <mc:AlternateContent xmlns:mc="http://schemas.openxmlformats.org/markup-compatibility/2006">
+    <mc:Choice xmlns:p14="http://schemas.microsoft.com/office/powerpoint/2010/main" Requires="p14">
+      <p:transition spd="med" p14:dur="700">
+        <p:fade/>
+      </p:transition>
+    </mc:Choice>
+    <mc:Fallback>
+      <p:transition spd="med">
+        <p:fade/>
+      </p:transition>
+    </mc:Fallback>
+  </mc:AlternateContent>
+  <p:timing>
+    <p:tnLst>
+      <p:par>
+        <p:cTn id="1" dur="indefinite" restart="never" nodeType="tmRoot">
+          <p:childTnLst>
+            <p:seq concurrent="1" nextAc="seek">
+              <p:cTn id="2" dur="indefinite" nodeType="mainSeq">
+                <p:childTnLst>
+                  <p:par>
+                    <p:cTn id="3" fill="hold">
+                      <p:stCondLst>
+                        <p:cond delay="indefinite"/>
+                        <p:cond evt="onBegin" delay="0">
+                          <p:tn val="2"/>
+                        </p:cond>
+                      </p:stCondLst>
+                      <p:childTnLst>
+                        <p:par>
+                          <p:cTn id="4" fill="hold">
+                            <p:stCondLst>
+                              <p:cond delay="0"/>
+                            </p:stCondLst>
+                            <p:childTnLst>
+                              <p:par>
+                                <p:cTn id="5" presetID="10" presetClass="entr" presetSubtype="0" fill="hold" nodeType="afterEffect">
+                                  <p:stCondLst>
+                                    <p:cond delay="0"/>
+                                  </p:stCondLst>
+                                  <p:childTnLst>
+                                    <p:set>
+                                      <p:cBhvr>
+                                        <p:cTn id="6" dur="1" fill="hold">
+                                          <p:stCondLst>
+                                            <p:cond delay="0"/>
+                                          </p:stCondLst>
+                                        </p:cTn>
+                                        <p:tgtEl>
+                                          <p:spTgt spid="4"/>
+                                        </p:tgtEl>
+                                        <p:attrNameLst>
+                                          <p:attrName>style.visibility</p:attrName>
+                                        </p:attrNameLst>
+                                      </p:cBhvr>
+                                      <p:to>
+                                        <p:strVal val="visible"/>
+                                      </p:to>
+                                    </p:set>
+                                    <p:animEffect transition="in" filter="fade">
+                                      <p:cBhvr>
+                                        <p:cTn id="7" dur="500"/>
+                                        <p:tgtEl>
+                                          <p:spTgt spid="4"/>
+                                        </p:tgtEl>
+                                      </p:cBhvr>
+                                    </p:animEffect>
+                                  </p:childTnLst>
+                                </p:cTn>
+                              </p:par>
+                              <p:par>
+                                <p:cTn id="8" presetID="10" presetClass="entr" presetSubtype="0" fill="hold" nodeType="withEffect">
+                                  <p:stCondLst>
+                                    <p:cond delay="300"/>
+                                  </p:stCondLst>
+                                  <p:childTnLst>
+                                    <p:set>
+                                      <p:cBhvr>
+                                        <p:cTn id="9" dur="1" fill="hold">
+                                          <p:stCondLst>
+                                            <p:cond delay="0"/>
+                                          </p:stCondLst>
+                                        </p:cTn>
+                                        <p:tgtEl>
+                                          <p:spTgt spid="6"/>
+                                        </p:tgtEl>
+                                        <p:attrNameLst>
+                                          <p:attrName>style.visibility</p:attrName>
+                                        </p:attrNameLst>
+                                      </p:cBhvr>
+                                      <p:to>
+                                        <p:strVal val="visible"/>
+                                      </p:to>
+                                    </p:set>
+                                    <p:animEffect transition="in" filter="fade">
+                                      <p:cBhvr>
+                                        <p:cTn id="10" dur="500"/>
+                                        <p:tgtEl>
+                                          <p:spTgt spid="6"/>
+                                        </p:tgtEl>
+                                      </p:cBhvr>
+                                    </p:animEffect>
+                                  </p:childTnLst>
+                                </p:cTn>
+                              </p:par>
+                              <p:par>
+                                <p:cTn id="11" presetID="10" presetClass="entr" presetSubtype="0" fill="hold" nodeType="withEffect">
+                                  <p:stCondLst>
+                                    <p:cond delay="600"/>
+                                  </p:stCondLst>
+                                  <p:childTnLst>
+                                    <p:set>
+                                      <p:cBhvr>
+                                        <p:cTn id="12" dur="1" fill="hold">
+                                          <p:stCondLst>
+                                            <p:cond delay="0"/>
+                                          </p:stCondLst>
+                                        </p:cTn>
+                                        <p:tgtEl>
+                                          <p:spTgt spid="23"/>
+                                        </p:tgtEl>
+                                        <p:attrNameLst>
+                                          <p:attrName>style.visibility</p:attrName>
+                                        </p:attrNameLst>
+                                      </p:cBhvr>
+                                      <p:to>
+                                        <p:strVal val="visible"/>
+                                      </p:to>
+                                    </p:set>
+                                    <p:animEffect transition="in" filter="fade">
+                                      <p:cBhvr>
+                                        <p:cTn id="13" dur="500"/>
+                                        <p:tgtEl>
+                                          <p:spTgt spid="23"/>
+                                        </p:tgtEl>
+                                      </p:cBhvr>
+                                    </p:animEffect>
+                                  </p:childTnLst>
+                                </p:cTn>
+                              </p:par>
+                              <p:par>
+                                <p:cTn id="14" presetID="10" presetClass="entr" presetSubtype="0" fill="hold" nodeType="withEffect">
+                                  <p:stCondLst>
+                                    <p:cond delay="900"/>
+                                  </p:stCondLst>
+                                  <p:childTnLst>
+                                    <p:set>
+                                      <p:cBhvr>
+                                        <p:cTn id="15" dur="1" fill="hold">
+                                          <p:stCondLst>
+                                            <p:cond delay="0"/>
+                                          </p:stCondLst>
+                                        </p:cTn>
+                                        <p:tgtEl>
+                                          <p:spTgt spid="24"/>
+                                        </p:tgtEl>
+                                        <p:attrNameLst>
+                                          <p:attrName>style.visibility</p:attrName>
+                                        </p:attrNameLst>
+                                      </p:cBhvr>
+                                      <p:to>
+                                        <p:strVal val="visible"/>
+                                      </p:to>
+                                    </p:set>
+                                    <p:animEffect transition="in" filter="fade">
+                                      <p:cBhvr>
+                                        <p:cTn id="16" dur="500"/>
+                                        <p:tgtEl>
+                                          <p:spTgt spid="24"/>
+                                        </p:tgtEl>
+                                      </p:cBhvr>
+                                    </p:animEffect>
+                                  </p:childTnLst>
+                                </p:cTn>
+                              </p:par>
+                            </p:childTnLst>
+                          </p:cTn>
+                        </p:par>
+                      </p:childTnLst>
+                    </p:cTn>
+                  </p:par>
+                </p:childTnLst>
+              </p:cTn>
+              <p:prevCondLst>
+                <p:cond evt="onPrev" delay="0">
+                  <p:tgtEl>
+                    <p:sldTgt/>
+                  </p:tgtEl>
+                </p:cond>
+              </p:prevCondLst>
+              <p:nextCondLst>
+                <p:cond evt="onNext" delay="0">
+                  <p:tgtEl>
+                    <p:sldTgt/>
+                  </p:tgtEl>
+                </p:cond>
+              </p:nextCondLst>
+            </p:seq>
+          </p:childTnLst>
+        </p:cTn>
+      </p:par>
+    </p:tnLst>
+  </p:timing>
 </p:sld>
 </file>
 
@@ -46354,6 +52745,314 @@
   <p:clrMapOvr>
     <a:masterClrMapping/>
   </p:clrMapOvr>
+  <mc:AlternateContent xmlns:mc="http://schemas.openxmlformats.org/markup-compatibility/2006">
+    <mc:Choice xmlns:p14="http://schemas.microsoft.com/office/powerpoint/2010/main" Requires="p14">
+      <p:transition spd="med" p14:dur="700">
+        <p:fade/>
+      </p:transition>
+    </mc:Choice>
+    <mc:Fallback>
+      <p:transition spd="med">
+        <p:fade/>
+      </p:transition>
+    </mc:Fallback>
+  </mc:AlternateContent>
+  <p:timing>
+    <p:tnLst>
+      <p:par>
+        <p:cTn id="1" dur="indefinite" restart="never" nodeType="tmRoot">
+          <p:childTnLst>
+            <p:seq concurrent="1" nextAc="seek">
+              <p:cTn id="2" dur="indefinite" nodeType="mainSeq">
+                <p:childTnLst>
+                  <p:par>
+                    <p:cTn id="3" fill="hold">
+                      <p:stCondLst>
+                        <p:cond delay="indefinite"/>
+                        <p:cond evt="onBegin" delay="0">
+                          <p:tn val="2"/>
+                        </p:cond>
+                      </p:stCondLst>
+                      <p:childTnLst>
+                        <p:par>
+                          <p:cTn id="4" fill="hold">
+                            <p:stCondLst>
+                              <p:cond delay="0"/>
+                            </p:stCondLst>
+                            <p:childTnLst>
+                              <p:par>
+                                <p:cTn id="5" presetID="10" presetClass="entr" presetSubtype="0" fill="hold" nodeType="afterEffect">
+                                  <p:stCondLst>
+                                    <p:cond delay="0"/>
+                                  </p:stCondLst>
+                                  <p:childTnLst>
+                                    <p:set>
+                                      <p:cBhvr>
+                                        <p:cTn id="6" dur="1" fill="hold">
+                                          <p:stCondLst>
+                                            <p:cond delay="0"/>
+                                          </p:stCondLst>
+                                        </p:cTn>
+                                        <p:tgtEl>
+                                          <p:spTgt spid="4"/>
+                                        </p:tgtEl>
+                                        <p:attrNameLst>
+                                          <p:attrName>style.visibility</p:attrName>
+                                        </p:attrNameLst>
+                                      </p:cBhvr>
+                                      <p:to>
+                                        <p:strVal val="visible"/>
+                                      </p:to>
+                                    </p:set>
+                                    <p:animEffect transition="in" filter="fade">
+                                      <p:cBhvr>
+                                        <p:cTn id="7" dur="500"/>
+                                        <p:tgtEl>
+                                          <p:spTgt spid="4"/>
+                                        </p:tgtEl>
+                                      </p:cBhvr>
+                                    </p:animEffect>
+                                  </p:childTnLst>
+                                </p:cTn>
+                              </p:par>
+                              <p:par>
+                                <p:cTn id="8" presetID="10" presetClass="entr" presetSubtype="0" fill="hold" nodeType="withEffect">
+                                  <p:stCondLst>
+                                    <p:cond delay="257"/>
+                                  </p:stCondLst>
+                                  <p:childTnLst>
+                                    <p:set>
+                                      <p:cBhvr>
+                                        <p:cTn id="9" dur="1" fill="hold">
+                                          <p:stCondLst>
+                                            <p:cond delay="0"/>
+                                          </p:stCondLst>
+                                        </p:cTn>
+                                        <p:tgtEl>
+                                          <p:spTgt spid="76"/>
+                                        </p:tgtEl>
+                                        <p:attrNameLst>
+                                          <p:attrName>style.visibility</p:attrName>
+                                        </p:attrNameLst>
+                                      </p:cBhvr>
+                                      <p:to>
+                                        <p:strVal val="visible"/>
+                                      </p:to>
+                                    </p:set>
+                                    <p:animEffect transition="in" filter="fade">
+                                      <p:cBhvr>
+                                        <p:cTn id="10" dur="500"/>
+                                        <p:tgtEl>
+                                          <p:spTgt spid="76"/>
+                                        </p:tgtEl>
+                                      </p:cBhvr>
+                                    </p:animEffect>
+                                  </p:childTnLst>
+                                </p:cTn>
+                              </p:par>
+                              <p:par>
+                                <p:cTn id="11" presetID="10" presetClass="entr" presetSubtype="0" fill="hold" nodeType="withEffect">
+                                  <p:stCondLst>
+                                    <p:cond delay="514"/>
+                                  </p:stCondLst>
+                                  <p:childTnLst>
+                                    <p:set>
+                                      <p:cBhvr>
+                                        <p:cTn id="12" dur="1" fill="hold">
+                                          <p:stCondLst>
+                                            <p:cond delay="0"/>
+                                          </p:stCondLst>
+                                        </p:cTn>
+                                        <p:tgtEl>
+                                          <p:spTgt spid="77"/>
+                                        </p:tgtEl>
+                                        <p:attrNameLst>
+                                          <p:attrName>style.visibility</p:attrName>
+                                        </p:attrNameLst>
+                                      </p:cBhvr>
+                                      <p:to>
+                                        <p:strVal val="visible"/>
+                                      </p:to>
+                                    </p:set>
+                                    <p:animEffect transition="in" filter="fade">
+                                      <p:cBhvr>
+                                        <p:cTn id="13" dur="500"/>
+                                        <p:tgtEl>
+                                          <p:spTgt spid="77"/>
+                                        </p:tgtEl>
+                                      </p:cBhvr>
+                                    </p:animEffect>
+                                  </p:childTnLst>
+                                </p:cTn>
+                              </p:par>
+                              <p:par>
+                                <p:cTn id="14" presetID="10" presetClass="entr" presetSubtype="0" fill="hold" nodeType="withEffect">
+                                  <p:stCondLst>
+                                    <p:cond delay="771"/>
+                                  </p:stCondLst>
+                                  <p:childTnLst>
+                                    <p:set>
+                                      <p:cBhvr>
+                                        <p:cTn id="15" dur="1" fill="hold">
+                                          <p:stCondLst>
+                                            <p:cond delay="0"/>
+                                          </p:stCondLst>
+                                        </p:cTn>
+                                        <p:tgtEl>
+                                          <p:spTgt spid="78"/>
+                                        </p:tgtEl>
+                                        <p:attrNameLst>
+                                          <p:attrName>style.visibility</p:attrName>
+                                        </p:attrNameLst>
+                                      </p:cBhvr>
+                                      <p:to>
+                                        <p:strVal val="visible"/>
+                                      </p:to>
+                                    </p:set>
+                                    <p:animEffect transition="in" filter="fade">
+                                      <p:cBhvr>
+                                        <p:cTn id="16" dur="500"/>
+                                        <p:tgtEl>
+                                          <p:spTgt spid="78"/>
+                                        </p:tgtEl>
+                                      </p:cBhvr>
+                                    </p:animEffect>
+                                  </p:childTnLst>
+                                </p:cTn>
+                              </p:par>
+                              <p:par>
+                                <p:cTn id="17" presetID="10" presetClass="entr" presetSubtype="0" fill="hold" nodeType="withEffect">
+                                  <p:stCondLst>
+                                    <p:cond delay="1028"/>
+                                  </p:stCondLst>
+                                  <p:childTnLst>
+                                    <p:set>
+                                      <p:cBhvr>
+                                        <p:cTn id="18" dur="1" fill="hold">
+                                          <p:stCondLst>
+                                            <p:cond delay="0"/>
+                                          </p:stCondLst>
+                                        </p:cTn>
+                                        <p:tgtEl>
+                                          <p:spTgt spid="88"/>
+                                        </p:tgtEl>
+                                        <p:attrNameLst>
+                                          <p:attrName>style.visibility</p:attrName>
+                                        </p:attrNameLst>
+                                      </p:cBhvr>
+                                      <p:to>
+                                        <p:strVal val="visible"/>
+                                      </p:to>
+                                    </p:set>
+                                    <p:animEffect transition="in" filter="fade">
+                                      <p:cBhvr>
+                                        <p:cTn id="19" dur="500"/>
+                                        <p:tgtEl>
+                                          <p:spTgt spid="88"/>
+                                        </p:tgtEl>
+                                      </p:cBhvr>
+                                    </p:animEffect>
+                                  </p:childTnLst>
+                                </p:cTn>
+                              </p:par>
+                              <p:par>
+                                <p:cTn id="20" presetID="10" presetClass="entr" presetSubtype="0" fill="hold" nodeType="withEffect">
+                                  <p:stCondLst>
+                                    <p:cond delay="1285"/>
+                                  </p:stCondLst>
+                                  <p:childTnLst>
+                                    <p:set>
+                                      <p:cBhvr>
+                                        <p:cTn id="21" dur="1" fill="hold">
+                                          <p:stCondLst>
+                                            <p:cond delay="0"/>
+                                          </p:stCondLst>
+                                        </p:cTn>
+                                        <p:tgtEl>
+                                          <p:spTgt spid="89"/>
+                                        </p:tgtEl>
+                                        <p:attrNameLst>
+                                          <p:attrName>style.visibility</p:attrName>
+                                        </p:attrNameLst>
+                                      </p:cBhvr>
+                                      <p:to>
+                                        <p:strVal val="visible"/>
+                                      </p:to>
+                                    </p:set>
+                                    <p:animEffect transition="in" filter="fade">
+                                      <p:cBhvr>
+                                        <p:cTn id="22" dur="500"/>
+                                        <p:tgtEl>
+                                          <p:spTgt spid="89"/>
+                                        </p:tgtEl>
+                                      </p:cBhvr>
+                                    </p:animEffect>
+                                  </p:childTnLst>
+                                </p:cTn>
+                              </p:par>
+                              <p:par>
+                                <p:cTn id="23" presetID="10" presetClass="entr" presetSubtype="0" fill="hold" nodeType="withEffect">
+                                  <p:stCondLst>
+                                    <p:cond delay="1542"/>
+                                  </p:stCondLst>
+                                  <p:childTnLst>
+                                    <p:set>
+                                      <p:cBhvr>
+                                        <p:cTn id="24" dur="1" fill="hold">
+                                          <p:stCondLst>
+                                            <p:cond delay="0"/>
+                                          </p:stCondLst>
+                                        </p:cTn>
+                                        <p:tgtEl>
+                                          <p:spTgt spid="90"/>
+                                        </p:tgtEl>
+                                        <p:attrNameLst>
+                                          <p:attrName>style.visibility</p:attrName>
+                                        </p:attrNameLst>
+                                      </p:cBhvr>
+                                      <p:to>
+                                        <p:strVal val="visible"/>
+                                      </p:to>
+                                    </p:set>
+                                    <p:animEffect transition="in" filter="fade">
+                                      <p:cBhvr>
+                                        <p:cTn id="25" dur="500"/>
+                                        <p:tgtEl>
+                                          <p:spTgt spid="90"/>
+                                        </p:tgtEl>
+                                      </p:cBhvr>
+                                    </p:animEffect>
+                                  </p:childTnLst>
+                                </p:cTn>
+                              </p:par>
+                            </p:childTnLst>
+                          </p:cTn>
+                        </p:par>
+                      </p:childTnLst>
+                    </p:cTn>
+                  </p:par>
+                </p:childTnLst>
+              </p:cTn>
+              <p:prevCondLst>
+                <p:cond evt="onPrev" delay="0">
+                  <p:tgtEl>
+                    <p:sldTgt/>
+                  </p:tgtEl>
+                </p:cond>
+              </p:prevCondLst>
+              <p:nextCondLst>
+                <p:cond evt="onNext" delay="0">
+                  <p:tgtEl>
+                    <p:sldTgt/>
+                  </p:tgtEl>
+                </p:cond>
+              </p:nextCondLst>
+            </p:seq>
+          </p:childTnLst>
+        </p:cTn>
+      </p:par>
+    </p:tnLst>
+  </p:timing>
 </p:sld>
 </file>
 
@@ -48740,6 +55439,419 @@
   <p:clrMapOvr>
     <a:masterClrMapping/>
   </p:clrMapOvr>
+  <mc:AlternateContent xmlns:mc="http://schemas.openxmlformats.org/markup-compatibility/2006">
+    <mc:Choice xmlns:p14="http://schemas.microsoft.com/office/powerpoint/2010/main" Requires="p14">
+      <p:transition spd="med" p14:dur="700">
+        <p:fade/>
+      </p:transition>
+    </mc:Choice>
+    <mc:Fallback>
+      <p:transition spd="med">
+        <p:fade/>
+      </p:transition>
+    </mc:Fallback>
+  </mc:AlternateContent>
+  <p:timing>
+    <p:tnLst>
+      <p:par>
+        <p:cTn id="1" dur="indefinite" restart="never" nodeType="tmRoot">
+          <p:childTnLst>
+            <p:seq concurrent="1" nextAc="seek">
+              <p:cTn id="2" dur="indefinite" nodeType="mainSeq">
+                <p:childTnLst>
+                  <p:par>
+                    <p:cTn id="3" fill="hold">
+                      <p:stCondLst>
+                        <p:cond delay="indefinite"/>
+                        <p:cond evt="onBegin" delay="0">
+                          <p:tn val="2"/>
+                        </p:cond>
+                      </p:stCondLst>
+                      <p:childTnLst>
+                        <p:par>
+                          <p:cTn id="4" fill="hold">
+                            <p:stCondLst>
+                              <p:cond delay="0"/>
+                            </p:stCondLst>
+                            <p:childTnLst>
+                              <p:par>
+                                <p:cTn id="5" presetID="10" presetClass="entr" presetSubtype="0" fill="hold" nodeType="afterEffect">
+                                  <p:stCondLst>
+                                    <p:cond delay="0"/>
+                                  </p:stCondLst>
+                                  <p:childTnLst>
+                                    <p:set>
+                                      <p:cBhvr>
+                                        <p:cTn id="6" dur="1" fill="hold">
+                                          <p:stCondLst>
+                                            <p:cond delay="0"/>
+                                          </p:stCondLst>
+                                        </p:cTn>
+                                        <p:tgtEl>
+                                          <p:spTgt spid="4"/>
+                                        </p:tgtEl>
+                                        <p:attrNameLst>
+                                          <p:attrName>style.visibility</p:attrName>
+                                        </p:attrNameLst>
+                                      </p:cBhvr>
+                                      <p:to>
+                                        <p:strVal val="visible"/>
+                                      </p:to>
+                                    </p:set>
+                                    <p:animEffect transition="in" filter="fade">
+                                      <p:cBhvr>
+                                        <p:cTn id="7" dur="500"/>
+                                        <p:tgtEl>
+                                          <p:spTgt spid="4"/>
+                                        </p:tgtEl>
+                                      </p:cBhvr>
+                                    </p:animEffect>
+                                  </p:childTnLst>
+                                </p:cTn>
+                              </p:par>
+                              <p:par>
+                                <p:cTn id="8" presetID="10" presetClass="entr" presetSubtype="0" fill="hold" nodeType="withEffect">
+                                  <p:stCondLst>
+                                    <p:cond delay="180"/>
+                                  </p:stCondLst>
+                                  <p:childTnLst>
+                                    <p:set>
+                                      <p:cBhvr>
+                                        <p:cTn id="9" dur="1" fill="hold">
+                                          <p:stCondLst>
+                                            <p:cond delay="0"/>
+                                          </p:stCondLst>
+                                        </p:cTn>
+                                        <p:tgtEl>
+                                          <p:spTgt spid="5"/>
+                                        </p:tgtEl>
+                                        <p:attrNameLst>
+                                          <p:attrName>style.visibility</p:attrName>
+                                        </p:attrNameLst>
+                                      </p:cBhvr>
+                                      <p:to>
+                                        <p:strVal val="visible"/>
+                                      </p:to>
+                                    </p:set>
+                                    <p:animEffect transition="in" filter="fade">
+                                      <p:cBhvr>
+                                        <p:cTn id="10" dur="500"/>
+                                        <p:tgtEl>
+                                          <p:spTgt spid="5"/>
+                                        </p:tgtEl>
+                                      </p:cBhvr>
+                                    </p:animEffect>
+                                  </p:childTnLst>
+                                </p:cTn>
+                              </p:par>
+                              <p:par>
+                                <p:cTn id="11" presetID="10" presetClass="entr" presetSubtype="0" fill="hold" nodeType="withEffect">
+                                  <p:stCondLst>
+                                    <p:cond delay="360"/>
+                                  </p:stCondLst>
+                                  <p:childTnLst>
+                                    <p:set>
+                                      <p:cBhvr>
+                                        <p:cTn id="12" dur="1" fill="hold">
+                                          <p:stCondLst>
+                                            <p:cond delay="0"/>
+                                          </p:stCondLst>
+                                        </p:cTn>
+                                        <p:tgtEl>
+                                          <p:spTgt spid="6"/>
+                                        </p:tgtEl>
+                                        <p:attrNameLst>
+                                          <p:attrName>style.visibility</p:attrName>
+                                        </p:attrNameLst>
+                                      </p:cBhvr>
+                                      <p:to>
+                                        <p:strVal val="visible"/>
+                                      </p:to>
+                                    </p:set>
+                                    <p:animEffect transition="in" filter="fade">
+                                      <p:cBhvr>
+                                        <p:cTn id="13" dur="500"/>
+                                        <p:tgtEl>
+                                          <p:spTgt spid="6"/>
+                                        </p:tgtEl>
+                                      </p:cBhvr>
+                                    </p:animEffect>
+                                  </p:childTnLst>
+                                </p:cTn>
+                              </p:par>
+                              <p:par>
+                                <p:cTn id="14" presetID="10" presetClass="entr" presetSubtype="0" fill="hold" nodeType="withEffect">
+                                  <p:stCondLst>
+                                    <p:cond delay="540"/>
+                                  </p:stCondLst>
+                                  <p:childTnLst>
+                                    <p:set>
+                                      <p:cBhvr>
+                                        <p:cTn id="15" dur="1" fill="hold">
+                                          <p:stCondLst>
+                                            <p:cond delay="0"/>
+                                          </p:stCondLst>
+                                        </p:cTn>
+                                        <p:tgtEl>
+                                          <p:spTgt spid="7"/>
+                                        </p:tgtEl>
+                                        <p:attrNameLst>
+                                          <p:attrName>style.visibility</p:attrName>
+                                        </p:attrNameLst>
+                                      </p:cBhvr>
+                                      <p:to>
+                                        <p:strVal val="visible"/>
+                                      </p:to>
+                                    </p:set>
+                                    <p:animEffect transition="in" filter="fade">
+                                      <p:cBhvr>
+                                        <p:cTn id="16" dur="500"/>
+                                        <p:tgtEl>
+                                          <p:spTgt spid="7"/>
+                                        </p:tgtEl>
+                                      </p:cBhvr>
+                                    </p:animEffect>
+                                  </p:childTnLst>
+                                </p:cTn>
+                              </p:par>
+                              <p:par>
+                                <p:cTn id="17" presetID="10" presetClass="entr" presetSubtype="0" fill="hold" nodeType="withEffect">
+                                  <p:stCondLst>
+                                    <p:cond delay="720"/>
+                                  </p:stCondLst>
+                                  <p:childTnLst>
+                                    <p:set>
+                                      <p:cBhvr>
+                                        <p:cTn id="18" dur="1" fill="hold">
+                                          <p:stCondLst>
+                                            <p:cond delay="0"/>
+                                          </p:stCondLst>
+                                        </p:cTn>
+                                        <p:tgtEl>
+                                          <p:spTgt spid="8"/>
+                                        </p:tgtEl>
+                                        <p:attrNameLst>
+                                          <p:attrName>style.visibility</p:attrName>
+                                        </p:attrNameLst>
+                                      </p:cBhvr>
+                                      <p:to>
+                                        <p:strVal val="visible"/>
+                                      </p:to>
+                                    </p:set>
+                                    <p:animEffect transition="in" filter="fade">
+                                      <p:cBhvr>
+                                        <p:cTn id="19" dur="500"/>
+                                        <p:tgtEl>
+                                          <p:spTgt spid="8"/>
+                                        </p:tgtEl>
+                                      </p:cBhvr>
+                                    </p:animEffect>
+                                  </p:childTnLst>
+                                </p:cTn>
+                              </p:par>
+                              <p:par>
+                                <p:cTn id="20" presetID="10" presetClass="entr" presetSubtype="0" fill="hold" nodeType="withEffect">
+                                  <p:stCondLst>
+                                    <p:cond delay="900"/>
+                                  </p:stCondLst>
+                                  <p:childTnLst>
+                                    <p:set>
+                                      <p:cBhvr>
+                                        <p:cTn id="21" dur="1" fill="hold">
+                                          <p:stCondLst>
+                                            <p:cond delay="0"/>
+                                          </p:stCondLst>
+                                        </p:cTn>
+                                        <p:tgtEl>
+                                          <p:spTgt spid="9"/>
+                                        </p:tgtEl>
+                                        <p:attrNameLst>
+                                          <p:attrName>style.visibility</p:attrName>
+                                        </p:attrNameLst>
+                                      </p:cBhvr>
+                                      <p:to>
+                                        <p:strVal val="visible"/>
+                                      </p:to>
+                                    </p:set>
+                                    <p:animEffect transition="in" filter="fade">
+                                      <p:cBhvr>
+                                        <p:cTn id="22" dur="500"/>
+                                        <p:tgtEl>
+                                          <p:spTgt spid="9"/>
+                                        </p:tgtEl>
+                                      </p:cBhvr>
+                                    </p:animEffect>
+                                  </p:childTnLst>
+                                </p:cTn>
+                              </p:par>
+                              <p:par>
+                                <p:cTn id="23" presetID="10" presetClass="entr" presetSubtype="0" fill="hold" nodeType="withEffect">
+                                  <p:stCondLst>
+                                    <p:cond delay="1080"/>
+                                  </p:stCondLst>
+                                  <p:childTnLst>
+                                    <p:set>
+                                      <p:cBhvr>
+                                        <p:cTn id="24" dur="1" fill="hold">
+                                          <p:stCondLst>
+                                            <p:cond delay="0"/>
+                                          </p:stCondLst>
+                                        </p:cTn>
+                                        <p:tgtEl>
+                                          <p:spTgt spid="39"/>
+                                        </p:tgtEl>
+                                        <p:attrNameLst>
+                                          <p:attrName>style.visibility</p:attrName>
+                                        </p:attrNameLst>
+                                      </p:cBhvr>
+                                      <p:to>
+                                        <p:strVal val="visible"/>
+                                      </p:to>
+                                    </p:set>
+                                    <p:animEffect transition="in" filter="fade">
+                                      <p:cBhvr>
+                                        <p:cTn id="25" dur="500"/>
+                                        <p:tgtEl>
+                                          <p:spTgt spid="39"/>
+                                        </p:tgtEl>
+                                      </p:cBhvr>
+                                    </p:animEffect>
+                                  </p:childTnLst>
+                                </p:cTn>
+                              </p:par>
+                              <p:par>
+                                <p:cTn id="26" presetID="10" presetClass="entr" presetSubtype="0" fill="hold" nodeType="withEffect">
+                                  <p:stCondLst>
+                                    <p:cond delay="1260"/>
+                                  </p:stCondLst>
+                                  <p:childTnLst>
+                                    <p:set>
+                                      <p:cBhvr>
+                                        <p:cTn id="27" dur="1" fill="hold">
+                                          <p:stCondLst>
+                                            <p:cond delay="0"/>
+                                          </p:stCondLst>
+                                        </p:cTn>
+                                        <p:tgtEl>
+                                          <p:spTgt spid="75"/>
+                                        </p:tgtEl>
+                                        <p:attrNameLst>
+                                          <p:attrName>style.visibility</p:attrName>
+                                        </p:attrNameLst>
+                                      </p:cBhvr>
+                                      <p:to>
+                                        <p:strVal val="visible"/>
+                                      </p:to>
+                                    </p:set>
+                                    <p:animEffect transition="in" filter="fade">
+                                      <p:cBhvr>
+                                        <p:cTn id="28" dur="500"/>
+                                        <p:tgtEl>
+                                          <p:spTgt spid="75"/>
+                                        </p:tgtEl>
+                                      </p:cBhvr>
+                                    </p:animEffect>
+                                  </p:childTnLst>
+                                </p:cTn>
+                              </p:par>
+                              <p:par>
+                                <p:cTn id="29" presetID="10" presetClass="entr" presetSubtype="0" fill="hold" nodeType="withEffect">
+                                  <p:stCondLst>
+                                    <p:cond delay="1440"/>
+                                  </p:stCondLst>
+                                  <p:childTnLst>
+                                    <p:set>
+                                      <p:cBhvr>
+                                        <p:cTn id="30" dur="1" fill="hold">
+                                          <p:stCondLst>
+                                            <p:cond delay="0"/>
+                                          </p:stCondLst>
+                                        </p:cTn>
+                                        <p:tgtEl>
+                                          <p:spTgt spid="76"/>
+                                        </p:tgtEl>
+                                        <p:attrNameLst>
+                                          <p:attrName>style.visibility</p:attrName>
+                                        </p:attrNameLst>
+                                      </p:cBhvr>
+                                      <p:to>
+                                        <p:strVal val="visible"/>
+                                      </p:to>
+                                    </p:set>
+                                    <p:animEffect transition="in" filter="fade">
+                                      <p:cBhvr>
+                                        <p:cTn id="31" dur="500"/>
+                                        <p:tgtEl>
+                                          <p:spTgt spid="76"/>
+                                        </p:tgtEl>
+                                      </p:cBhvr>
+                                    </p:animEffect>
+                                  </p:childTnLst>
+                                </p:cTn>
+                              </p:par>
+                              <p:par>
+                                <p:cTn id="32" presetID="10" presetClass="entr" presetSubtype="0" fill="hold" nodeType="withEffect">
+                                  <p:stCondLst>
+                                    <p:cond delay="1620"/>
+                                  </p:stCondLst>
+                                  <p:childTnLst>
+                                    <p:set>
+                                      <p:cBhvr>
+                                        <p:cTn id="33" dur="1" fill="hold">
+                                          <p:stCondLst>
+                                            <p:cond delay="0"/>
+                                          </p:stCondLst>
+                                        </p:cTn>
+                                        <p:tgtEl>
+                                          <p:spTgt spid="77"/>
+                                        </p:tgtEl>
+                                        <p:attrNameLst>
+                                          <p:attrName>style.visibility</p:attrName>
+                                        </p:attrNameLst>
+                                      </p:cBhvr>
+                                      <p:to>
+                                        <p:strVal val="visible"/>
+                                      </p:to>
+                                    </p:set>
+                                    <p:animEffect transition="in" filter="fade">
+                                      <p:cBhvr>
+                                        <p:cTn id="34" dur="500"/>
+                                        <p:tgtEl>
+                                          <p:spTgt spid="77"/>
+                                        </p:tgtEl>
+                                      </p:cBhvr>
+                                    </p:animEffect>
+                                  </p:childTnLst>
+                                </p:cTn>
+                              </p:par>
+                            </p:childTnLst>
+                          </p:cTn>
+                        </p:par>
+                      </p:childTnLst>
+                    </p:cTn>
+                  </p:par>
+                </p:childTnLst>
+              </p:cTn>
+              <p:prevCondLst>
+                <p:cond evt="onPrev" delay="0">
+                  <p:tgtEl>
+                    <p:sldTgt/>
+                  </p:tgtEl>
+                </p:cond>
+              </p:prevCondLst>
+              <p:nextCondLst>
+                <p:cond evt="onNext" delay="0">
+                  <p:tgtEl>
+                    <p:sldTgt/>
+                  </p:tgtEl>
+                </p:cond>
+              </p:nextCondLst>
+            </p:seq>
+          </p:childTnLst>
+        </p:cTn>
+      </p:par>
+    </p:tnLst>
+  </p:timing>
 </p:sld>
 </file>
 
